--- a/Итоги Q1 2026 — Контур.pptx
+++ b/Итоги Q1 2026 — Контур.pptx
@@ -26,7 +26,6 @@
     <p:sldId id="348" r:id="rId123"/>
     <p:sldId id="349" r:id="rId124"/>
     <p:sldId id="350" r:id="rId125"/>
-    <p:sldId id="351" r:id="rId126"/>
   </p:sldIdLst>
   <p:sldSz cy="6858000" cx="12192000"/>
   <p:notesSz cx="6858000" cy="9144000"/>
@@ -45065,697 +45064,7 @@
       <p:grpSpPr/>
       <p:sp>
         <p:nvSpPr>
-          <p:cNvPr id="570" name="Google Shape;570;p24"/>
-          <p:cNvSpPr txBox="1"/>
-          <p:nvPr>
-            <p:ph idx="1" type="body"/>
-          </p:nvPr>
-        </p:nvSpPr>
-        <p:spPr>
-          <a:xfrm>
-            <a:off x="8148863" y="4790663"/>
-            <a:ext cx="3240000" cy="1080000"/>
-          </a:xfrm>
-          <a:prstGeom prst="rect">
-            <a:avLst/>
-          </a:prstGeom>
-          <a:noFill/>
-          <a:ln>
-            <a:noFill/>
-          </a:ln>
-        </p:spPr>
-        <p:txBody>
-          <a:bodyPr anchorCtr="0" anchor="t" bIns="45700" lIns="0" spcFirstLastPara="1" rIns="91425" wrap="square" tIns="45700">
-            <a:noAutofit/>
-          </a:bodyPr>
-          <a:lstStyle/>
-          <a:p>
-            <a:pPr indent="-9525" lvl="0" marL="9525" rtl="0" algn="l">
-              <a:lnSpc>
-                <a:spcPct val="100000"/>
-              </a:lnSpc>
-              <a:spcBef>
-                <a:spcPts val="0"/>
-              </a:spcBef>
-              <a:spcAft>
-                <a:spcPts val="0"/>
-              </a:spcAft>
-              <a:buClr>
-                <a:schemeClr val="dk1"/>
-              </a:buClr>
-              <a:buSzPts val="1600"/>
-              <a:buNone/>
-            </a:pPr>
-            <a:r>
-              <a:rPr lang="ru-RU">
-                <a:latin typeface="Montserrat"/>
-              </a:rPr>
-              <a:t>топ-тариф ОФД-36</a:t>
-            </a:r>
-            <a:endParaRPr/>
-          </a:p>
-        </p:txBody>
-      </p:sp>
-      <p:sp>
-        <p:nvSpPr>
-          <p:cNvPr id="571" name="Google Shape;571;p24"/>
-          <p:cNvSpPr txBox="1"/>
-          <p:nvPr>
-            <p:ph idx="2" type="body"/>
-          </p:nvPr>
-        </p:nvSpPr>
-        <p:spPr>
-          <a:xfrm>
-            <a:off x="8148863" y="3809879"/>
-            <a:ext cx="3240000" cy="901800"/>
-          </a:xfrm>
-          <a:prstGeom prst="rect">
-            <a:avLst/>
-          </a:prstGeom>
-          <a:noFill/>
-          <a:ln>
-            <a:noFill/>
-          </a:ln>
-        </p:spPr>
-        <p:txBody>
-          <a:bodyPr anchorCtr="0" anchor="t" bIns="45700" lIns="0" spcFirstLastPara="1" rIns="91425" wrap="square" tIns="45700">
-            <a:noAutofit/>
-          </a:bodyPr>
-          <a:lstStyle/>
-          <a:p>
-            <a:pPr indent="0" lvl="0" marL="0" rtl="0" algn="l">
-              <a:lnSpc>
-                <a:spcPct val="90000"/>
-              </a:lnSpc>
-              <a:spcBef>
-                <a:spcPts val="0"/>
-              </a:spcBef>
-              <a:spcAft>
-                <a:spcPts val="0"/>
-              </a:spcAft>
-              <a:buClr>
-                <a:schemeClr val="dk1"/>
-              </a:buClr>
-              <a:buSzPts val="6000"/>
-              <a:buNone/>
-            </a:pPr>
-            <a:r>
-              <a:rPr b="1" lang="ru-RU">
-                <a:latin typeface="Montserrat"/>
-                <a:ea typeface="Montserrat"/>
-                <a:cs typeface="Montserrat"/>
-                <a:sym typeface="Montserrat"/>
-              </a:rPr>
-              <a:t>3,93 млн ₽</a:t>
-            </a:r>
-            <a:endParaRPr b="1">
-              <a:latin typeface="Montserrat"/>
-              <a:ea typeface="Montserrat"/>
-              <a:cs typeface="Montserrat"/>
-              <a:sym typeface="Montserrat"/>
-            </a:endParaRPr>
-          </a:p>
-        </p:txBody>
-      </p:sp>
-      <p:sp>
-        <p:nvSpPr>
-          <p:cNvPr id="572" name="Google Shape;572;p24"/>
-          <p:cNvSpPr txBox="1"/>
-          <p:nvPr>
-            <p:ph idx="3" type="body"/>
-          </p:nvPr>
-        </p:nvSpPr>
-        <p:spPr>
-          <a:xfrm>
-            <a:off x="8148863" y="2350380"/>
-            <a:ext cx="3240000" cy="1080000"/>
-          </a:xfrm>
-          <a:prstGeom prst="rect">
-            <a:avLst/>
-          </a:prstGeom>
-          <a:noFill/>
-          <a:ln>
-            <a:noFill/>
-          </a:ln>
-        </p:spPr>
-        <p:txBody>
-          <a:bodyPr anchorCtr="0" anchor="t" bIns="45700" lIns="0" spcFirstLastPara="1" rIns="91425" wrap="square" tIns="45700">
-            <a:noAutofit/>
-          </a:bodyPr>
-          <a:lstStyle/>
-          <a:p>
-            <a:pPr indent="-9525" lvl="0" marL="9525" rtl="0" algn="l">
-              <a:lnSpc>
-                <a:spcPct val="100000"/>
-              </a:lnSpc>
-              <a:spcBef>
-                <a:spcPts val="0"/>
-              </a:spcBef>
-              <a:spcAft>
-                <a:spcPts val="0"/>
-              </a:spcAft>
-              <a:buClr>
-                <a:schemeClr val="dk1"/>
-              </a:buClr>
-              <a:buSzPts val="1600"/>
-              <a:buNone/>
-            </a:pPr>
-            <a:r>
-              <a:rPr lang="ru-RU">
-                <a:latin typeface="Montserrat"/>
-              </a:rPr>
-              <a:t>год к году</a:t>
-            </a:r>
-            <a:endParaRPr/>
-          </a:p>
-        </p:txBody>
-      </p:sp>
-      <p:sp>
-        <p:nvSpPr>
-          <p:cNvPr id="573" name="Google Shape;573;p24"/>
-          <p:cNvSpPr txBox="1"/>
-          <p:nvPr>
-            <p:ph idx="4" type="body"/>
-          </p:nvPr>
-        </p:nvSpPr>
-        <p:spPr>
-          <a:xfrm>
-            <a:off x="8148863" y="1382737"/>
-            <a:ext cx="3240000" cy="901800"/>
-          </a:xfrm>
-          <a:prstGeom prst="rect">
-            <a:avLst/>
-          </a:prstGeom>
-          <a:noFill/>
-          <a:ln>
-            <a:noFill/>
-          </a:ln>
-        </p:spPr>
-        <p:txBody>
-          <a:bodyPr anchorCtr="0" anchor="t" bIns="45700" lIns="0" spcFirstLastPara="1" rIns="91425" wrap="square" tIns="45700">
-            <a:noAutofit/>
-          </a:bodyPr>
-          <a:lstStyle/>
-          <a:p>
-            <a:pPr indent="0" lvl="0" marL="0" rtl="0" algn="l">
-              <a:lnSpc>
-                <a:spcPct val="90000"/>
-              </a:lnSpc>
-              <a:spcBef>
-                <a:spcPts val="0"/>
-              </a:spcBef>
-              <a:spcAft>
-                <a:spcPts val="0"/>
-              </a:spcAft>
-              <a:buClr>
-                <a:schemeClr val="dk1"/>
-              </a:buClr>
-              <a:buSzPts val="6000"/>
-              <a:buNone/>
-            </a:pPr>
-            <a:r>
-              <a:rPr b="1" lang="ru-RU">
-                <a:solidFill>
-                  <a:schemeClr val="accent1"/>
-                </a:solidFill>
-                <a:latin typeface="Montserrat"/>
-                <a:ea typeface="Montserrat"/>
-                <a:cs typeface="Montserrat"/>
-                <a:sym typeface="Montserrat"/>
-              </a:rPr>
-              <a:t>−4,9 %</a:t>
-            </a:r>
-            <a:endParaRPr b="1">
-              <a:solidFill>
-                <a:schemeClr val="accent1"/>
-              </a:solidFill>
-              <a:latin typeface="Montserrat"/>
-              <a:ea typeface="Montserrat"/>
-              <a:cs typeface="Montserrat"/>
-              <a:sym typeface="Montserrat"/>
-            </a:endParaRPr>
-          </a:p>
-        </p:txBody>
-      </p:sp>
-      <p:sp>
-        <p:nvSpPr>
-          <p:cNvPr id="574" name="Google Shape;574;p24"/>
-          <p:cNvSpPr txBox="1"/>
-          <p:nvPr>
-            <p:ph idx="5" type="body"/>
-          </p:nvPr>
-        </p:nvSpPr>
-        <p:spPr>
-          <a:xfrm>
-            <a:off x="586013" y="2350380"/>
-            <a:ext cx="3240000" cy="1080000"/>
-          </a:xfrm>
-          <a:prstGeom prst="rect">
-            <a:avLst/>
-          </a:prstGeom>
-          <a:noFill/>
-          <a:ln>
-            <a:noFill/>
-          </a:ln>
-        </p:spPr>
-        <p:txBody>
-          <a:bodyPr anchorCtr="0" anchor="t" bIns="45700" lIns="0" spcFirstLastPara="1" rIns="91425" wrap="square" tIns="45700">
-            <a:noAutofit/>
-          </a:bodyPr>
-          <a:lstStyle/>
-          <a:p>
-            <a:pPr indent="-9525" lvl="0" marL="9525" rtl="0" algn="l">
-              <a:lnSpc>
-                <a:spcPct val="100000"/>
-              </a:lnSpc>
-              <a:spcBef>
-                <a:spcPts val="0"/>
-              </a:spcBef>
-              <a:spcAft>
-                <a:spcPts val="0"/>
-              </a:spcAft>
-              <a:buClr>
-                <a:schemeClr val="dk1"/>
-              </a:buClr>
-              <a:buSzPts val="1600"/>
-              <a:buNone/>
-            </a:pPr>
-            <a:r>
-              <a:rPr lang="ru-RU">
-                <a:latin typeface="Montserrat"/>
-              </a:rPr>
-              <a:t>Выручка Q1 2026</a:t>
-            </a:r>
-            <a:endParaRPr/>
-          </a:p>
-        </p:txBody>
-      </p:sp>
-      <p:sp>
-        <p:nvSpPr>
-          <p:cNvPr id="575" name="Google Shape;575;p24"/>
-          <p:cNvSpPr txBox="1"/>
-          <p:nvPr>
-            <p:ph idx="6" type="body"/>
-          </p:nvPr>
-        </p:nvSpPr>
-        <p:spPr>
-          <a:xfrm>
-            <a:off x="586012" y="1382737"/>
-            <a:ext cx="3240000" cy="901800"/>
-          </a:xfrm>
-          <a:prstGeom prst="rect">
-            <a:avLst/>
-          </a:prstGeom>
-          <a:noFill/>
-          <a:ln>
-            <a:noFill/>
-          </a:ln>
-        </p:spPr>
-        <p:txBody>
-          <a:bodyPr anchorCtr="0" anchor="t" bIns="45700" lIns="0" spcFirstLastPara="1" rIns="91425" wrap="square" tIns="45700">
-            <a:noAutofit/>
-          </a:bodyPr>
-          <a:lstStyle/>
-          <a:p>
-            <a:pPr indent="0" lvl="0" marL="0" rtl="0" algn="l">
-              <a:lnSpc>
-                <a:spcPct val="90000"/>
-              </a:lnSpc>
-              <a:spcBef>
-                <a:spcPts val="0"/>
-              </a:spcBef>
-              <a:spcAft>
-                <a:spcPts val="0"/>
-              </a:spcAft>
-              <a:buClr>
-                <a:schemeClr val="dk1"/>
-              </a:buClr>
-              <a:buSzPts val="6000"/>
-              <a:buNone/>
-            </a:pPr>
-            <a:r>
-              <a:rPr b="1" lang="ru-RU">
-                <a:latin typeface="Montserrat"/>
-                <a:ea typeface="Montserrat"/>
-                <a:cs typeface="Montserrat"/>
-                <a:sym typeface="Montserrat"/>
-              </a:rPr>
-              <a:t>11,69 млн ₽</a:t>
-            </a:r>
-            <a:endParaRPr b="1">
-              <a:latin typeface="Montserrat"/>
-              <a:ea typeface="Montserrat"/>
-              <a:cs typeface="Montserrat"/>
-              <a:sym typeface="Montserrat"/>
-            </a:endParaRPr>
-          </a:p>
-        </p:txBody>
-      </p:sp>
-      <p:sp>
-        <p:nvSpPr>
-          <p:cNvPr id="576" name="Google Shape;576;p24"/>
-          <p:cNvSpPr txBox="1"/>
-          <p:nvPr>
-            <p:ph idx="7" type="body"/>
-          </p:nvPr>
-        </p:nvSpPr>
-        <p:spPr>
-          <a:xfrm>
-            <a:off x="586013" y="4790663"/>
-            <a:ext cx="3240000" cy="1080000"/>
-          </a:xfrm>
-          <a:prstGeom prst="rect">
-            <a:avLst/>
-          </a:prstGeom>
-          <a:noFill/>
-          <a:ln>
-            <a:noFill/>
-          </a:ln>
-        </p:spPr>
-        <p:txBody>
-          <a:bodyPr anchorCtr="0" anchor="t" bIns="45700" lIns="0" spcFirstLastPara="1" rIns="91425" wrap="square" tIns="45700">
-            <a:noAutofit/>
-          </a:bodyPr>
-          <a:lstStyle/>
-          <a:p>
-            <a:pPr indent="-9525" lvl="0" marL="9525" rtl="0" algn="l">
-              <a:lnSpc>
-                <a:spcPct val="100000"/>
-              </a:lnSpc>
-              <a:spcBef>
-                <a:spcPts val="0"/>
-              </a:spcBef>
-              <a:spcAft>
-                <a:spcPts val="0"/>
-              </a:spcAft>
-              <a:buClr>
-                <a:schemeClr val="dk1"/>
-              </a:buClr>
-              <a:buSzPts val="1600"/>
-              <a:buNone/>
-            </a:pPr>
-            <a:r>
-              <a:rPr lang="ru-RU">
-                <a:latin typeface="Montserrat"/>
-              </a:rPr>
-              <a:t>оплат · +49 к Q4</a:t>
-            </a:r>
-            <a:endParaRPr/>
-          </a:p>
-        </p:txBody>
-      </p:sp>
-      <p:sp>
-        <p:nvSpPr>
-          <p:cNvPr id="577" name="Google Shape;577;p24"/>
-          <p:cNvSpPr txBox="1"/>
-          <p:nvPr>
-            <p:ph idx="8" type="body"/>
-          </p:nvPr>
-        </p:nvSpPr>
-        <p:spPr>
-          <a:xfrm>
-            <a:off x="586013" y="3809879"/>
-            <a:ext cx="3240000" cy="901800"/>
-          </a:xfrm>
-          <a:prstGeom prst="rect">
-            <a:avLst/>
-          </a:prstGeom>
-          <a:noFill/>
-          <a:ln>
-            <a:noFill/>
-          </a:ln>
-        </p:spPr>
-        <p:txBody>
-          <a:bodyPr anchorCtr="0" anchor="t" bIns="45700" lIns="0" spcFirstLastPara="1" rIns="91425" wrap="square" tIns="45700">
-            <a:noAutofit/>
-          </a:bodyPr>
-          <a:lstStyle/>
-          <a:p>
-            <a:pPr indent="0" lvl="0" marL="0" rtl="0" algn="l">
-              <a:lnSpc>
-                <a:spcPct val="90000"/>
-              </a:lnSpc>
-              <a:spcBef>
-                <a:spcPts val="0"/>
-              </a:spcBef>
-              <a:spcAft>
-                <a:spcPts val="0"/>
-              </a:spcAft>
-              <a:buClr>
-                <a:schemeClr val="dk1"/>
-              </a:buClr>
-              <a:buSzPts val="6000"/>
-              <a:buNone/>
-            </a:pPr>
-            <a:r>
-              <a:rPr b="1" lang="ru-RU">
-                <a:latin typeface="Montserrat"/>
-                <a:ea typeface="Montserrat"/>
-                <a:cs typeface="Montserrat"/>
-                <a:sym typeface="Montserrat"/>
-              </a:rPr>
-              <a:t>2 122</a:t>
-            </a:r>
-            <a:endParaRPr b="1">
-              <a:latin typeface="Montserrat"/>
-              <a:ea typeface="Montserrat"/>
-              <a:cs typeface="Montserrat"/>
-              <a:sym typeface="Montserrat"/>
-            </a:endParaRPr>
-          </a:p>
-        </p:txBody>
-      </p:sp>
-      <p:sp>
-        <p:nvSpPr>
-          <p:cNvPr id="578" name="Google Shape;578;p24"/>
-          <p:cNvSpPr txBox="1"/>
-          <p:nvPr>
-            <p:ph idx="9" type="body"/>
-          </p:nvPr>
-        </p:nvSpPr>
-        <p:spPr>
-          <a:xfrm>
-            <a:off x="4376963" y="2350380"/>
-            <a:ext cx="3240000" cy="1080000"/>
-          </a:xfrm>
-          <a:prstGeom prst="rect">
-            <a:avLst/>
-          </a:prstGeom>
-          <a:noFill/>
-          <a:ln>
-            <a:noFill/>
-          </a:ln>
-        </p:spPr>
-        <p:txBody>
-          <a:bodyPr anchorCtr="0" anchor="t" bIns="45700" lIns="0" spcFirstLastPara="1" rIns="91425" wrap="square" tIns="45700">
-            <a:noAutofit/>
-          </a:bodyPr>
-          <a:lstStyle/>
-          <a:p>
-            <a:pPr indent="-9525" lvl="0" marL="9525" rtl="0" algn="l">
-              <a:lnSpc>
-                <a:spcPct val="100000"/>
-              </a:lnSpc>
-              <a:spcBef>
-                <a:spcPts val="0"/>
-              </a:spcBef>
-              <a:spcAft>
-                <a:spcPts val="0"/>
-              </a:spcAft>
-              <a:buClr>
-                <a:schemeClr val="dk1"/>
-              </a:buClr>
-              <a:buSzPts val="1600"/>
-              <a:buNone/>
-            </a:pPr>
-            <a:r>
-              <a:rPr lang="ru-RU">
-                <a:latin typeface="Montserrat"/>
-              </a:rPr>
-              <a:t>к Q4 2025</a:t>
-            </a:r>
-            <a:endParaRPr/>
-          </a:p>
-        </p:txBody>
-      </p:sp>
-      <p:sp>
-        <p:nvSpPr>
-          <p:cNvPr id="579" name="Google Shape;579;p24"/>
-          <p:cNvSpPr txBox="1"/>
-          <p:nvPr>
-            <p:ph idx="13" type="body"/>
-          </p:nvPr>
-        </p:nvSpPr>
-        <p:spPr>
-          <a:xfrm>
-            <a:off x="4376962" y="1382737"/>
-            <a:ext cx="3240000" cy="901800"/>
-          </a:xfrm>
-          <a:prstGeom prst="rect">
-            <a:avLst/>
-          </a:prstGeom>
-          <a:noFill/>
-          <a:ln>
-            <a:noFill/>
-          </a:ln>
-        </p:spPr>
-        <p:txBody>
-          <a:bodyPr anchorCtr="0" anchor="t" bIns="45700" lIns="0" spcFirstLastPara="1" rIns="91425" wrap="square" tIns="45700">
-            <a:noAutofit/>
-          </a:bodyPr>
-          <a:lstStyle/>
-          <a:p>
-            <a:pPr indent="0" lvl="0" marL="0" rtl="0" algn="l">
-              <a:lnSpc>
-                <a:spcPct val="90000"/>
-              </a:lnSpc>
-              <a:spcBef>
-                <a:spcPts val="0"/>
-              </a:spcBef>
-              <a:spcAft>
-                <a:spcPts val="0"/>
-              </a:spcAft>
-              <a:buClr>
-                <a:schemeClr val="dk1"/>
-              </a:buClr>
-              <a:buSzPts val="6000"/>
-              <a:buNone/>
-            </a:pPr>
-            <a:r>
-              <a:rPr b="1" lang="ru-RU">
-                <a:latin typeface="Montserrat"/>
-                <a:ea typeface="Montserrat"/>
-                <a:cs typeface="Montserrat"/>
-                <a:sym typeface="Montserrat"/>
-              </a:rPr>
-              <a:t>+4,2 %</a:t>
-            </a:r>
-            <a:endParaRPr b="1">
-              <a:latin typeface="Montserrat"/>
-              <a:ea typeface="Montserrat"/>
-              <a:cs typeface="Montserrat"/>
-              <a:sym typeface="Montserrat"/>
-            </a:endParaRPr>
-          </a:p>
-        </p:txBody>
-      </p:sp>
-      <p:sp>
-        <p:nvSpPr>
-          <p:cNvPr id="580" name="Google Shape;580;p24"/>
-          <p:cNvSpPr txBox="1"/>
-          <p:nvPr>
-            <p:ph idx="14" type="body"/>
-          </p:nvPr>
-        </p:nvSpPr>
-        <p:spPr>
-          <a:xfrm>
-            <a:off x="4376963" y="4790663"/>
-            <a:ext cx="3240000" cy="1080000"/>
-          </a:xfrm>
-          <a:prstGeom prst="rect">
-            <a:avLst/>
-          </a:prstGeom>
-          <a:noFill/>
-          <a:ln>
-            <a:noFill/>
-          </a:ln>
-        </p:spPr>
-        <p:txBody>
-          <a:bodyPr anchorCtr="0" anchor="t" bIns="45700" lIns="0" spcFirstLastPara="1" rIns="91425" wrap="square" tIns="45700">
-            <a:noAutofit/>
-          </a:bodyPr>
-          <a:lstStyle/>
-          <a:p>
-            <a:pPr indent="-9525" lvl="0" marL="9525" rtl="0" algn="l">
-              <a:lnSpc>
-                <a:spcPct val="100000"/>
-              </a:lnSpc>
-              <a:spcBef>
-                <a:spcPts val="0"/>
-              </a:spcBef>
-              <a:spcAft>
-                <a:spcPts val="0"/>
-              </a:spcAft>
-              <a:buClr>
-                <a:schemeClr val="dk1"/>
-              </a:buClr>
-              <a:buSzPts val="1600"/>
-              <a:buNone/>
-            </a:pPr>
-            <a:r>
-              <a:rPr lang="ru-RU">
-                <a:latin typeface="Montserrat"/>
-              </a:rPr>
-              <a:t>средний чек</a:t>
-            </a:r>
-            <a:endParaRPr/>
-          </a:p>
-        </p:txBody>
-      </p:sp>
-      <p:sp>
-        <p:nvSpPr>
-          <p:cNvPr id="581" name="Google Shape;581;p24"/>
-          <p:cNvSpPr txBox="1"/>
-          <p:nvPr>
-            <p:ph idx="15" type="body"/>
-          </p:nvPr>
-        </p:nvSpPr>
-        <p:spPr>
-          <a:xfrm>
-            <a:off x="4376962" y="3809879"/>
-            <a:ext cx="3240000" cy="901800"/>
-          </a:xfrm>
-          <a:prstGeom prst="rect">
-            <a:avLst/>
-          </a:prstGeom>
-          <a:noFill/>
-          <a:ln>
-            <a:noFill/>
-          </a:ln>
-        </p:spPr>
-        <p:txBody>
-          <a:bodyPr anchorCtr="0" anchor="t" bIns="45700" lIns="0" spcFirstLastPara="1" rIns="91425" wrap="square" tIns="45700">
-            <a:noAutofit/>
-          </a:bodyPr>
-          <a:lstStyle/>
-          <a:p>
-            <a:pPr indent="0" lvl="0" marL="0" rtl="0" algn="l">
-              <a:lnSpc>
-                <a:spcPct val="90000"/>
-              </a:lnSpc>
-              <a:spcBef>
-                <a:spcPts val="0"/>
-              </a:spcBef>
-              <a:spcAft>
-                <a:spcPts val="0"/>
-              </a:spcAft>
-              <a:buClr>
-                <a:schemeClr val="dk1"/>
-              </a:buClr>
-              <a:buSzPts val="6000"/>
-              <a:buNone/>
-            </a:pPr>
-            <a:r>
-              <a:rPr b="1" lang="ru-RU">
-                <a:latin typeface="Montserrat"/>
-                <a:ea typeface="Montserrat"/>
-                <a:cs typeface="Montserrat"/>
-                <a:sym typeface="Montserrat"/>
-              </a:rPr>
-              <a:t>5,5 тыс ₽</a:t>
-            </a:r>
-            <a:endParaRPr b="1">
-              <a:latin typeface="Montserrat"/>
-              <a:ea typeface="Montserrat"/>
-              <a:cs typeface="Montserrat"/>
-              <a:sym typeface="Montserrat"/>
-            </a:endParaRPr>
-          </a:p>
-        </p:txBody>
-      </p:sp>
-      <p:sp>
-        <p:nvSpPr>
-          <p:cNvPr id="66" name="Google Shape;66;p63"/>
+          <p:cNvPr id="949" name="Google Shape;949;p42"/>
           <p:cNvSpPr txBox="1"/>
           <p:nvPr>
             <p:ph type="title"/>
@@ -45764,7 +45073,7 @@
         <p:spPr>
           <a:xfrm>
             <a:off x="587375" y="584200"/>
-            <a:ext cx="11017249" cy="647700"/>
+            <a:ext cx="11017200" cy="1257900"/>
           </a:xfrm>
           <a:prstGeom prst="rect">
             <a:avLst/>
@@ -45778,8 +45087,9 @@
           <a:bodyPr anchorCtr="0" anchor="t" bIns="0" lIns="0" spcFirstLastPara="1" rIns="0" wrap="square" tIns="0">
             <a:noAutofit/>
           </a:bodyPr>
-          <a:lstStyle>
-            <a:lvl1pPr lvl="0" algn="l">
+          <a:lstStyle/>
+          <a:p>
+            <a:pPr indent="0" lvl="0" marL="0" rtl="0" algn="l">
               <a:lnSpc>
                 <a:spcPct val="80000"/>
               </a:lnSpc>
@@ -45793,180 +45103,757 @@
                 <a:schemeClr val="dk1"/>
               </a:buClr>
               <a:buSzPts val="5000"/>
-              <a:buNone/>
-              <a:defRPr sz="5000"/>
-            </a:lvl1pPr>
-            <a:lvl2pPr lvl="1" algn="l">
-              <a:lnSpc>
-                <a:spcPct val="100000"/>
-              </a:lnSpc>
-              <a:spcBef>
-                <a:spcPts val="0"/>
-              </a:spcBef>
-              <a:spcAft>
-                <a:spcPts val="0"/>
-              </a:spcAft>
-              <a:buSzPts val="1400"/>
-              <a:buFont typeface="Montserrat SemiBold"/>
-              <a:buNone/>
-              <a:defRPr>
-                <a:latin typeface="Montserrat SemiBold"/>
-                <a:ea typeface="Montserrat SemiBold"/>
-                <a:cs typeface="Montserrat SemiBold"/>
-                <a:sym typeface="Montserrat SemiBold"/>
-              </a:defRPr>
-            </a:lvl2pPr>
-            <a:lvl3pPr lvl="2" algn="l">
-              <a:lnSpc>
-                <a:spcPct val="100000"/>
-              </a:lnSpc>
-              <a:spcBef>
-                <a:spcPts val="0"/>
-              </a:spcBef>
-              <a:spcAft>
-                <a:spcPts val="0"/>
-              </a:spcAft>
-              <a:buSzPts val="1400"/>
-              <a:buFont typeface="Montserrat SemiBold"/>
-              <a:buNone/>
-              <a:defRPr>
-                <a:latin typeface="Montserrat SemiBold"/>
-                <a:ea typeface="Montserrat SemiBold"/>
-                <a:cs typeface="Montserrat SemiBold"/>
-                <a:sym typeface="Montserrat SemiBold"/>
-              </a:defRPr>
-            </a:lvl3pPr>
-            <a:lvl4pPr lvl="3" algn="l">
-              <a:lnSpc>
-                <a:spcPct val="100000"/>
-              </a:lnSpc>
-              <a:spcBef>
-                <a:spcPts val="0"/>
-              </a:spcBef>
-              <a:spcAft>
-                <a:spcPts val="0"/>
-              </a:spcAft>
-              <a:buSzPts val="1400"/>
-              <a:buFont typeface="Montserrat SemiBold"/>
-              <a:buNone/>
-              <a:defRPr>
-                <a:latin typeface="Montserrat SemiBold"/>
-                <a:ea typeface="Montserrat SemiBold"/>
-                <a:cs typeface="Montserrat SemiBold"/>
-                <a:sym typeface="Montserrat SemiBold"/>
-              </a:defRPr>
-            </a:lvl4pPr>
-            <a:lvl5pPr lvl="4" algn="l">
-              <a:lnSpc>
-                <a:spcPct val="100000"/>
-              </a:lnSpc>
-              <a:spcBef>
-                <a:spcPts val="0"/>
-              </a:spcBef>
-              <a:spcAft>
-                <a:spcPts val="0"/>
-              </a:spcAft>
-              <a:buSzPts val="1400"/>
-              <a:buFont typeface="Montserrat SemiBold"/>
-              <a:buNone/>
-              <a:defRPr>
-                <a:latin typeface="Montserrat SemiBold"/>
-                <a:ea typeface="Montserrat SemiBold"/>
-                <a:cs typeface="Montserrat SemiBold"/>
-                <a:sym typeface="Montserrat SemiBold"/>
-              </a:defRPr>
-            </a:lvl5pPr>
-            <a:lvl6pPr lvl="5" algn="l">
-              <a:lnSpc>
-                <a:spcPct val="100000"/>
-              </a:lnSpc>
-              <a:spcBef>
-                <a:spcPts val="0"/>
-              </a:spcBef>
-              <a:spcAft>
-                <a:spcPts val="0"/>
-              </a:spcAft>
-              <a:buSzPts val="1400"/>
-              <a:buFont typeface="Montserrat SemiBold"/>
-              <a:buNone/>
-              <a:defRPr>
-                <a:latin typeface="Montserrat SemiBold"/>
-                <a:ea typeface="Montserrat SemiBold"/>
-                <a:cs typeface="Montserrat SemiBold"/>
-                <a:sym typeface="Montserrat SemiBold"/>
-              </a:defRPr>
-            </a:lvl6pPr>
-            <a:lvl7pPr lvl="6" algn="l">
-              <a:lnSpc>
-                <a:spcPct val="100000"/>
-              </a:lnSpc>
-              <a:spcBef>
-                <a:spcPts val="0"/>
-              </a:spcBef>
-              <a:spcAft>
-                <a:spcPts val="0"/>
-              </a:spcAft>
-              <a:buSzPts val="1400"/>
-              <a:buFont typeface="Montserrat SemiBold"/>
-              <a:buNone/>
-              <a:defRPr>
-                <a:latin typeface="Montserrat SemiBold"/>
-                <a:ea typeface="Montserrat SemiBold"/>
-                <a:cs typeface="Montserrat SemiBold"/>
-                <a:sym typeface="Montserrat SemiBold"/>
-              </a:defRPr>
-            </a:lvl7pPr>
-            <a:lvl8pPr lvl="7" algn="l">
-              <a:lnSpc>
-                <a:spcPct val="100000"/>
-              </a:lnSpc>
-              <a:spcBef>
-                <a:spcPts val="0"/>
-              </a:spcBef>
-              <a:spcAft>
-                <a:spcPts val="0"/>
-              </a:spcAft>
-              <a:buSzPts val="1400"/>
-              <a:buFont typeface="Montserrat SemiBold"/>
-              <a:buNone/>
-              <a:defRPr>
-                <a:latin typeface="Montserrat SemiBold"/>
-                <a:ea typeface="Montserrat SemiBold"/>
-                <a:cs typeface="Montserrat SemiBold"/>
-                <a:sym typeface="Montserrat SemiBold"/>
-              </a:defRPr>
-            </a:lvl8pPr>
-            <a:lvl9pPr lvl="8" algn="l">
-              <a:lnSpc>
-                <a:spcPct val="100000"/>
-              </a:lnSpc>
-              <a:spcBef>
-                <a:spcPts val="0"/>
-              </a:spcBef>
-              <a:spcAft>
-                <a:spcPts val="0"/>
-              </a:spcAft>
-              <a:buSzPts val="1400"/>
-              <a:buFont typeface="Montserrat SemiBold"/>
-              <a:buNone/>
-              <a:defRPr>
-                <a:latin typeface="Montserrat SemiBold"/>
-                <a:ea typeface="Montserrat SemiBold"/>
-                <a:cs typeface="Montserrat SemiBold"/>
-                <a:sym typeface="Montserrat SemiBold"/>
-              </a:defRPr>
-            </a:lvl9pPr>
-          </a:lstStyle>
-          <a:p>
+              <a:buFont typeface="Arial"/>
+              <a:buNone/>
+            </a:pPr>
             <a:r>
-              <a:rPr>
+              <a:rPr b="1" lang="ru-RU">
                 <a:latin typeface="Montserrat"/>
+                <a:ea typeface="Montserrat"/>
+                <a:cs typeface="Montserrat"/>
+                <a:sym typeface="Montserrat"/>
               </a:rPr>
-              <a:t>ОФД · продуктовый срез, Q1 2026</a:t>
+              <a:t>ОФД · 11,69 млн ₽ (+4,2% QoQ · −4,9% YoY) · 2 122 оплаты</a:t>
             </a:r>
+            <a:endParaRPr b="1">
+              <a:latin typeface="Montserrat"/>
+              <a:ea typeface="Montserrat"/>
+              <a:cs typeface="Montserrat"/>
+              <a:sym typeface="Montserrat"/>
+            </a:endParaRPr>
           </a:p>
         </p:txBody>
       </p:sp>
+      <p:graphicFrame>
+        <p:nvGraphicFramePr>
+          <p:cNvPr id="950" name="Table 949"/>
+          <p:cNvGraphicFramePr>
+            <a:graphicFrameLocks noGrp="1"/>
+          </p:cNvGraphicFramePr>
+          <p:nvPr/>
+        </p:nvGraphicFramePr>
+        <p:xfrm>
+          <a:off x="586800" y="1872000"/>
+          <a:ext cx="11016000" cy="1404000"/>
+        </p:xfrm>
+        <a:graphic>
+          <a:graphicData uri="http://schemas.openxmlformats.org/drawingml/2006/table">
+            <a:tbl>
+              <a:tblPr firstRow="0" bandRow="0">
+                <a:tableStyleId>{5C22544A-7EE6-4342-B048-85BDC9FD1C3A}</a:tableStyleId>
+              </a:tblPr>
+              <a:tblGrid>
+                <a:gridCol w="1836000"/>
+                <a:gridCol w="1836000"/>
+                <a:gridCol w="1836000"/>
+                <a:gridCol w="1836000"/>
+                <a:gridCol w="1836000"/>
+                <a:gridCol w="1836000"/>
+              </a:tblGrid>
+              <a:tr h="280800">
+                <a:tc>
+                  <a:txBody>
+                    <a:bodyPr/>
+                    <a:lstStyle/>
+                    <a:p>
+                      <a:pPr algn="l"/>
+                      <a:r>
+                        <a:rPr sz="1100" b="1">
+                          <a:solidFill>
+                            <a:srgbClr val="FFFFFF"/>
+                          </a:solidFill>
+                          <a:latin typeface="Montserrat"/>
+                        </a:rPr>
+                        <a:t>Тариф</a:t>
+                      </a:r>
+                    </a:p>
+                  </a:txBody>
+                  <a:tcPr anchor="ctr" marL="72000" marR="72000" marT="14400" marB="14400">
+                    <a:solidFill>
+                      <a:srgbClr val="2291FF"/>
+                    </a:solidFill>
+                  </a:tcPr>
+                </a:tc>
+                <a:tc>
+                  <a:txBody>
+                    <a:bodyPr/>
+                    <a:lstStyle/>
+                    <a:p>
+                      <a:pPr algn="r"/>
+                      <a:r>
+                        <a:rPr sz="1100" b="1">
+                          <a:solidFill>
+                            <a:srgbClr val="FFFFFF"/>
+                          </a:solidFill>
+                          <a:latin typeface="Montserrat"/>
+                        </a:rPr>
+                        <a:t>Q1 2025</a:t>
+                      </a:r>
+                    </a:p>
+                  </a:txBody>
+                  <a:tcPr anchor="ctr" marL="72000" marR="72000" marT="14400" marB="14400">
+                    <a:solidFill>
+                      <a:srgbClr val="2291FF"/>
+                    </a:solidFill>
+                  </a:tcPr>
+                </a:tc>
+                <a:tc>
+                  <a:txBody>
+                    <a:bodyPr/>
+                    <a:lstStyle/>
+                    <a:p>
+                      <a:pPr algn="r"/>
+                      <a:r>
+                        <a:rPr sz="1100" b="1">
+                          <a:solidFill>
+                            <a:srgbClr val="FFFFFF"/>
+                          </a:solidFill>
+                          <a:latin typeface="Montserrat"/>
+                        </a:rPr>
+                        <a:t>Q4 2025</a:t>
+                      </a:r>
+                    </a:p>
+                  </a:txBody>
+                  <a:tcPr anchor="ctr" marL="72000" marR="72000" marT="14400" marB="14400">
+                    <a:solidFill>
+                      <a:srgbClr val="2291FF"/>
+                    </a:solidFill>
+                  </a:tcPr>
+                </a:tc>
+                <a:tc>
+                  <a:txBody>
+                    <a:bodyPr/>
+                    <a:lstStyle/>
+                    <a:p>
+                      <a:pPr algn="r"/>
+                      <a:r>
+                        <a:rPr sz="1100" b="1">
+                          <a:solidFill>
+                            <a:srgbClr val="FFFFFF"/>
+                          </a:solidFill>
+                          <a:latin typeface="Montserrat"/>
+                        </a:rPr>
+                        <a:t>Q1 2026</a:t>
+                      </a:r>
+                    </a:p>
+                  </a:txBody>
+                  <a:tcPr anchor="ctr" marL="72000" marR="72000" marT="14400" marB="14400">
+                    <a:solidFill>
+                      <a:srgbClr val="2291FF"/>
+                    </a:solidFill>
+                  </a:tcPr>
+                </a:tc>
+                <a:tc>
+                  <a:txBody>
+                    <a:bodyPr/>
+                    <a:lstStyle/>
+                    <a:p>
+                      <a:pPr algn="r"/>
+                      <a:r>
+                        <a:rPr sz="1100" b="1">
+                          <a:solidFill>
+                            <a:srgbClr val="FFFFFF"/>
+                          </a:solidFill>
+                          <a:latin typeface="Montserrat"/>
+                        </a:rPr>
+                        <a:t>QoQ</a:t>
+                      </a:r>
+                    </a:p>
+                  </a:txBody>
+                  <a:tcPr anchor="ctr" marL="72000" marR="72000" marT="14400" marB="14400">
+                    <a:solidFill>
+                      <a:srgbClr val="2291FF"/>
+                    </a:solidFill>
+                  </a:tcPr>
+                </a:tc>
+                <a:tc>
+                  <a:txBody>
+                    <a:bodyPr/>
+                    <a:lstStyle/>
+                    <a:p>
+                      <a:pPr algn="r"/>
+                      <a:r>
+                        <a:rPr sz="1100" b="1">
+                          <a:solidFill>
+                            <a:srgbClr val="FFFFFF"/>
+                          </a:solidFill>
+                          <a:latin typeface="Montserrat"/>
+                        </a:rPr>
+                        <a:t>YoY</a:t>
+                      </a:r>
+                    </a:p>
+                  </a:txBody>
+                  <a:tcPr anchor="ctr" marL="72000" marR="72000" marT="14400" marB="14400">
+                    <a:solidFill>
+                      <a:srgbClr val="2291FF"/>
+                    </a:solidFill>
+                  </a:tcPr>
+                </a:tc>
+              </a:tr>
+              <a:tr h="280800">
+                <a:tc>
+                  <a:txBody>
+                    <a:bodyPr/>
+                    <a:lstStyle/>
+                    <a:p>
+                      <a:pPr algn="l"/>
+                      <a:r>
+                        <a:rPr sz="1100" b="1">
+                          <a:solidFill>
+                            <a:srgbClr val="000000"/>
+                          </a:solidFill>
+                          <a:latin typeface="Montserrat"/>
+                        </a:rPr>
+                        <a:t>ОФД-36</a:t>
+                      </a:r>
+                    </a:p>
+                  </a:txBody>
+                  <a:tcPr anchor="ctr" marL="72000" marR="72000" marT="14400" marB="14400">
+                    <a:solidFill>
+                      <a:srgbClr val="FFFFFF"/>
+                    </a:solidFill>
+                  </a:tcPr>
+                </a:tc>
+                <a:tc>
+                  <a:txBody>
+                    <a:bodyPr/>
+                    <a:lstStyle/>
+                    <a:p>
+                      <a:pPr algn="r"/>
+                      <a:r>
+                        <a:rPr sz="1100" b="0">
+                          <a:solidFill>
+                            <a:srgbClr val="000000"/>
+                          </a:solidFill>
+                          <a:latin typeface="Montserrat"/>
+                        </a:rPr>
+                        <a:t>4,77</a:t>
+                      </a:r>
+                    </a:p>
+                  </a:txBody>
+                  <a:tcPr anchor="ctr" marL="72000" marR="72000" marT="14400" marB="14400">
+                    <a:solidFill>
+                      <a:srgbClr val="FFFFFF"/>
+                    </a:solidFill>
+                  </a:tcPr>
+                </a:tc>
+                <a:tc>
+                  <a:txBody>
+                    <a:bodyPr/>
+                    <a:lstStyle/>
+                    <a:p>
+                      <a:pPr algn="r"/>
+                      <a:r>
+                        <a:rPr sz="1100" b="0">
+                          <a:solidFill>
+                            <a:srgbClr val="000000"/>
+                          </a:solidFill>
+                          <a:latin typeface="Montserrat"/>
+                        </a:rPr>
+                        <a:t>4,79</a:t>
+                      </a:r>
+                    </a:p>
+                  </a:txBody>
+                  <a:tcPr anchor="ctr" marL="72000" marR="72000" marT="14400" marB="14400">
+                    <a:solidFill>
+                      <a:srgbClr val="FFFFFF"/>
+                    </a:solidFill>
+                  </a:tcPr>
+                </a:tc>
+                <a:tc>
+                  <a:txBody>
+                    <a:bodyPr/>
+                    <a:lstStyle/>
+                    <a:p>
+                      <a:pPr algn="r"/>
+                      <a:r>
+                        <a:rPr sz="1100" b="0">
+                          <a:solidFill>
+                            <a:srgbClr val="000000"/>
+                          </a:solidFill>
+                          <a:latin typeface="Montserrat"/>
+                        </a:rPr>
+                        <a:t>3,93</a:t>
+                      </a:r>
+                    </a:p>
+                  </a:txBody>
+                  <a:tcPr anchor="ctr" marL="72000" marR="72000" marT="14400" marB="14400">
+                    <a:solidFill>
+                      <a:srgbClr val="FFFFFF"/>
+                    </a:solidFill>
+                  </a:tcPr>
+                </a:tc>
+                <a:tc>
+                  <a:txBody>
+                    <a:bodyPr/>
+                    <a:lstStyle/>
+                    <a:p>
+                      <a:pPr algn="r"/>
+                      <a:r>
+                        <a:rPr sz="1100" b="0">
+                          <a:solidFill>
+                            <a:srgbClr val="661429"/>
+                          </a:solidFill>
+                          <a:latin typeface="Montserrat"/>
+                        </a:rPr>
+                        <a:t>−18%</a:t>
+                      </a:r>
+                    </a:p>
+                  </a:txBody>
+                  <a:tcPr anchor="ctr" marL="72000" marR="72000" marT="14400" marB="14400">
+                    <a:solidFill>
+                      <a:srgbClr val="FFFFFF"/>
+                    </a:solidFill>
+                  </a:tcPr>
+                </a:tc>
+                <a:tc>
+                  <a:txBody>
+                    <a:bodyPr/>
+                    <a:lstStyle/>
+                    <a:p>
+                      <a:pPr algn="r"/>
+                      <a:r>
+                        <a:rPr sz="1100" b="0">
+                          <a:solidFill>
+                            <a:srgbClr val="661429"/>
+                          </a:solidFill>
+                          <a:latin typeface="Montserrat"/>
+                        </a:rPr>
+                        <a:t>−18%</a:t>
+                      </a:r>
+                    </a:p>
+                  </a:txBody>
+                  <a:tcPr anchor="ctr" marL="72000" marR="72000" marT="14400" marB="14400">
+                    <a:solidFill>
+                      <a:srgbClr val="FFFFFF"/>
+                    </a:solidFill>
+                  </a:tcPr>
+                </a:tc>
+              </a:tr>
+              <a:tr h="280800">
+                <a:tc>
+                  <a:txBody>
+                    <a:bodyPr/>
+                    <a:lstStyle/>
+                    <a:p>
+                      <a:pPr algn="l"/>
+                      <a:r>
+                        <a:rPr sz="1100" b="1">
+                          <a:solidFill>
+                            <a:srgbClr val="000000"/>
+                          </a:solidFill>
+                          <a:latin typeface="Montserrat"/>
+                        </a:rPr>
+                        <a:t>ОФД-15</a:t>
+                      </a:r>
+                    </a:p>
+                  </a:txBody>
+                  <a:tcPr anchor="ctr" marL="72000" marR="72000" marT="14400" marB="14400">
+                    <a:solidFill>
+                      <a:srgbClr val="F1F1F1"/>
+                    </a:solidFill>
+                  </a:tcPr>
+                </a:tc>
+                <a:tc>
+                  <a:txBody>
+                    <a:bodyPr/>
+                    <a:lstStyle/>
+                    <a:p>
+                      <a:pPr algn="r"/>
+                      <a:r>
+                        <a:rPr sz="1100" b="0">
+                          <a:solidFill>
+                            <a:srgbClr val="000000"/>
+                          </a:solidFill>
+                          <a:latin typeface="Montserrat"/>
+                        </a:rPr>
+                        <a:t>4,17</a:t>
+                      </a:r>
+                    </a:p>
+                  </a:txBody>
+                  <a:tcPr anchor="ctr" marL="72000" marR="72000" marT="14400" marB="14400">
+                    <a:solidFill>
+                      <a:srgbClr val="F1F1F1"/>
+                    </a:solidFill>
+                  </a:tcPr>
+                </a:tc>
+                <a:tc>
+                  <a:txBody>
+                    <a:bodyPr/>
+                    <a:lstStyle/>
+                    <a:p>
+                      <a:pPr algn="r"/>
+                      <a:r>
+                        <a:rPr sz="1100" b="0">
+                          <a:solidFill>
+                            <a:srgbClr val="000000"/>
+                          </a:solidFill>
+                          <a:latin typeface="Montserrat"/>
+                        </a:rPr>
+                        <a:t>3,00</a:t>
+                      </a:r>
+                    </a:p>
+                  </a:txBody>
+                  <a:tcPr anchor="ctr" marL="72000" marR="72000" marT="14400" marB="14400">
+                    <a:solidFill>
+                      <a:srgbClr val="F1F1F1"/>
+                    </a:solidFill>
+                  </a:tcPr>
+                </a:tc>
+                <a:tc>
+                  <a:txBody>
+                    <a:bodyPr/>
+                    <a:lstStyle/>
+                    <a:p>
+                      <a:pPr algn="r"/>
+                      <a:r>
+                        <a:rPr sz="1100" b="0">
+                          <a:solidFill>
+                            <a:srgbClr val="000000"/>
+                          </a:solidFill>
+                          <a:latin typeface="Montserrat"/>
+                        </a:rPr>
+                        <a:t>3,73</a:t>
+                      </a:r>
+                    </a:p>
+                  </a:txBody>
+                  <a:tcPr anchor="ctr" marL="72000" marR="72000" marT="14400" marB="14400">
+                    <a:solidFill>
+                      <a:srgbClr val="F1F1F1"/>
+                    </a:solidFill>
+                  </a:tcPr>
+                </a:tc>
+                <a:tc>
+                  <a:txBody>
+                    <a:bodyPr/>
+                    <a:lstStyle/>
+                    <a:p>
+                      <a:pPr algn="r"/>
+                      <a:r>
+                        <a:rPr sz="1100" b="0">
+                          <a:solidFill>
+                            <a:srgbClr val="26AD50"/>
+                          </a:solidFill>
+                          <a:latin typeface="Montserrat"/>
+                        </a:rPr>
+                        <a:t>+24%</a:t>
+                      </a:r>
+                    </a:p>
+                  </a:txBody>
+                  <a:tcPr anchor="ctr" marL="72000" marR="72000" marT="14400" marB="14400">
+                    <a:solidFill>
+                      <a:srgbClr val="F1F1F1"/>
+                    </a:solidFill>
+                  </a:tcPr>
+                </a:tc>
+                <a:tc>
+                  <a:txBody>
+                    <a:bodyPr/>
+                    <a:lstStyle/>
+                    <a:p>
+                      <a:pPr algn="r"/>
+                      <a:r>
+                        <a:rPr sz="1100" b="0">
+                          <a:solidFill>
+                            <a:srgbClr val="661429"/>
+                          </a:solidFill>
+                          <a:latin typeface="Montserrat"/>
+                        </a:rPr>
+                        <a:t>−11%</a:t>
+                      </a:r>
+                    </a:p>
+                  </a:txBody>
+                  <a:tcPr anchor="ctr" marL="72000" marR="72000" marT="14400" marB="14400">
+                    <a:solidFill>
+                      <a:srgbClr val="F1F1F1"/>
+                    </a:solidFill>
+                  </a:tcPr>
+                </a:tc>
+              </a:tr>
+              <a:tr h="280800">
+                <a:tc>
+                  <a:txBody>
+                    <a:bodyPr/>
+                    <a:lstStyle/>
+                    <a:p>
+                      <a:pPr algn="l"/>
+                      <a:r>
+                        <a:rPr sz="1100" b="1">
+                          <a:solidFill>
+                            <a:srgbClr val="000000"/>
+                          </a:solidFill>
+                          <a:latin typeface="Montserrat"/>
+                        </a:rPr>
+                        <a:t>ОФД-13</a:t>
+                      </a:r>
+                    </a:p>
+                  </a:txBody>
+                  <a:tcPr anchor="ctr" marL="72000" marR="72000" marT="14400" marB="14400">
+                    <a:solidFill>
+                      <a:srgbClr val="FFFFFF"/>
+                    </a:solidFill>
+                  </a:tcPr>
+                </a:tc>
+                <a:tc>
+                  <a:txBody>
+                    <a:bodyPr/>
+                    <a:lstStyle/>
+                    <a:p>
+                      <a:pPr algn="r"/>
+                      <a:r>
+                        <a:rPr sz="1100" b="0">
+                          <a:solidFill>
+                            <a:srgbClr val="000000"/>
+                          </a:solidFill>
+                          <a:latin typeface="Montserrat"/>
+                        </a:rPr>
+                        <a:t>2,72</a:t>
+                      </a:r>
+                    </a:p>
+                  </a:txBody>
+                  <a:tcPr anchor="ctr" marL="72000" marR="72000" marT="14400" marB="14400">
+                    <a:solidFill>
+                      <a:srgbClr val="FFFFFF"/>
+                    </a:solidFill>
+                  </a:tcPr>
+                </a:tc>
+                <a:tc>
+                  <a:txBody>
+                    <a:bodyPr/>
+                    <a:lstStyle/>
+                    <a:p>
+                      <a:pPr algn="r"/>
+                      <a:r>
+                        <a:rPr sz="1100" b="0">
+                          <a:solidFill>
+                            <a:srgbClr val="000000"/>
+                          </a:solidFill>
+                          <a:latin typeface="Montserrat"/>
+                        </a:rPr>
+                        <a:t>2,73</a:t>
+                      </a:r>
+                    </a:p>
+                  </a:txBody>
+                  <a:tcPr anchor="ctr" marL="72000" marR="72000" marT="14400" marB="14400">
+                    <a:solidFill>
+                      <a:srgbClr val="FFFFFF"/>
+                    </a:solidFill>
+                  </a:tcPr>
+                </a:tc>
+                <a:tc>
+                  <a:txBody>
+                    <a:bodyPr/>
+                    <a:lstStyle/>
+                    <a:p>
+                      <a:pPr algn="r"/>
+                      <a:r>
+                        <a:rPr sz="1100" b="0">
+                          <a:solidFill>
+                            <a:srgbClr val="000000"/>
+                          </a:solidFill>
+                          <a:latin typeface="Montserrat"/>
+                        </a:rPr>
+                        <a:t>3,38</a:t>
+                      </a:r>
+                    </a:p>
+                  </a:txBody>
+                  <a:tcPr anchor="ctr" marL="72000" marR="72000" marT="14400" marB="14400">
+                    <a:solidFill>
+                      <a:srgbClr val="FFFFFF"/>
+                    </a:solidFill>
+                  </a:tcPr>
+                </a:tc>
+                <a:tc>
+                  <a:txBody>
+                    <a:bodyPr/>
+                    <a:lstStyle/>
+                    <a:p>
+                      <a:pPr algn="r"/>
+                      <a:r>
+                        <a:rPr sz="1100" b="0">
+                          <a:solidFill>
+                            <a:srgbClr val="26AD50"/>
+                          </a:solidFill>
+                          <a:latin typeface="Montserrat"/>
+                        </a:rPr>
+                        <a:t>+24%</a:t>
+                      </a:r>
+                    </a:p>
+                  </a:txBody>
+                  <a:tcPr anchor="ctr" marL="72000" marR="72000" marT="14400" marB="14400">
+                    <a:solidFill>
+                      <a:srgbClr val="FFFFFF"/>
+                    </a:solidFill>
+                  </a:tcPr>
+                </a:tc>
+                <a:tc>
+                  <a:txBody>
+                    <a:bodyPr/>
+                    <a:lstStyle/>
+                    <a:p>
+                      <a:pPr algn="r"/>
+                      <a:r>
+                        <a:rPr sz="1100" b="0">
+                          <a:solidFill>
+                            <a:srgbClr val="26AD50"/>
+                          </a:solidFill>
+                          <a:latin typeface="Montserrat"/>
+                        </a:rPr>
+                        <a:t>+24%</a:t>
+                      </a:r>
+                    </a:p>
+                  </a:txBody>
+                  <a:tcPr anchor="ctr" marL="72000" marR="72000" marT="14400" marB="14400">
+                    <a:solidFill>
+                      <a:srgbClr val="FFFFFF"/>
+                    </a:solidFill>
+                  </a:tcPr>
+                </a:tc>
+              </a:tr>
+              <a:tr h="280800">
+                <a:tc>
+                  <a:txBody>
+                    <a:bodyPr/>
+                    <a:lstStyle/>
+                    <a:p>
+                      <a:pPr algn="l"/>
+                      <a:r>
+                        <a:rPr sz="1100" b="1">
+                          <a:solidFill>
+                            <a:srgbClr val="000000"/>
+                          </a:solidFill>
+                          <a:latin typeface="Montserrat"/>
+                        </a:rPr>
+                        <a:t>ОФД-24 и прочие</a:t>
+                      </a:r>
+                    </a:p>
+                  </a:txBody>
+                  <a:tcPr anchor="ctr" marL="72000" marR="72000" marT="14400" marB="14400">
+                    <a:solidFill>
+                      <a:srgbClr val="F1F1F1"/>
+                    </a:solidFill>
+                  </a:tcPr>
+                </a:tc>
+                <a:tc>
+                  <a:txBody>
+                    <a:bodyPr/>
+                    <a:lstStyle/>
+                    <a:p>
+                      <a:pPr algn="r"/>
+                      <a:r>
+                        <a:rPr sz="1100" b="0">
+                          <a:solidFill>
+                            <a:srgbClr val="000000"/>
+                          </a:solidFill>
+                          <a:latin typeface="Montserrat"/>
+                        </a:rPr>
+                        <a:t>—</a:t>
+                      </a:r>
+                    </a:p>
+                  </a:txBody>
+                  <a:tcPr anchor="ctr" marL="72000" marR="72000" marT="14400" marB="14400">
+                    <a:solidFill>
+                      <a:srgbClr val="F1F1F1"/>
+                    </a:solidFill>
+                  </a:tcPr>
+                </a:tc>
+                <a:tc>
+                  <a:txBody>
+                    <a:bodyPr/>
+                    <a:lstStyle/>
+                    <a:p>
+                      <a:pPr algn="r"/>
+                      <a:r>
+                        <a:rPr sz="1100" b="0">
+                          <a:solidFill>
+                            <a:srgbClr val="000000"/>
+                          </a:solidFill>
+                          <a:latin typeface="Montserrat"/>
+                        </a:rPr>
+                        <a:t>—</a:t>
+                      </a:r>
+                    </a:p>
+                  </a:txBody>
+                  <a:tcPr anchor="ctr" marL="72000" marR="72000" marT="14400" marB="14400">
+                    <a:solidFill>
+                      <a:srgbClr val="F1F1F1"/>
+                    </a:solidFill>
+                  </a:tcPr>
+                </a:tc>
+                <a:tc>
+                  <a:txBody>
+                    <a:bodyPr/>
+                    <a:lstStyle/>
+                    <a:p>
+                      <a:pPr algn="r"/>
+                      <a:r>
+                        <a:rPr sz="1100" b="0">
+                          <a:solidFill>
+                            <a:srgbClr val="000000"/>
+                          </a:solidFill>
+                          <a:latin typeface="Montserrat"/>
+                        </a:rPr>
+                        <a:t>0,65</a:t>
+                      </a:r>
+                    </a:p>
+                  </a:txBody>
+                  <a:tcPr anchor="ctr" marL="72000" marR="72000" marT="14400" marB="14400">
+                    <a:solidFill>
+                      <a:srgbClr val="F1F1F1"/>
+                    </a:solidFill>
+                  </a:tcPr>
+                </a:tc>
+                <a:tc>
+                  <a:txBody>
+                    <a:bodyPr/>
+                    <a:lstStyle/>
+                    <a:p>
+                      <a:pPr algn="r"/>
+                      <a:r>
+                        <a:rPr sz="1100" b="0">
+                          <a:solidFill>
+                            <a:srgbClr val="000000"/>
+                          </a:solidFill>
+                          <a:latin typeface="Montserrat"/>
+                        </a:rPr>
+                        <a:t>·</a:t>
+                      </a:r>
+                    </a:p>
+                  </a:txBody>
+                  <a:tcPr anchor="ctr" marL="72000" marR="72000" marT="14400" marB="14400">
+                    <a:solidFill>
+                      <a:srgbClr val="F1F1F1"/>
+                    </a:solidFill>
+                  </a:tcPr>
+                </a:tc>
+                <a:tc>
+                  <a:txBody>
+                    <a:bodyPr/>
+                    <a:lstStyle/>
+                    <a:p>
+                      <a:pPr algn="r"/>
+                      <a:r>
+                        <a:rPr sz="1100" b="0">
+                          <a:solidFill>
+                            <a:srgbClr val="000000"/>
+                          </a:solidFill>
+                          <a:latin typeface="Montserrat"/>
+                        </a:rPr>
+                        <a:t>·</a:t>
+                      </a:r>
+                    </a:p>
+                  </a:txBody>
+                  <a:tcPr anchor="ctr" marL="72000" marR="72000" marT="14400" marB="14400">
+                    <a:solidFill>
+                      <a:srgbClr val="F1F1F1"/>
+                    </a:solidFill>
+                  </a:tcPr>
+                </a:tc>
+              </a:tr>
+            </a:tbl>
+          </a:graphicData>
+        </a:graphic>
+      </p:graphicFrame>
     </p:spTree>
   </p:cSld>
   <p:clrMapOvr>
@@ -49209,69 +49096,16 @@
       <p:grpSpPr/>
       <p:sp>
         <p:nvSpPr>
-          <p:cNvPr id="570" name="Google Shape;570;p24"/>
+          <p:cNvPr id="561" name="Google Shape;561;p15"/>
           <p:cNvSpPr txBox="1"/>
           <p:nvPr>
-            <p:ph idx="1" type="body"/>
+            <p:ph idx="1" type="subTitle"/>
           </p:nvPr>
         </p:nvSpPr>
         <p:spPr>
           <a:xfrm>
-            <a:off x="8148863" y="4790663"/>
-            <a:ext cx="3240000" cy="1080000"/>
-          </a:xfrm>
-          <a:prstGeom prst="rect">
-            <a:avLst/>
-          </a:prstGeom>
-          <a:noFill/>
-          <a:ln>
-            <a:noFill/>
-          </a:ln>
-        </p:spPr>
-        <p:txBody>
-          <a:bodyPr anchorCtr="0" anchor="t" bIns="45700" lIns="0" spcFirstLastPara="1" rIns="91425" wrap="square" tIns="45700">
-            <a:noAutofit/>
-          </a:bodyPr>
-          <a:lstStyle/>
-          <a:p>
-            <a:pPr indent="-9525" lvl="0" marL="9525" rtl="0" algn="l">
-              <a:lnSpc>
-                <a:spcPct val="100000"/>
-              </a:lnSpc>
-              <a:spcBef>
-                <a:spcPts val="0"/>
-              </a:spcBef>
-              <a:spcAft>
-                <a:spcPts val="0"/>
-              </a:spcAft>
-              <a:buClr>
-                <a:schemeClr val="dk1"/>
-              </a:buClr>
-              <a:buSzPts val="1600"/>
-              <a:buNone/>
-            </a:pPr>
-            <a:r>
-              <a:rPr lang="ru-RU">
-                <a:latin typeface="Montserrat"/>
-              </a:rPr>
-              <a:t>вывод по продукту</a:t>
-            </a:r>
-            <a:endParaRPr/>
-          </a:p>
-        </p:txBody>
-      </p:sp>
-      <p:sp>
-        <p:nvSpPr>
-          <p:cNvPr id="571" name="Google Shape;571;p24"/>
-          <p:cNvSpPr txBox="1"/>
-          <p:nvPr>
-            <p:ph idx="2" type="body"/>
-          </p:nvPr>
-        </p:nvSpPr>
-        <p:spPr>
-          <a:xfrm>
-            <a:off x="8148863" y="3809879"/>
-            <a:ext cx="3240000" cy="901800"/>
+            <a:off x="587375" y="4332747"/>
+            <a:ext cx="4679284" cy="1286173"/>
           </a:xfrm>
           <a:prstGeom prst="rect">
             <a:avLst/>
@@ -49289,103 +49123,50 @@
           <a:p>
             <a:pPr indent="0" lvl="0" marL="0" rtl="0" algn="l">
               <a:lnSpc>
-                <a:spcPct val="90000"/>
-              </a:lnSpc>
-              <a:spcBef>
-                <a:spcPts val="0"/>
-              </a:spcBef>
-              <a:spcAft>
-                <a:spcPts val="0"/>
-              </a:spcAft>
-              <a:buClr>
-                <a:schemeClr val="dk1"/>
-              </a:buClr>
-              <a:buSzPts val="6000"/>
+                <a:spcPct val="100000"/>
+              </a:lnSpc>
+              <a:spcBef>
+                <a:spcPts val="0"/>
+              </a:spcBef>
+              <a:spcAft>
+                <a:spcPts val="0"/>
+              </a:spcAft>
+              <a:buClr>
+                <a:schemeClr val="dk1"/>
+              </a:buClr>
+              <a:buSzPts val="1600"/>
               <a:buNone/>
             </a:pPr>
             <a:r>
-              <a:rPr b="1" lang="ru-RU">
+              <a:rPr lang="ru-RU">
                 <a:latin typeface="Montserrat"/>
-                <a:ea typeface="Montserrat"/>
-                <a:cs typeface="Montserrat"/>
-                <a:sym typeface="Montserrat"/>
               </a:rPr>
-              <a:t>недобор</a:t>
+              <a:t>Годовой план (Продукт = Маркет).</a:t>
             </a:r>
-            <a:endParaRPr b="1">
-              <a:latin typeface="Montserrat"/>
-              <a:ea typeface="Montserrat"/>
-              <a:cs typeface="Montserrat"/>
-              <a:sym typeface="Montserrat"/>
-            </a:endParaRPr>
+            <a:endParaRPr/>
+          </a:p>
+          <a:p>
+            <a:r>
+              <a:rPr lang="ru-RU">
+                <a:latin typeface="Montserrat"/>
+              </a:rPr>
+              <a:t>Факт за 5 мес — 44,5 млн (91% плана периода), −21% год к году.</a:t>
+            </a:r>
           </a:p>
         </p:txBody>
       </p:sp>
       <p:sp>
         <p:nvSpPr>
-          <p:cNvPr id="572" name="Google Shape;572;p24"/>
+          <p:cNvPr id="562" name="Google Shape;562;p15"/>
           <p:cNvSpPr txBox="1"/>
           <p:nvPr>
-            <p:ph idx="3" type="body"/>
+            <p:ph idx="2" type="body"/>
           </p:nvPr>
         </p:nvSpPr>
         <p:spPr>
           <a:xfrm>
-            <a:off x="8148863" y="2350380"/>
-            <a:ext cx="3240000" cy="1080000"/>
-          </a:xfrm>
-          <a:prstGeom prst="rect">
-            <a:avLst/>
-          </a:prstGeom>
-          <a:noFill/>
-          <a:ln>
-            <a:noFill/>
-          </a:ln>
-        </p:spPr>
-        <p:txBody>
-          <a:bodyPr anchorCtr="0" anchor="t" bIns="45700" lIns="0" spcFirstLastPara="1" rIns="91425" wrap="square" tIns="45700">
-            <a:noAutofit/>
-          </a:bodyPr>
-          <a:lstStyle/>
-          <a:p>
-            <a:pPr indent="-9525" lvl="0" marL="9525" rtl="0" algn="l">
-              <a:lnSpc>
-                <a:spcPct val="100000"/>
-              </a:lnSpc>
-              <a:spcBef>
-                <a:spcPts val="0"/>
-              </a:spcBef>
-              <a:spcAft>
-                <a:spcPts val="0"/>
-              </a:spcAft>
-              <a:buClr>
-                <a:schemeClr val="dk1"/>
-              </a:buClr>
-              <a:buSzPts val="1600"/>
-              <a:buNone/>
-            </a:pPr>
-            <a:r>
-              <a:rPr lang="ru-RU">
-                <a:latin typeface="Montserrat"/>
-              </a:rPr>
-              <a:t>год к году — падение спроса</a:t>
-            </a:r>
-            <a:endParaRPr/>
-          </a:p>
-        </p:txBody>
-      </p:sp>
-      <p:sp>
-        <p:nvSpPr>
-          <p:cNvPr id="573" name="Google Shape;573;p24"/>
-          <p:cNvSpPr txBox="1"/>
-          <p:nvPr>
-            <p:ph idx="4" type="body"/>
-          </p:nvPr>
-        </p:nvSpPr>
-        <p:spPr>
-          <a:xfrm>
-            <a:off x="8148863" y="1382737"/>
-            <a:ext cx="3240000" cy="901800"/>
+            <a:off x="587374" y="2882349"/>
+            <a:ext cx="4679285" cy="1203516"/>
           </a:xfrm>
           <a:prstGeom prst="rect">
             <a:avLst/>
@@ -49414,127 +49195,7 @@
               <a:buClr>
                 <a:schemeClr val="dk1"/>
               </a:buClr>
-              <a:buSzPts val="6000"/>
-              <a:buNone/>
-            </a:pPr>
-            <a:r>
-              <a:rPr b="1" lang="ru-RU">
-                <a:solidFill>
-                  <a:schemeClr val="accent1"/>
-                </a:solidFill>
-                <a:latin typeface="Montserrat"/>
-                <a:ea typeface="Montserrat"/>
-                <a:cs typeface="Montserrat"/>
-                <a:sym typeface="Montserrat"/>
-              </a:rPr>
-              <a:t>−21 %</a:t>
-            </a:r>
-            <a:endParaRPr b="1">
-              <a:solidFill>
-                <a:schemeClr val="accent1"/>
-              </a:solidFill>
-              <a:latin typeface="Montserrat"/>
-              <a:ea typeface="Montserrat"/>
-              <a:cs typeface="Montserrat"/>
-              <a:sym typeface="Montserrat"/>
-            </a:endParaRPr>
-          </a:p>
-        </p:txBody>
-      </p:sp>
-      <p:sp>
-        <p:nvSpPr>
-          <p:cNvPr id="574" name="Google Shape;574;p24"/>
-          <p:cNvSpPr txBox="1"/>
-          <p:nvPr>
-            <p:ph idx="5" type="body"/>
-          </p:nvPr>
-        </p:nvSpPr>
-        <p:spPr>
-          <a:xfrm>
-            <a:off x="586013" y="2350380"/>
-            <a:ext cx="3240000" cy="1080000"/>
-          </a:xfrm>
-          <a:prstGeom prst="rect">
-            <a:avLst/>
-          </a:prstGeom>
-          <a:noFill/>
-          <a:ln>
-            <a:noFill/>
-          </a:ln>
-        </p:spPr>
-        <p:txBody>
-          <a:bodyPr anchorCtr="0" anchor="t" bIns="45700" lIns="0" spcFirstLastPara="1" rIns="91425" wrap="square" tIns="45700">
-            <a:noAutofit/>
-          </a:bodyPr>
-          <a:lstStyle/>
-          <a:p>
-            <a:pPr indent="-9525" lvl="0" marL="9525" rtl="0" algn="l">
-              <a:lnSpc>
-                <a:spcPct val="100000"/>
-              </a:lnSpc>
-              <a:spcBef>
-                <a:spcPts val="0"/>
-              </a:spcBef>
-              <a:spcAft>
-                <a:spcPts val="0"/>
-              </a:spcAft>
-              <a:buClr>
-                <a:schemeClr val="dk1"/>
-              </a:buClr>
-              <a:buSzPts val="1600"/>
-              <a:buNone/>
-            </a:pPr>
-            <a:r>
-              <a:rPr lang="ru-RU">
-                <a:latin typeface="Montserrat"/>
-              </a:rPr>
-              <a:t>Годовой план (Продукт = Маркет)</a:t>
-            </a:r>
-            <a:endParaRPr/>
-          </a:p>
-        </p:txBody>
-      </p:sp>
-      <p:sp>
-        <p:nvSpPr>
-          <p:cNvPr id="575" name="Google Shape;575;p24"/>
-          <p:cNvSpPr txBox="1"/>
-          <p:nvPr>
-            <p:ph idx="6" type="body"/>
-          </p:nvPr>
-        </p:nvSpPr>
-        <p:spPr>
-          <a:xfrm>
-            <a:off x="586012" y="1382737"/>
-            <a:ext cx="3240000" cy="901800"/>
-          </a:xfrm>
-          <a:prstGeom prst="rect">
-            <a:avLst/>
-          </a:prstGeom>
-          <a:noFill/>
-          <a:ln>
-            <a:noFill/>
-          </a:ln>
-        </p:spPr>
-        <p:txBody>
-          <a:bodyPr anchorCtr="0" anchor="t" bIns="45700" lIns="0" spcFirstLastPara="1" rIns="91425" wrap="square" tIns="45700">
-            <a:noAutofit/>
-          </a:bodyPr>
-          <a:lstStyle/>
-          <a:p>
-            <a:pPr indent="0" lvl="0" marL="0" rtl="0" algn="l">
-              <a:lnSpc>
-                <a:spcPct val="90000"/>
-              </a:lnSpc>
-              <a:spcBef>
-                <a:spcPts val="0"/>
-              </a:spcBef>
-              <a:spcAft>
-                <a:spcPts val="0"/>
-              </a:spcAft>
-              <a:buClr>
-                <a:schemeClr val="dk1"/>
-              </a:buClr>
-              <a:buSzPts val="6000"/>
+              <a:buSzPts val="11000"/>
               <a:buNone/>
             </a:pPr>
             <a:r>
@@ -49557,69 +49218,16 @@
       </p:sp>
       <p:sp>
         <p:nvSpPr>
-          <p:cNvPr id="576" name="Google Shape;576;p24"/>
+          <p:cNvPr id="563" name="Google Shape;563;p15"/>
           <p:cNvSpPr txBox="1"/>
           <p:nvPr>
-            <p:ph idx="7" type="body"/>
+            <p:ph idx="3" type="body"/>
           </p:nvPr>
         </p:nvSpPr>
         <p:spPr>
           <a:xfrm>
-            <a:off x="586013" y="4790663"/>
-            <a:ext cx="3240000" cy="1080000"/>
-          </a:xfrm>
-          <a:prstGeom prst="rect">
-            <a:avLst/>
-          </a:prstGeom>
-          <a:noFill/>
-          <a:ln>
-            <a:noFill/>
-          </a:ln>
-        </p:spPr>
-        <p:txBody>
-          <a:bodyPr anchorCtr="0" anchor="t" bIns="45700" lIns="0" spcFirstLastPara="1" rIns="91425" wrap="square" tIns="45700">
-            <a:noAutofit/>
-          </a:bodyPr>
-          <a:lstStyle/>
-          <a:p>
-            <a:pPr indent="-9525" lvl="0" marL="9525" rtl="0" algn="l">
-              <a:lnSpc>
-                <a:spcPct val="100000"/>
-              </a:lnSpc>
-              <a:spcBef>
-                <a:spcPts val="0"/>
-              </a:spcBef>
-              <a:spcAft>
-                <a:spcPts val="0"/>
-              </a:spcAft>
-              <a:buClr>
-                <a:schemeClr val="dk1"/>
-              </a:buClr>
-              <a:buSzPts val="1600"/>
-              <a:buNone/>
-            </a:pPr>
-            <a:r>
-              <a:rPr lang="ru-RU">
-                <a:latin typeface="Montserrat"/>
-              </a:rPr>
-              <a:t>Прогноз года (база)</a:t>
-            </a:r>
-            <a:endParaRPr/>
-          </a:p>
-        </p:txBody>
-      </p:sp>
-      <p:sp>
-        <p:nvSpPr>
-          <p:cNvPr id="577" name="Google Shape;577;p24"/>
-          <p:cNvSpPr txBox="1"/>
-          <p:nvPr>
-            <p:ph idx="8" type="body"/>
-          </p:nvPr>
-        </p:nvSpPr>
-        <p:spPr>
-          <a:xfrm>
-            <a:off x="586013" y="3809879"/>
-            <a:ext cx="3240000" cy="901800"/>
+            <a:off x="6116209" y="2882349"/>
+            <a:ext cx="4679284" cy="1203516"/>
           </a:xfrm>
           <a:prstGeom prst="rect">
             <a:avLst/>
@@ -49648,235 +49256,7 @@
               <a:buClr>
                 <a:schemeClr val="dk1"/>
               </a:buClr>
-              <a:buSzPts val="6000"/>
-              <a:buNone/>
-            </a:pPr>
-            <a:r>
-              <a:rPr b="1" lang="ru-RU">
-                <a:latin typeface="Montserrat"/>
-                <a:ea typeface="Montserrat"/>
-                <a:cs typeface="Montserrat"/>
-                <a:sym typeface="Montserrat"/>
-              </a:rPr>
-              <a:t>102 млн ₽</a:t>
-            </a:r>
-            <a:endParaRPr b="1">
-              <a:latin typeface="Montserrat"/>
-              <a:ea typeface="Montserrat"/>
-              <a:cs typeface="Montserrat"/>
-              <a:sym typeface="Montserrat"/>
-            </a:endParaRPr>
-          </a:p>
-        </p:txBody>
-      </p:sp>
-      <p:sp>
-        <p:nvSpPr>
-          <p:cNvPr id="578" name="Google Shape;578;p24"/>
-          <p:cNvSpPr txBox="1"/>
-          <p:nvPr>
-            <p:ph idx="9" type="body"/>
-          </p:nvPr>
-        </p:nvSpPr>
-        <p:spPr>
-          <a:xfrm>
-            <a:off x="4376963" y="2350380"/>
-            <a:ext cx="3240000" cy="1080000"/>
-          </a:xfrm>
-          <a:prstGeom prst="rect">
-            <a:avLst/>
-          </a:prstGeom>
-          <a:noFill/>
-          <a:ln>
-            <a:noFill/>
-          </a:ln>
-        </p:spPr>
-        <p:txBody>
-          <a:bodyPr anchorCtr="0" anchor="t" bIns="45700" lIns="0" spcFirstLastPara="1" rIns="91425" wrap="square" tIns="45700">
-            <a:noAutofit/>
-          </a:bodyPr>
-          <a:lstStyle/>
-          <a:p>
-            <a:pPr indent="-9525" lvl="0" marL="9525" rtl="0" algn="l">
-              <a:lnSpc>
-                <a:spcPct val="100000"/>
-              </a:lnSpc>
-              <a:spcBef>
-                <a:spcPts val="0"/>
-              </a:spcBef>
-              <a:spcAft>
-                <a:spcPts val="0"/>
-              </a:spcAft>
-              <a:buClr>
-                <a:schemeClr val="dk1"/>
-              </a:buClr>
-              <a:buSzPts val="1600"/>
-              <a:buNone/>
-            </a:pPr>
-            <a:r>
-              <a:rPr lang="ru-RU">
-                <a:latin typeface="Montserrat"/>
-              </a:rPr>
-              <a:t>Факт за 5 мес · 91% плана периода</a:t>
-            </a:r>
-            <a:endParaRPr/>
-          </a:p>
-        </p:txBody>
-      </p:sp>
-      <p:sp>
-        <p:nvSpPr>
-          <p:cNvPr id="579" name="Google Shape;579;p24"/>
-          <p:cNvSpPr txBox="1"/>
-          <p:nvPr>
-            <p:ph idx="13" type="body"/>
-          </p:nvPr>
-        </p:nvSpPr>
-        <p:spPr>
-          <a:xfrm>
-            <a:off x="4376962" y="1382737"/>
-            <a:ext cx="3240000" cy="901800"/>
-          </a:xfrm>
-          <a:prstGeom prst="rect">
-            <a:avLst/>
-          </a:prstGeom>
-          <a:noFill/>
-          <a:ln>
-            <a:noFill/>
-          </a:ln>
-        </p:spPr>
-        <p:txBody>
-          <a:bodyPr anchorCtr="0" anchor="t" bIns="45700" lIns="0" spcFirstLastPara="1" rIns="91425" wrap="square" tIns="45700">
-            <a:noAutofit/>
-          </a:bodyPr>
-          <a:lstStyle/>
-          <a:p>
-            <a:pPr indent="0" lvl="0" marL="0" rtl="0" algn="l">
-              <a:lnSpc>
-                <a:spcPct val="90000"/>
-              </a:lnSpc>
-              <a:spcBef>
-                <a:spcPts val="0"/>
-              </a:spcBef>
-              <a:spcAft>
-                <a:spcPts val="0"/>
-              </a:spcAft>
-              <a:buClr>
-                <a:schemeClr val="dk1"/>
-              </a:buClr>
-              <a:buSzPts val="6000"/>
-              <a:buNone/>
-            </a:pPr>
-            <a:r>
-              <a:rPr b="1" lang="ru-RU">
-                <a:latin typeface="Montserrat"/>
-                <a:ea typeface="Montserrat"/>
-                <a:cs typeface="Montserrat"/>
-                <a:sym typeface="Montserrat"/>
-              </a:rPr>
-              <a:t>44,5 млн ₽</a:t>
-            </a:r>
-            <a:endParaRPr b="1">
-              <a:latin typeface="Montserrat"/>
-              <a:ea typeface="Montserrat"/>
-              <a:cs typeface="Montserrat"/>
-              <a:sym typeface="Montserrat"/>
-            </a:endParaRPr>
-          </a:p>
-        </p:txBody>
-      </p:sp>
-      <p:sp>
-        <p:nvSpPr>
-          <p:cNvPr id="580" name="Google Shape;580;p24"/>
-          <p:cNvSpPr txBox="1"/>
-          <p:nvPr>
-            <p:ph idx="14" type="body"/>
-          </p:nvPr>
-        </p:nvSpPr>
-        <p:spPr>
-          <a:xfrm>
-            <a:off x="4376963" y="4790663"/>
-            <a:ext cx="3240000" cy="1080000"/>
-          </a:xfrm>
-          <a:prstGeom prst="rect">
-            <a:avLst/>
-          </a:prstGeom>
-          <a:noFill/>
-          <a:ln>
-            <a:noFill/>
-          </a:ln>
-        </p:spPr>
-        <p:txBody>
-          <a:bodyPr anchorCtr="0" anchor="t" bIns="45700" lIns="0" spcFirstLastPara="1" rIns="91425" wrap="square" tIns="45700">
-            <a:noAutofit/>
-          </a:bodyPr>
-          <a:lstStyle/>
-          <a:p>
-            <a:pPr indent="-9525" lvl="0" marL="9525" rtl="0" algn="l">
-              <a:lnSpc>
-                <a:spcPct val="100000"/>
-              </a:lnSpc>
-              <a:spcBef>
-                <a:spcPts val="0"/>
-              </a:spcBef>
-              <a:spcAft>
-                <a:spcPts val="0"/>
-              </a:spcAft>
-              <a:buClr>
-                <a:schemeClr val="dk1"/>
-              </a:buClr>
-              <a:buSzPts val="1600"/>
-              <a:buNone/>
-            </a:pPr>
-            <a:r>
-              <a:rPr lang="ru-RU">
-                <a:latin typeface="Montserrat"/>
-              </a:rPr>
-              <a:t>Выполнение плана · коридор 78–91%</a:t>
-            </a:r>
-            <a:endParaRPr/>
-          </a:p>
-        </p:txBody>
-      </p:sp>
-      <p:sp>
-        <p:nvSpPr>
-          <p:cNvPr id="581" name="Google Shape;581;p24"/>
-          <p:cNvSpPr txBox="1"/>
-          <p:nvPr>
-            <p:ph idx="15" type="body"/>
-          </p:nvPr>
-        </p:nvSpPr>
-        <p:spPr>
-          <a:xfrm>
-            <a:off x="4376962" y="3809879"/>
-            <a:ext cx="3240000" cy="901800"/>
-          </a:xfrm>
-          <a:prstGeom prst="rect">
-            <a:avLst/>
-          </a:prstGeom>
-          <a:noFill/>
-          <a:ln>
-            <a:noFill/>
-          </a:ln>
-        </p:spPr>
-        <p:txBody>
-          <a:bodyPr anchorCtr="0" anchor="t" bIns="45700" lIns="0" spcFirstLastPara="1" rIns="91425" wrap="square" tIns="45700">
-            <a:noAutofit/>
-          </a:bodyPr>
-          <a:lstStyle/>
-          <a:p>
-            <a:pPr indent="0" lvl="0" marL="0" rtl="0" algn="l">
-              <a:lnSpc>
-                <a:spcPct val="90000"/>
-              </a:lnSpc>
-              <a:spcBef>
-                <a:spcPts val="0"/>
-              </a:spcBef>
-              <a:spcAft>
-                <a:spcPts val="0"/>
-              </a:spcAft>
-              <a:buClr>
-                <a:schemeClr val="dk1"/>
-              </a:buClr>
-              <a:buSzPts val="6000"/>
+              <a:buSzPts val="11000"/>
               <a:buNone/>
             </a:pPr>
             <a:r>
@@ -49899,7 +49279,68 @@
       </p:sp>
       <p:sp>
         <p:nvSpPr>
-          <p:cNvPr id="66" name="Google Shape;66;p63"/>
+          <p:cNvPr id="564" name="Google Shape;564;p15"/>
+          <p:cNvSpPr txBox="1"/>
+          <p:nvPr>
+            <p:ph idx="4" type="body"/>
+          </p:nvPr>
+        </p:nvSpPr>
+        <p:spPr>
+          <a:xfrm>
+            <a:off x="6116208" y="4332748"/>
+            <a:ext cx="4679283" cy="1286173"/>
+          </a:xfrm>
+          <a:prstGeom prst="rect">
+            <a:avLst/>
+          </a:prstGeom>
+          <a:noFill/>
+          <a:ln>
+            <a:noFill/>
+          </a:ln>
+        </p:spPr>
+        <p:txBody>
+          <a:bodyPr anchorCtr="0" anchor="t" bIns="45700" lIns="0" spcFirstLastPara="1" rIns="91425" wrap="square" tIns="45700">
+            <a:normAutofit/>
+          </a:bodyPr>
+          <a:lstStyle/>
+          <a:p>
+            <a:pPr indent="-9525" lvl="0" marL="9525" rtl="0" algn="l">
+              <a:lnSpc>
+                <a:spcPct val="100000"/>
+              </a:lnSpc>
+              <a:spcBef>
+                <a:spcPts val="0"/>
+              </a:spcBef>
+              <a:spcAft>
+                <a:spcPts val="0"/>
+              </a:spcAft>
+              <a:buClr>
+                <a:schemeClr val="dk1"/>
+              </a:buClr>
+              <a:buSzPts val="1600"/>
+              <a:buNone/>
+            </a:pPr>
+            <a:r>
+              <a:rPr lang="ru-RU">
+                <a:latin typeface="Montserrat"/>
+              </a:rPr>
+              <a:t>Прогноз выполнения года: 102 млн ₽ (база).</a:t>
+            </a:r>
+            <a:endParaRPr/>
+          </a:p>
+          <a:p>
+            <a:r>
+              <a:rPr lang="ru-RU">
+                <a:latin typeface="Montserrat"/>
+              </a:rPr>
+              <a:t>Коридор сценариев 78–91%. Вывод: недовыполнение.</a:t>
+            </a:r>
+          </a:p>
+        </p:txBody>
+      </p:sp>
+      <p:sp>
+        <p:nvSpPr>
+          <p:cNvPr id="565" name="Google Shape;565;p15"/>
           <p:cNvSpPr txBox="1"/>
           <p:nvPr>
             <p:ph type="title"/>
@@ -49908,7 +49349,7 @@
         <p:spPr>
           <a:xfrm>
             <a:off x="587375" y="584200"/>
-            <a:ext cx="11017249" cy="647700"/>
+            <a:ext cx="11017249" cy="1257852"/>
           </a:xfrm>
           <a:prstGeom prst="rect">
             <a:avLst/>
@@ -49922,8 +49363,9 @@
           <a:bodyPr anchorCtr="0" anchor="t" bIns="0" lIns="0" spcFirstLastPara="1" rIns="0" wrap="square" tIns="0">
             <a:noAutofit/>
           </a:bodyPr>
-          <a:lstStyle>
-            <a:lvl1pPr lvl="0" algn="l">
+          <a:lstStyle/>
+          <a:p>
+            <a:pPr indent="0" lvl="0" marL="0" rtl="0" algn="l">
               <a:lnSpc>
                 <a:spcPct val="80000"/>
               </a:lnSpc>
@@ -49937,177 +49379,24 @@
                 <a:schemeClr val="dk1"/>
               </a:buClr>
               <a:buSzPts val="5000"/>
-              <a:buNone/>
-              <a:defRPr sz="5000"/>
-            </a:lvl1pPr>
-            <a:lvl2pPr lvl="1" algn="l">
-              <a:lnSpc>
-                <a:spcPct val="100000"/>
-              </a:lnSpc>
-              <a:spcBef>
-                <a:spcPts val="0"/>
-              </a:spcBef>
-              <a:spcAft>
-                <a:spcPts val="0"/>
-              </a:spcAft>
-              <a:buSzPts val="1400"/>
-              <a:buFont typeface="Montserrat SemiBold"/>
-              <a:buNone/>
-              <a:defRPr>
-                <a:latin typeface="Montserrat SemiBold"/>
-                <a:ea typeface="Montserrat SemiBold"/>
-                <a:cs typeface="Montserrat SemiBold"/>
-                <a:sym typeface="Montserrat SemiBold"/>
-              </a:defRPr>
-            </a:lvl2pPr>
-            <a:lvl3pPr lvl="2" algn="l">
-              <a:lnSpc>
-                <a:spcPct val="100000"/>
-              </a:lnSpc>
-              <a:spcBef>
-                <a:spcPts val="0"/>
-              </a:spcBef>
-              <a:spcAft>
-                <a:spcPts val="0"/>
-              </a:spcAft>
-              <a:buSzPts val="1400"/>
-              <a:buFont typeface="Montserrat SemiBold"/>
-              <a:buNone/>
-              <a:defRPr>
-                <a:latin typeface="Montserrat SemiBold"/>
-                <a:ea typeface="Montserrat SemiBold"/>
-                <a:cs typeface="Montserrat SemiBold"/>
-                <a:sym typeface="Montserrat SemiBold"/>
-              </a:defRPr>
-            </a:lvl3pPr>
-            <a:lvl4pPr lvl="3" algn="l">
-              <a:lnSpc>
-                <a:spcPct val="100000"/>
-              </a:lnSpc>
-              <a:spcBef>
-                <a:spcPts val="0"/>
-              </a:spcBef>
-              <a:spcAft>
-                <a:spcPts val="0"/>
-              </a:spcAft>
-              <a:buSzPts val="1400"/>
-              <a:buFont typeface="Montserrat SemiBold"/>
-              <a:buNone/>
-              <a:defRPr>
-                <a:latin typeface="Montserrat SemiBold"/>
-                <a:ea typeface="Montserrat SemiBold"/>
-                <a:cs typeface="Montserrat SemiBold"/>
-                <a:sym typeface="Montserrat SemiBold"/>
-              </a:defRPr>
-            </a:lvl4pPr>
-            <a:lvl5pPr lvl="4" algn="l">
-              <a:lnSpc>
-                <a:spcPct val="100000"/>
-              </a:lnSpc>
-              <a:spcBef>
-                <a:spcPts val="0"/>
-              </a:spcBef>
-              <a:spcAft>
-                <a:spcPts val="0"/>
-              </a:spcAft>
-              <a:buSzPts val="1400"/>
-              <a:buFont typeface="Montserrat SemiBold"/>
-              <a:buNone/>
-              <a:defRPr>
-                <a:latin typeface="Montserrat SemiBold"/>
-                <a:ea typeface="Montserrat SemiBold"/>
-                <a:cs typeface="Montserrat SemiBold"/>
-                <a:sym typeface="Montserrat SemiBold"/>
-              </a:defRPr>
-            </a:lvl5pPr>
-            <a:lvl6pPr lvl="5" algn="l">
-              <a:lnSpc>
-                <a:spcPct val="100000"/>
-              </a:lnSpc>
-              <a:spcBef>
-                <a:spcPts val="0"/>
-              </a:spcBef>
-              <a:spcAft>
-                <a:spcPts val="0"/>
-              </a:spcAft>
-              <a:buSzPts val="1400"/>
-              <a:buFont typeface="Montserrat SemiBold"/>
-              <a:buNone/>
-              <a:defRPr>
-                <a:latin typeface="Montserrat SemiBold"/>
-                <a:ea typeface="Montserrat SemiBold"/>
-                <a:cs typeface="Montserrat SemiBold"/>
-                <a:sym typeface="Montserrat SemiBold"/>
-              </a:defRPr>
-            </a:lvl6pPr>
-            <a:lvl7pPr lvl="6" algn="l">
-              <a:lnSpc>
-                <a:spcPct val="100000"/>
-              </a:lnSpc>
-              <a:spcBef>
-                <a:spcPts val="0"/>
-              </a:spcBef>
-              <a:spcAft>
-                <a:spcPts val="0"/>
-              </a:spcAft>
-              <a:buSzPts val="1400"/>
-              <a:buFont typeface="Montserrat SemiBold"/>
-              <a:buNone/>
-              <a:defRPr>
-                <a:latin typeface="Montserrat SemiBold"/>
-                <a:ea typeface="Montserrat SemiBold"/>
-                <a:cs typeface="Montserrat SemiBold"/>
-                <a:sym typeface="Montserrat SemiBold"/>
-              </a:defRPr>
-            </a:lvl7pPr>
-            <a:lvl8pPr lvl="7" algn="l">
-              <a:lnSpc>
-                <a:spcPct val="100000"/>
-              </a:lnSpc>
-              <a:spcBef>
-                <a:spcPts val="0"/>
-              </a:spcBef>
-              <a:spcAft>
-                <a:spcPts val="0"/>
-              </a:spcAft>
-              <a:buSzPts val="1400"/>
-              <a:buFont typeface="Montserrat SemiBold"/>
-              <a:buNone/>
-              <a:defRPr>
-                <a:latin typeface="Montserrat SemiBold"/>
-                <a:ea typeface="Montserrat SemiBold"/>
-                <a:cs typeface="Montserrat SemiBold"/>
-                <a:sym typeface="Montserrat SemiBold"/>
-              </a:defRPr>
-            </a:lvl8pPr>
-            <a:lvl9pPr lvl="8" algn="l">
-              <a:lnSpc>
-                <a:spcPct val="100000"/>
-              </a:lnSpc>
-              <a:spcBef>
-                <a:spcPts val="0"/>
-              </a:spcBef>
-              <a:spcAft>
-                <a:spcPts val="0"/>
-              </a:spcAft>
-              <a:buSzPts val="1400"/>
-              <a:buFont typeface="Montserrat SemiBold"/>
-              <a:buNone/>
-              <a:defRPr>
-                <a:latin typeface="Montserrat SemiBold"/>
-                <a:ea typeface="Montserrat SemiBold"/>
-                <a:cs typeface="Montserrat SemiBold"/>
-                <a:sym typeface="Montserrat SemiBold"/>
-              </a:defRPr>
-            </a:lvl9pPr>
-          </a:lstStyle>
-          <a:p>
+              <a:buFont typeface="Arial"/>
+              <a:buNone/>
+            </a:pPr>
             <a:r>
-              <a:rPr>
+              <a:rPr b="1" lang="ru-RU">
                 <a:latin typeface="Montserrat"/>
+                <a:ea typeface="Montserrat"/>
+                <a:cs typeface="Montserrat"/>
+                <a:sym typeface="Montserrat"/>
               </a:rPr>
               <a:t>Маркет — выполнение плана 2026</a:t>
             </a:r>
+            <a:endParaRPr b="1">
+              <a:latin typeface="Montserrat"/>
+              <a:ea typeface="Montserrat"/>
+              <a:cs typeface="Montserrat"/>
+              <a:sym typeface="Montserrat"/>
+            </a:endParaRPr>
           </a:p>
         </p:txBody>
       </p:sp>
@@ -50191,69 +49480,16 @@
       <p:grpSpPr/>
       <p:sp>
         <p:nvSpPr>
-          <p:cNvPr id="570" name="Google Shape;570;p24"/>
+          <p:cNvPr id="561" name="Google Shape;561;p15"/>
           <p:cNvSpPr txBox="1"/>
           <p:nvPr>
-            <p:ph idx="1" type="body"/>
+            <p:ph idx="1" type="subTitle"/>
           </p:nvPr>
         </p:nvSpPr>
         <p:spPr>
           <a:xfrm>
-            <a:off x="8148863" y="4790663"/>
-            <a:ext cx="3240000" cy="1080000"/>
-          </a:xfrm>
-          <a:prstGeom prst="rect">
-            <a:avLst/>
-          </a:prstGeom>
-          <a:noFill/>
-          <a:ln>
-            <a:noFill/>
-          </a:ln>
-        </p:spPr>
-        <p:txBody>
-          <a:bodyPr anchorCtr="0" anchor="t" bIns="45700" lIns="0" spcFirstLastPara="1" rIns="91425" wrap="square" tIns="45700">
-            <a:noAutofit/>
-          </a:bodyPr>
-          <a:lstStyle/>
-          <a:p>
-            <a:pPr indent="-9525" lvl="0" marL="9525" rtl="0" algn="l">
-              <a:lnSpc>
-                <a:spcPct val="100000"/>
-              </a:lnSpc>
-              <a:spcBef>
-                <a:spcPts val="0"/>
-              </a:spcBef>
-              <a:spcAft>
-                <a:spcPts val="0"/>
-              </a:spcAft>
-              <a:buClr>
-                <a:schemeClr val="dk1"/>
-              </a:buClr>
-              <a:buSzPts val="1600"/>
-              <a:buNone/>
-            </a:pPr>
-            <a:r>
-              <a:rPr lang="ru-RU">
-                <a:latin typeface="Montserrat"/>
-              </a:rPr>
-              <a:t>вывод по продукту</a:t>
-            </a:r>
-            <a:endParaRPr/>
-          </a:p>
-        </p:txBody>
-      </p:sp>
-      <p:sp>
-        <p:nvSpPr>
-          <p:cNvPr id="571" name="Google Shape;571;p24"/>
-          <p:cNvSpPr txBox="1"/>
-          <p:nvPr>
-            <p:ph idx="2" type="body"/>
-          </p:nvPr>
-        </p:nvSpPr>
-        <p:spPr>
-          <a:xfrm>
-            <a:off x="8148863" y="3809879"/>
-            <a:ext cx="3240000" cy="901800"/>
+            <a:off x="587375" y="4332747"/>
+            <a:ext cx="4679284" cy="1286173"/>
           </a:xfrm>
           <a:prstGeom prst="rect">
             <a:avLst/>
@@ -50271,103 +49507,50 @@
           <a:p>
             <a:pPr indent="0" lvl="0" marL="0" rtl="0" algn="l">
               <a:lnSpc>
-                <a:spcPct val="90000"/>
-              </a:lnSpc>
-              <a:spcBef>
-                <a:spcPts val="0"/>
-              </a:spcBef>
-              <a:spcAft>
-                <a:spcPts val="0"/>
-              </a:spcAft>
-              <a:buClr>
-                <a:schemeClr val="dk1"/>
-              </a:buClr>
-              <a:buSzPts val="6000"/>
+                <a:spcPct val="100000"/>
+              </a:lnSpc>
+              <a:spcBef>
+                <a:spcPts val="0"/>
+              </a:spcBef>
+              <a:spcAft>
+                <a:spcPts val="0"/>
+              </a:spcAft>
+              <a:buClr>
+                <a:schemeClr val="dk1"/>
+              </a:buClr>
+              <a:buSzPts val="1600"/>
               <a:buNone/>
             </a:pPr>
             <a:r>
-              <a:rPr b="1" lang="ru-RU">
+              <a:rPr lang="ru-RU">
                 <a:latin typeface="Montserrat"/>
-                <a:ea typeface="Montserrat"/>
-                <a:cs typeface="Montserrat"/>
-                <a:sym typeface="Montserrat"/>
               </a:rPr>
-              <a:t>перевыполнение</a:t>
+              <a:t>Годовой план (проект п453).</a:t>
             </a:r>
-            <a:endParaRPr b="1">
-              <a:latin typeface="Montserrat"/>
-              <a:ea typeface="Montserrat"/>
-              <a:cs typeface="Montserrat"/>
-              <a:sym typeface="Montserrat"/>
-            </a:endParaRPr>
+            <a:endParaRPr/>
+          </a:p>
+          <a:p>
+            <a:r>
+              <a:rPr lang="ru-RU">
+                <a:latin typeface="Montserrat"/>
+              </a:rPr>
+              <a:t>Факт за 5 мес — 18,9 млн (123% плана периода), −16% год к году.</a:t>
+            </a:r>
           </a:p>
         </p:txBody>
       </p:sp>
       <p:sp>
         <p:nvSpPr>
-          <p:cNvPr id="572" name="Google Shape;572;p24"/>
+          <p:cNvPr id="562" name="Google Shape;562;p15"/>
           <p:cNvSpPr txBox="1"/>
           <p:nvPr>
-            <p:ph idx="3" type="body"/>
+            <p:ph idx="2" type="body"/>
           </p:nvPr>
         </p:nvSpPr>
         <p:spPr>
           <a:xfrm>
-            <a:off x="8148863" y="2350380"/>
-            <a:ext cx="3240000" cy="1080000"/>
-          </a:xfrm>
-          <a:prstGeom prst="rect">
-            <a:avLst/>
-          </a:prstGeom>
-          <a:noFill/>
-          <a:ln>
-            <a:noFill/>
-          </a:ln>
-        </p:spPr>
-        <p:txBody>
-          <a:bodyPr anchorCtr="0" anchor="t" bIns="45700" lIns="0" spcFirstLastPara="1" rIns="91425" wrap="square" tIns="45700">
-            <a:noAutofit/>
-          </a:bodyPr>
-          <a:lstStyle/>
-          <a:p>
-            <a:pPr indent="-9525" lvl="0" marL="9525" rtl="0" algn="l">
-              <a:lnSpc>
-                <a:spcPct val="100000"/>
-              </a:lnSpc>
-              <a:spcBef>
-                <a:spcPts val="0"/>
-              </a:spcBef>
-              <a:spcAft>
-                <a:spcPts val="0"/>
-              </a:spcAft>
-              <a:buClr>
-                <a:schemeClr val="dk1"/>
-              </a:buClr>
-              <a:buSzPts val="1600"/>
-              <a:buNone/>
-            </a:pPr>
-            <a:r>
-              <a:rPr lang="ru-RU">
-                <a:latin typeface="Montserrat"/>
-              </a:rPr>
-              <a:t>год к году (план консервативен)</a:t>
-            </a:r>
-            <a:endParaRPr/>
-          </a:p>
-        </p:txBody>
-      </p:sp>
-      <p:sp>
-        <p:nvSpPr>
-          <p:cNvPr id="573" name="Google Shape;573;p24"/>
-          <p:cNvSpPr txBox="1"/>
-          <p:nvPr>
-            <p:ph idx="4" type="body"/>
-          </p:nvPr>
-        </p:nvSpPr>
-        <p:spPr>
-          <a:xfrm>
-            <a:off x="8148863" y="1382737"/>
-            <a:ext cx="3240000" cy="901800"/>
+            <a:off x="587374" y="2882349"/>
+            <a:ext cx="4679285" cy="1203516"/>
           </a:xfrm>
           <a:prstGeom prst="rect">
             <a:avLst/>
@@ -50396,127 +49579,7 @@
               <a:buClr>
                 <a:schemeClr val="dk1"/>
               </a:buClr>
-              <a:buSzPts val="6000"/>
-              <a:buNone/>
-            </a:pPr>
-            <a:r>
-              <a:rPr b="1" lang="ru-RU">
-                <a:solidFill>
-                  <a:schemeClr val="accent1"/>
-                </a:solidFill>
-                <a:latin typeface="Montserrat"/>
-                <a:ea typeface="Montserrat"/>
-                <a:cs typeface="Montserrat"/>
-                <a:sym typeface="Montserrat"/>
-              </a:rPr>
-              <a:t>−16 %</a:t>
-            </a:r>
-            <a:endParaRPr b="1">
-              <a:solidFill>
-                <a:schemeClr val="accent1"/>
-              </a:solidFill>
-              <a:latin typeface="Montserrat"/>
-              <a:ea typeface="Montserrat"/>
-              <a:cs typeface="Montserrat"/>
-              <a:sym typeface="Montserrat"/>
-            </a:endParaRPr>
-          </a:p>
-        </p:txBody>
-      </p:sp>
-      <p:sp>
-        <p:nvSpPr>
-          <p:cNvPr id="574" name="Google Shape;574;p24"/>
-          <p:cNvSpPr txBox="1"/>
-          <p:nvPr>
-            <p:ph idx="5" type="body"/>
-          </p:nvPr>
-        </p:nvSpPr>
-        <p:spPr>
-          <a:xfrm>
-            <a:off x="586013" y="2350380"/>
-            <a:ext cx="3240000" cy="1080000"/>
-          </a:xfrm>
-          <a:prstGeom prst="rect">
-            <a:avLst/>
-          </a:prstGeom>
-          <a:noFill/>
-          <a:ln>
-            <a:noFill/>
-          </a:ln>
-        </p:spPr>
-        <p:txBody>
-          <a:bodyPr anchorCtr="0" anchor="t" bIns="45700" lIns="0" spcFirstLastPara="1" rIns="91425" wrap="square" tIns="45700">
-            <a:noAutofit/>
-          </a:bodyPr>
-          <a:lstStyle/>
-          <a:p>
-            <a:pPr indent="-9525" lvl="0" marL="9525" rtl="0" algn="l">
-              <a:lnSpc>
-                <a:spcPct val="100000"/>
-              </a:lnSpc>
-              <a:spcBef>
-                <a:spcPts val="0"/>
-              </a:spcBef>
-              <a:spcAft>
-                <a:spcPts val="0"/>
-              </a:spcAft>
-              <a:buClr>
-                <a:schemeClr val="dk1"/>
-              </a:buClr>
-              <a:buSzPts val="1600"/>
-              <a:buNone/>
-            </a:pPr>
-            <a:r>
-              <a:rPr lang="ru-RU">
-                <a:latin typeface="Montserrat"/>
-              </a:rPr>
-              <a:t>Годовой план (проект п453)</a:t>
-            </a:r>
-            <a:endParaRPr/>
-          </a:p>
-        </p:txBody>
-      </p:sp>
-      <p:sp>
-        <p:nvSpPr>
-          <p:cNvPr id="575" name="Google Shape;575;p24"/>
-          <p:cNvSpPr txBox="1"/>
-          <p:nvPr>
-            <p:ph idx="6" type="body"/>
-          </p:nvPr>
-        </p:nvSpPr>
-        <p:spPr>
-          <a:xfrm>
-            <a:off x="586012" y="1382737"/>
-            <a:ext cx="3240000" cy="901800"/>
-          </a:xfrm>
-          <a:prstGeom prst="rect">
-            <a:avLst/>
-          </a:prstGeom>
-          <a:noFill/>
-          <a:ln>
-            <a:noFill/>
-          </a:ln>
-        </p:spPr>
-        <p:txBody>
-          <a:bodyPr anchorCtr="0" anchor="t" bIns="45700" lIns="0" spcFirstLastPara="1" rIns="91425" wrap="square" tIns="45700">
-            <a:noAutofit/>
-          </a:bodyPr>
-          <a:lstStyle/>
-          <a:p>
-            <a:pPr indent="0" lvl="0" marL="0" rtl="0" algn="l">
-              <a:lnSpc>
-                <a:spcPct val="90000"/>
-              </a:lnSpc>
-              <a:spcBef>
-                <a:spcPts val="0"/>
-              </a:spcBef>
-              <a:spcAft>
-                <a:spcPts val="0"/>
-              </a:spcAft>
-              <a:buClr>
-                <a:schemeClr val="dk1"/>
-              </a:buClr>
-              <a:buSzPts val="6000"/>
+              <a:buSzPts val="11000"/>
               <a:buNone/>
             </a:pPr>
             <a:r>
@@ -50539,69 +49602,16 @@
       </p:sp>
       <p:sp>
         <p:nvSpPr>
-          <p:cNvPr id="576" name="Google Shape;576;p24"/>
+          <p:cNvPr id="563" name="Google Shape;563;p15"/>
           <p:cNvSpPr txBox="1"/>
           <p:nvPr>
-            <p:ph idx="7" type="body"/>
+            <p:ph idx="3" type="body"/>
           </p:nvPr>
         </p:nvSpPr>
         <p:spPr>
           <a:xfrm>
-            <a:off x="586013" y="4790663"/>
-            <a:ext cx="3240000" cy="1080000"/>
-          </a:xfrm>
-          <a:prstGeom prst="rect">
-            <a:avLst/>
-          </a:prstGeom>
-          <a:noFill/>
-          <a:ln>
-            <a:noFill/>
-          </a:ln>
-        </p:spPr>
-        <p:txBody>
-          <a:bodyPr anchorCtr="0" anchor="t" bIns="45700" lIns="0" spcFirstLastPara="1" rIns="91425" wrap="square" tIns="45700">
-            <a:noAutofit/>
-          </a:bodyPr>
-          <a:lstStyle/>
-          <a:p>
-            <a:pPr indent="-9525" lvl="0" marL="9525" rtl="0" algn="l">
-              <a:lnSpc>
-                <a:spcPct val="100000"/>
-              </a:lnSpc>
-              <a:spcBef>
-                <a:spcPts val="0"/>
-              </a:spcBef>
-              <a:spcAft>
-                <a:spcPts val="0"/>
-              </a:spcAft>
-              <a:buClr>
-                <a:schemeClr val="dk1"/>
-              </a:buClr>
-              <a:buSzPts val="1600"/>
-              <a:buNone/>
-            </a:pPr>
-            <a:r>
-              <a:rPr lang="ru-RU">
-                <a:latin typeface="Montserrat"/>
-              </a:rPr>
-              <a:t>Прогноз года (база)</a:t>
-            </a:r>
-            <a:endParaRPr/>
-          </a:p>
-        </p:txBody>
-      </p:sp>
-      <p:sp>
-        <p:nvSpPr>
-          <p:cNvPr id="577" name="Google Shape;577;p24"/>
-          <p:cNvSpPr txBox="1"/>
-          <p:nvPr>
-            <p:ph idx="8" type="body"/>
-          </p:nvPr>
-        </p:nvSpPr>
-        <p:spPr>
-          <a:xfrm>
-            <a:off x="586013" y="3809879"/>
-            <a:ext cx="3240000" cy="901800"/>
+            <a:off x="6116209" y="2882349"/>
+            <a:ext cx="4679284" cy="1203516"/>
           </a:xfrm>
           <a:prstGeom prst="rect">
             <a:avLst/>
@@ -50630,235 +49640,7 @@
               <a:buClr>
                 <a:schemeClr val="dk1"/>
               </a:buClr>
-              <a:buSzPts val="6000"/>
-              <a:buNone/>
-            </a:pPr>
-            <a:r>
-              <a:rPr b="1" lang="ru-RU">
-                <a:latin typeface="Montserrat"/>
-                <a:ea typeface="Montserrat"/>
-                <a:cs typeface="Montserrat"/>
-                <a:sym typeface="Montserrat"/>
-              </a:rPr>
-              <a:t>43,3 млн ₽</a:t>
-            </a:r>
-            <a:endParaRPr b="1">
-              <a:latin typeface="Montserrat"/>
-              <a:ea typeface="Montserrat"/>
-              <a:cs typeface="Montserrat"/>
-              <a:sym typeface="Montserrat"/>
-            </a:endParaRPr>
-          </a:p>
-        </p:txBody>
-      </p:sp>
-      <p:sp>
-        <p:nvSpPr>
-          <p:cNvPr id="578" name="Google Shape;578;p24"/>
-          <p:cNvSpPr txBox="1"/>
-          <p:nvPr>
-            <p:ph idx="9" type="body"/>
-          </p:nvPr>
-        </p:nvSpPr>
-        <p:spPr>
-          <a:xfrm>
-            <a:off x="4376963" y="2350380"/>
-            <a:ext cx="3240000" cy="1080000"/>
-          </a:xfrm>
-          <a:prstGeom prst="rect">
-            <a:avLst/>
-          </a:prstGeom>
-          <a:noFill/>
-          <a:ln>
-            <a:noFill/>
-          </a:ln>
-        </p:spPr>
-        <p:txBody>
-          <a:bodyPr anchorCtr="0" anchor="t" bIns="45700" lIns="0" spcFirstLastPara="1" rIns="91425" wrap="square" tIns="45700">
-            <a:noAutofit/>
-          </a:bodyPr>
-          <a:lstStyle/>
-          <a:p>
-            <a:pPr indent="-9525" lvl="0" marL="9525" rtl="0" algn="l">
-              <a:lnSpc>
-                <a:spcPct val="100000"/>
-              </a:lnSpc>
-              <a:spcBef>
-                <a:spcPts val="0"/>
-              </a:spcBef>
-              <a:spcAft>
-                <a:spcPts val="0"/>
-              </a:spcAft>
-              <a:buClr>
-                <a:schemeClr val="dk1"/>
-              </a:buClr>
-              <a:buSzPts val="1600"/>
-              <a:buNone/>
-            </a:pPr>
-            <a:r>
-              <a:rPr lang="ru-RU">
-                <a:latin typeface="Montserrat"/>
-              </a:rPr>
-              <a:t>Факт за 5 мес · 123% плана периода</a:t>
-            </a:r>
-            <a:endParaRPr/>
-          </a:p>
-        </p:txBody>
-      </p:sp>
-      <p:sp>
-        <p:nvSpPr>
-          <p:cNvPr id="579" name="Google Shape;579;p24"/>
-          <p:cNvSpPr txBox="1"/>
-          <p:nvPr>
-            <p:ph idx="13" type="body"/>
-          </p:nvPr>
-        </p:nvSpPr>
-        <p:spPr>
-          <a:xfrm>
-            <a:off x="4376962" y="1382737"/>
-            <a:ext cx="3240000" cy="901800"/>
-          </a:xfrm>
-          <a:prstGeom prst="rect">
-            <a:avLst/>
-          </a:prstGeom>
-          <a:noFill/>
-          <a:ln>
-            <a:noFill/>
-          </a:ln>
-        </p:spPr>
-        <p:txBody>
-          <a:bodyPr anchorCtr="0" anchor="t" bIns="45700" lIns="0" spcFirstLastPara="1" rIns="91425" wrap="square" tIns="45700">
-            <a:noAutofit/>
-          </a:bodyPr>
-          <a:lstStyle/>
-          <a:p>
-            <a:pPr indent="0" lvl="0" marL="0" rtl="0" algn="l">
-              <a:lnSpc>
-                <a:spcPct val="90000"/>
-              </a:lnSpc>
-              <a:spcBef>
-                <a:spcPts val="0"/>
-              </a:spcBef>
-              <a:spcAft>
-                <a:spcPts val="0"/>
-              </a:spcAft>
-              <a:buClr>
-                <a:schemeClr val="dk1"/>
-              </a:buClr>
-              <a:buSzPts val="6000"/>
-              <a:buNone/>
-            </a:pPr>
-            <a:r>
-              <a:rPr b="1" lang="ru-RU">
-                <a:latin typeface="Montserrat"/>
-                <a:ea typeface="Montserrat"/>
-                <a:cs typeface="Montserrat"/>
-                <a:sym typeface="Montserrat"/>
-              </a:rPr>
-              <a:t>18,9 млн ₽</a:t>
-            </a:r>
-            <a:endParaRPr b="1">
-              <a:latin typeface="Montserrat"/>
-              <a:ea typeface="Montserrat"/>
-              <a:cs typeface="Montserrat"/>
-              <a:sym typeface="Montserrat"/>
-            </a:endParaRPr>
-          </a:p>
-        </p:txBody>
-      </p:sp>
-      <p:sp>
-        <p:nvSpPr>
-          <p:cNvPr id="580" name="Google Shape;580;p24"/>
-          <p:cNvSpPr txBox="1"/>
-          <p:nvPr>
-            <p:ph idx="14" type="body"/>
-          </p:nvPr>
-        </p:nvSpPr>
-        <p:spPr>
-          <a:xfrm>
-            <a:off x="4376963" y="4790663"/>
-            <a:ext cx="3240000" cy="1080000"/>
-          </a:xfrm>
-          <a:prstGeom prst="rect">
-            <a:avLst/>
-          </a:prstGeom>
-          <a:noFill/>
-          <a:ln>
-            <a:noFill/>
-          </a:ln>
-        </p:spPr>
-        <p:txBody>
-          <a:bodyPr anchorCtr="0" anchor="t" bIns="45700" lIns="0" spcFirstLastPara="1" rIns="91425" wrap="square" tIns="45700">
-            <a:noAutofit/>
-          </a:bodyPr>
-          <a:lstStyle/>
-          <a:p>
-            <a:pPr indent="-9525" lvl="0" marL="9525" rtl="0" algn="l">
-              <a:lnSpc>
-                <a:spcPct val="100000"/>
-              </a:lnSpc>
-              <a:spcBef>
-                <a:spcPts val="0"/>
-              </a:spcBef>
-              <a:spcAft>
-                <a:spcPts val="0"/>
-              </a:spcAft>
-              <a:buClr>
-                <a:schemeClr val="dk1"/>
-              </a:buClr>
-              <a:buSzPts val="1600"/>
-              <a:buNone/>
-            </a:pPr>
-            <a:r>
-              <a:rPr lang="ru-RU">
-                <a:latin typeface="Montserrat"/>
-              </a:rPr>
-              <a:t>Выполнение плана · коридор 103–124%</a:t>
-            </a:r>
-            <a:endParaRPr/>
-          </a:p>
-        </p:txBody>
-      </p:sp>
-      <p:sp>
-        <p:nvSpPr>
-          <p:cNvPr id="581" name="Google Shape;581;p24"/>
-          <p:cNvSpPr txBox="1"/>
-          <p:nvPr>
-            <p:ph idx="15" type="body"/>
-          </p:nvPr>
-        </p:nvSpPr>
-        <p:spPr>
-          <a:xfrm>
-            <a:off x="4376962" y="3809879"/>
-            <a:ext cx="3240000" cy="901800"/>
-          </a:xfrm>
-          <a:prstGeom prst="rect">
-            <a:avLst/>
-          </a:prstGeom>
-          <a:noFill/>
-          <a:ln>
-            <a:noFill/>
-          </a:ln>
-        </p:spPr>
-        <p:txBody>
-          <a:bodyPr anchorCtr="0" anchor="t" bIns="45700" lIns="0" spcFirstLastPara="1" rIns="91425" wrap="square" tIns="45700">
-            <a:noAutofit/>
-          </a:bodyPr>
-          <a:lstStyle/>
-          <a:p>
-            <a:pPr indent="0" lvl="0" marL="0" rtl="0" algn="l">
-              <a:lnSpc>
-                <a:spcPct val="90000"/>
-              </a:lnSpc>
-              <a:spcBef>
-                <a:spcPts val="0"/>
-              </a:spcBef>
-              <a:spcAft>
-                <a:spcPts val="0"/>
-              </a:spcAft>
-              <a:buClr>
-                <a:schemeClr val="dk1"/>
-              </a:buClr>
-              <a:buSzPts val="6000"/>
+              <a:buSzPts val="11000"/>
               <a:buNone/>
             </a:pPr>
             <a:r>
@@ -50881,7 +49663,68 @@
       </p:sp>
       <p:sp>
         <p:nvSpPr>
-          <p:cNvPr id="66" name="Google Shape;66;p63"/>
+          <p:cNvPr id="564" name="Google Shape;564;p15"/>
+          <p:cNvSpPr txBox="1"/>
+          <p:nvPr>
+            <p:ph idx="4" type="body"/>
+          </p:nvPr>
+        </p:nvSpPr>
+        <p:spPr>
+          <a:xfrm>
+            <a:off x="6116208" y="4332748"/>
+            <a:ext cx="4679283" cy="1286173"/>
+          </a:xfrm>
+          <a:prstGeom prst="rect">
+            <a:avLst/>
+          </a:prstGeom>
+          <a:noFill/>
+          <a:ln>
+            <a:noFill/>
+          </a:ln>
+        </p:spPr>
+        <p:txBody>
+          <a:bodyPr anchorCtr="0" anchor="t" bIns="45700" lIns="0" spcFirstLastPara="1" rIns="91425" wrap="square" tIns="45700">
+            <a:normAutofit/>
+          </a:bodyPr>
+          <a:lstStyle/>
+          <a:p>
+            <a:pPr indent="-9525" lvl="0" marL="9525" rtl="0" algn="l">
+              <a:lnSpc>
+                <a:spcPct val="100000"/>
+              </a:lnSpc>
+              <a:spcBef>
+                <a:spcPts val="0"/>
+              </a:spcBef>
+              <a:spcAft>
+                <a:spcPts val="0"/>
+              </a:spcAft>
+              <a:buClr>
+                <a:schemeClr val="dk1"/>
+              </a:buClr>
+              <a:buSzPts val="1600"/>
+              <a:buNone/>
+            </a:pPr>
+            <a:r>
+              <a:rPr lang="ru-RU">
+                <a:latin typeface="Montserrat"/>
+              </a:rPr>
+              <a:t>Прогноз выполнения года: 43,3 млн ₽ (база).</a:t>
+            </a:r>
+            <a:endParaRPr/>
+          </a:p>
+          <a:p>
+            <a:r>
+              <a:rPr lang="ru-RU">
+                <a:latin typeface="Montserrat"/>
+              </a:rPr>
+              <a:t>Коридор сценариев 103–124%. Вывод: перевыполнение.</a:t>
+            </a:r>
+          </a:p>
+        </p:txBody>
+      </p:sp>
+      <p:sp>
+        <p:nvSpPr>
+          <p:cNvPr id="565" name="Google Shape;565;p15"/>
           <p:cNvSpPr txBox="1"/>
           <p:nvPr>
             <p:ph type="title"/>
@@ -50890,7 +49733,7 @@
         <p:spPr>
           <a:xfrm>
             <a:off x="587375" y="584200"/>
-            <a:ext cx="11017249" cy="647700"/>
+            <a:ext cx="11017249" cy="1257852"/>
           </a:xfrm>
           <a:prstGeom prst="rect">
             <a:avLst/>
@@ -50904,8 +49747,9 @@
           <a:bodyPr anchorCtr="0" anchor="t" bIns="0" lIns="0" spcFirstLastPara="1" rIns="0" wrap="square" tIns="0">
             <a:noAutofit/>
           </a:bodyPr>
-          <a:lstStyle>
-            <a:lvl1pPr lvl="0" algn="l">
+          <a:lstStyle/>
+          <a:p>
+            <a:pPr indent="0" lvl="0" marL="0" rtl="0" algn="l">
               <a:lnSpc>
                 <a:spcPct val="80000"/>
               </a:lnSpc>
@@ -50919,177 +49763,24 @@
                 <a:schemeClr val="dk1"/>
               </a:buClr>
               <a:buSzPts val="5000"/>
-              <a:buNone/>
-              <a:defRPr sz="5000"/>
-            </a:lvl1pPr>
-            <a:lvl2pPr lvl="1" algn="l">
-              <a:lnSpc>
-                <a:spcPct val="100000"/>
-              </a:lnSpc>
-              <a:spcBef>
-                <a:spcPts val="0"/>
-              </a:spcBef>
-              <a:spcAft>
-                <a:spcPts val="0"/>
-              </a:spcAft>
-              <a:buSzPts val="1400"/>
-              <a:buFont typeface="Montserrat SemiBold"/>
-              <a:buNone/>
-              <a:defRPr>
-                <a:latin typeface="Montserrat SemiBold"/>
-                <a:ea typeface="Montserrat SemiBold"/>
-                <a:cs typeface="Montserrat SemiBold"/>
-                <a:sym typeface="Montserrat SemiBold"/>
-              </a:defRPr>
-            </a:lvl2pPr>
-            <a:lvl3pPr lvl="2" algn="l">
-              <a:lnSpc>
-                <a:spcPct val="100000"/>
-              </a:lnSpc>
-              <a:spcBef>
-                <a:spcPts val="0"/>
-              </a:spcBef>
-              <a:spcAft>
-                <a:spcPts val="0"/>
-              </a:spcAft>
-              <a:buSzPts val="1400"/>
-              <a:buFont typeface="Montserrat SemiBold"/>
-              <a:buNone/>
-              <a:defRPr>
-                <a:latin typeface="Montserrat SemiBold"/>
-                <a:ea typeface="Montserrat SemiBold"/>
-                <a:cs typeface="Montserrat SemiBold"/>
-                <a:sym typeface="Montserrat SemiBold"/>
-              </a:defRPr>
-            </a:lvl3pPr>
-            <a:lvl4pPr lvl="3" algn="l">
-              <a:lnSpc>
-                <a:spcPct val="100000"/>
-              </a:lnSpc>
-              <a:spcBef>
-                <a:spcPts val="0"/>
-              </a:spcBef>
-              <a:spcAft>
-                <a:spcPts val="0"/>
-              </a:spcAft>
-              <a:buSzPts val="1400"/>
-              <a:buFont typeface="Montserrat SemiBold"/>
-              <a:buNone/>
-              <a:defRPr>
-                <a:latin typeface="Montserrat SemiBold"/>
-                <a:ea typeface="Montserrat SemiBold"/>
-                <a:cs typeface="Montserrat SemiBold"/>
-                <a:sym typeface="Montserrat SemiBold"/>
-              </a:defRPr>
-            </a:lvl4pPr>
-            <a:lvl5pPr lvl="4" algn="l">
-              <a:lnSpc>
-                <a:spcPct val="100000"/>
-              </a:lnSpc>
-              <a:spcBef>
-                <a:spcPts val="0"/>
-              </a:spcBef>
-              <a:spcAft>
-                <a:spcPts val="0"/>
-              </a:spcAft>
-              <a:buSzPts val="1400"/>
-              <a:buFont typeface="Montserrat SemiBold"/>
-              <a:buNone/>
-              <a:defRPr>
-                <a:latin typeface="Montserrat SemiBold"/>
-                <a:ea typeface="Montserrat SemiBold"/>
-                <a:cs typeface="Montserrat SemiBold"/>
-                <a:sym typeface="Montserrat SemiBold"/>
-              </a:defRPr>
-            </a:lvl5pPr>
-            <a:lvl6pPr lvl="5" algn="l">
-              <a:lnSpc>
-                <a:spcPct val="100000"/>
-              </a:lnSpc>
-              <a:spcBef>
-                <a:spcPts val="0"/>
-              </a:spcBef>
-              <a:spcAft>
-                <a:spcPts val="0"/>
-              </a:spcAft>
-              <a:buSzPts val="1400"/>
-              <a:buFont typeface="Montserrat SemiBold"/>
-              <a:buNone/>
-              <a:defRPr>
-                <a:latin typeface="Montserrat SemiBold"/>
-                <a:ea typeface="Montserrat SemiBold"/>
-                <a:cs typeface="Montserrat SemiBold"/>
-                <a:sym typeface="Montserrat SemiBold"/>
-              </a:defRPr>
-            </a:lvl6pPr>
-            <a:lvl7pPr lvl="6" algn="l">
-              <a:lnSpc>
-                <a:spcPct val="100000"/>
-              </a:lnSpc>
-              <a:spcBef>
-                <a:spcPts val="0"/>
-              </a:spcBef>
-              <a:spcAft>
-                <a:spcPts val="0"/>
-              </a:spcAft>
-              <a:buSzPts val="1400"/>
-              <a:buFont typeface="Montserrat SemiBold"/>
-              <a:buNone/>
-              <a:defRPr>
-                <a:latin typeface="Montserrat SemiBold"/>
-                <a:ea typeface="Montserrat SemiBold"/>
-                <a:cs typeface="Montserrat SemiBold"/>
-                <a:sym typeface="Montserrat SemiBold"/>
-              </a:defRPr>
-            </a:lvl7pPr>
-            <a:lvl8pPr lvl="7" algn="l">
-              <a:lnSpc>
-                <a:spcPct val="100000"/>
-              </a:lnSpc>
-              <a:spcBef>
-                <a:spcPts val="0"/>
-              </a:spcBef>
-              <a:spcAft>
-                <a:spcPts val="0"/>
-              </a:spcAft>
-              <a:buSzPts val="1400"/>
-              <a:buFont typeface="Montserrat SemiBold"/>
-              <a:buNone/>
-              <a:defRPr>
-                <a:latin typeface="Montserrat SemiBold"/>
-                <a:ea typeface="Montserrat SemiBold"/>
-                <a:cs typeface="Montserrat SemiBold"/>
-                <a:sym typeface="Montserrat SemiBold"/>
-              </a:defRPr>
-            </a:lvl8pPr>
-            <a:lvl9pPr lvl="8" algn="l">
-              <a:lnSpc>
-                <a:spcPct val="100000"/>
-              </a:lnSpc>
-              <a:spcBef>
-                <a:spcPts val="0"/>
-              </a:spcBef>
-              <a:spcAft>
-                <a:spcPts val="0"/>
-              </a:spcAft>
-              <a:buSzPts val="1400"/>
-              <a:buFont typeface="Montserrat SemiBold"/>
-              <a:buNone/>
-              <a:defRPr>
-                <a:latin typeface="Montserrat SemiBold"/>
-                <a:ea typeface="Montserrat SemiBold"/>
-                <a:cs typeface="Montserrat SemiBold"/>
-                <a:sym typeface="Montserrat SemiBold"/>
-              </a:defRPr>
-            </a:lvl9pPr>
-          </a:lstStyle>
-          <a:p>
+              <a:buFont typeface="Arial"/>
+              <a:buNone/>
+            </a:pPr>
             <a:r>
-              <a:rPr>
+              <a:rPr b="1" lang="ru-RU">
                 <a:latin typeface="Montserrat"/>
+                <a:ea typeface="Montserrat"/>
+                <a:cs typeface="Montserrat"/>
+                <a:sym typeface="Montserrat"/>
               </a:rPr>
               <a:t>ОФД — выполнение плана 2026</a:t>
             </a:r>
+            <a:endParaRPr b="1">
+              <a:latin typeface="Montserrat"/>
+              <a:ea typeface="Montserrat"/>
+              <a:cs typeface="Montserrat"/>
+              <a:sym typeface="Montserrat"/>
+            </a:endParaRPr>
           </a:p>
         </p:txBody>
       </p:sp>
@@ -51345,697 +50036,7 @@
       <p:grpSpPr/>
       <p:sp>
         <p:nvSpPr>
-          <p:cNvPr id="570" name="Google Shape;570;p24"/>
-          <p:cNvSpPr txBox="1"/>
-          <p:nvPr>
-            <p:ph idx="1" type="body"/>
-          </p:nvPr>
-        </p:nvSpPr>
-        <p:spPr>
-          <a:xfrm>
-            <a:off x="8148863" y="4790663"/>
-            <a:ext cx="3240000" cy="1080000"/>
-          </a:xfrm>
-          <a:prstGeom prst="rect">
-            <a:avLst/>
-          </a:prstGeom>
-          <a:noFill/>
-          <a:ln>
-            <a:noFill/>
-          </a:ln>
-        </p:spPr>
-        <p:txBody>
-          <a:bodyPr anchorCtr="0" anchor="t" bIns="45700" lIns="0" spcFirstLastPara="1" rIns="91425" wrap="square" tIns="45700">
-            <a:noAutofit/>
-          </a:bodyPr>
-          <a:lstStyle/>
-          <a:p>
-            <a:pPr indent="-9525" lvl="0" marL="9525" rtl="0" algn="l">
-              <a:lnSpc>
-                <a:spcPct val="100000"/>
-              </a:lnSpc>
-              <a:spcBef>
-                <a:spcPts val="0"/>
-              </a:spcBef>
-              <a:spcAft>
-                <a:spcPts val="0"/>
-              </a:spcAft>
-              <a:buClr>
-                <a:schemeClr val="dk1"/>
-              </a:buClr>
-              <a:buSzPts val="1600"/>
-              <a:buNone/>
-            </a:pPr>
-            <a:r>
-              <a:rPr lang="ru-RU">
-                <a:latin typeface="Montserrat"/>
-              </a:rPr>
-              <a:t>Расход / выручка (ДРР)</a:t>
-            </a:r>
-            <a:endParaRPr/>
-          </a:p>
-        </p:txBody>
-      </p:sp>
-      <p:sp>
-        <p:nvSpPr>
-          <p:cNvPr id="571" name="Google Shape;571;p24"/>
-          <p:cNvSpPr txBox="1"/>
-          <p:nvPr>
-            <p:ph idx="2" type="body"/>
-          </p:nvPr>
-        </p:nvSpPr>
-        <p:spPr>
-          <a:xfrm>
-            <a:off x="8148863" y="3809879"/>
-            <a:ext cx="3240000" cy="901800"/>
-          </a:xfrm>
-          <a:prstGeom prst="rect">
-            <a:avLst/>
-          </a:prstGeom>
-          <a:noFill/>
-          <a:ln>
-            <a:noFill/>
-          </a:ln>
-        </p:spPr>
-        <p:txBody>
-          <a:bodyPr anchorCtr="0" anchor="t" bIns="45700" lIns="0" spcFirstLastPara="1" rIns="91425" wrap="square" tIns="45700">
-            <a:noAutofit/>
-          </a:bodyPr>
-          <a:lstStyle/>
-          <a:p>
-            <a:pPr indent="0" lvl="0" marL="0" rtl="0" algn="l">
-              <a:lnSpc>
-                <a:spcPct val="90000"/>
-              </a:lnSpc>
-              <a:spcBef>
-                <a:spcPts val="0"/>
-              </a:spcBef>
-              <a:spcAft>
-                <a:spcPts val="0"/>
-              </a:spcAft>
-              <a:buClr>
-                <a:schemeClr val="dk1"/>
-              </a:buClr>
-              <a:buSzPts val="6000"/>
-              <a:buNone/>
-            </a:pPr>
-            <a:r>
-              <a:rPr b="1" lang="ru-RU">
-                <a:latin typeface="Montserrat"/>
-                <a:ea typeface="Montserrat"/>
-                <a:cs typeface="Montserrat"/>
-                <a:sym typeface="Montserrat"/>
-              </a:rPr>
-              <a:t>≈ 3,8×</a:t>
-            </a:r>
-            <a:endParaRPr b="1">
-              <a:latin typeface="Montserrat"/>
-              <a:ea typeface="Montserrat"/>
-              <a:cs typeface="Montserrat"/>
-              <a:sym typeface="Montserrat"/>
-            </a:endParaRPr>
-          </a:p>
-        </p:txBody>
-      </p:sp>
-      <p:sp>
-        <p:nvSpPr>
-          <p:cNvPr id="572" name="Google Shape;572;p24"/>
-          <p:cNvSpPr txBox="1"/>
-          <p:nvPr>
-            <p:ph idx="3" type="body"/>
-          </p:nvPr>
-        </p:nvSpPr>
-        <p:spPr>
-          <a:xfrm>
-            <a:off x="8148863" y="2350380"/>
-            <a:ext cx="3240000" cy="1080000"/>
-          </a:xfrm>
-          <a:prstGeom prst="rect">
-            <a:avLst/>
-          </a:prstGeom>
-          <a:noFill/>
-          <a:ln>
-            <a:noFill/>
-          </a:ln>
-        </p:spPr>
-        <p:txBody>
-          <a:bodyPr anchorCtr="0" anchor="t" bIns="45700" lIns="0" spcFirstLastPara="1" rIns="91425" wrap="square" tIns="45700">
-            <a:noAutofit/>
-          </a:bodyPr>
-          <a:lstStyle/>
-          <a:p>
-            <a:pPr indent="-9525" lvl="0" marL="9525" rtl="0" algn="l">
-              <a:lnSpc>
-                <a:spcPct val="100000"/>
-              </a:lnSpc>
-              <a:spcBef>
-                <a:spcPts val="0"/>
-              </a:spcBef>
-              <a:spcAft>
-                <a:spcPts val="0"/>
-              </a:spcAft>
-              <a:buClr>
-                <a:schemeClr val="dk1"/>
-              </a:buClr>
-              <a:buSzPts val="1600"/>
-              <a:buNone/>
-            </a:pPr>
-            <a:r>
-              <a:rPr lang="ru-RU">
-                <a:latin typeface="Montserrat"/>
-              </a:rPr>
-              <a:t>CPO — стоимость оплаты</a:t>
-            </a:r>
-            <a:endParaRPr/>
-          </a:p>
-        </p:txBody>
-      </p:sp>
-      <p:sp>
-        <p:nvSpPr>
-          <p:cNvPr id="573" name="Google Shape;573;p24"/>
-          <p:cNvSpPr txBox="1"/>
-          <p:nvPr>
-            <p:ph idx="4" type="body"/>
-          </p:nvPr>
-        </p:nvSpPr>
-        <p:spPr>
-          <a:xfrm>
-            <a:off x="8148863" y="1382737"/>
-            <a:ext cx="3240000" cy="901800"/>
-          </a:xfrm>
-          <a:prstGeom prst="rect">
-            <a:avLst/>
-          </a:prstGeom>
-          <a:noFill/>
-          <a:ln>
-            <a:noFill/>
-          </a:ln>
-        </p:spPr>
-        <p:txBody>
-          <a:bodyPr anchorCtr="0" anchor="t" bIns="45700" lIns="0" spcFirstLastPara="1" rIns="91425" wrap="square" tIns="45700">
-            <a:noAutofit/>
-          </a:bodyPr>
-          <a:lstStyle/>
-          <a:p>
-            <a:pPr indent="0" lvl="0" marL="0" rtl="0" algn="l">
-              <a:lnSpc>
-                <a:spcPct val="90000"/>
-              </a:lnSpc>
-              <a:spcBef>
-                <a:spcPts val="0"/>
-              </a:spcBef>
-              <a:spcAft>
-                <a:spcPts val="0"/>
-              </a:spcAft>
-              <a:buClr>
-                <a:schemeClr val="dk1"/>
-              </a:buClr>
-              <a:buSzPts val="6000"/>
-              <a:buNone/>
-            </a:pPr>
-            <a:r>
-              <a:rPr b="1" lang="ru-RU">
-                <a:solidFill>
-                  <a:schemeClr val="accent1"/>
-                </a:solidFill>
-                <a:latin typeface="Montserrat"/>
-                <a:ea typeface="Montserrat"/>
-                <a:cs typeface="Montserrat"/>
-                <a:sym typeface="Montserrat"/>
-              </a:rPr>
-              <a:t>46,8 тыс ₽</a:t>
-            </a:r>
-            <a:endParaRPr b="1">
-              <a:solidFill>
-                <a:schemeClr val="accent1"/>
-              </a:solidFill>
-              <a:latin typeface="Montserrat"/>
-              <a:ea typeface="Montserrat"/>
-              <a:cs typeface="Montserrat"/>
-              <a:sym typeface="Montserrat"/>
-            </a:endParaRPr>
-          </a:p>
-        </p:txBody>
-      </p:sp>
-      <p:sp>
-        <p:nvSpPr>
-          <p:cNvPr id="574" name="Google Shape;574;p24"/>
-          <p:cNvSpPr txBox="1"/>
-          <p:nvPr>
-            <p:ph idx="5" type="body"/>
-          </p:nvPr>
-        </p:nvSpPr>
-        <p:spPr>
-          <a:xfrm>
-            <a:off x="586013" y="2350380"/>
-            <a:ext cx="3240000" cy="1080000"/>
-          </a:xfrm>
-          <a:prstGeom prst="rect">
-            <a:avLst/>
-          </a:prstGeom>
-          <a:noFill/>
-          <a:ln>
-            <a:noFill/>
-          </a:ln>
-        </p:spPr>
-        <p:txBody>
-          <a:bodyPr anchorCtr="0" anchor="t" bIns="45700" lIns="0" spcFirstLastPara="1" rIns="91425" wrap="square" tIns="45700">
-            <a:noAutofit/>
-          </a:bodyPr>
-          <a:lstStyle/>
-          <a:p>
-            <a:pPr indent="-9525" lvl="0" marL="9525" rtl="0" algn="l">
-              <a:lnSpc>
-                <a:spcPct val="100000"/>
-              </a:lnSpc>
-              <a:spcBef>
-                <a:spcPts val="0"/>
-              </a:spcBef>
-              <a:spcAft>
-                <a:spcPts val="0"/>
-              </a:spcAft>
-              <a:buClr>
-                <a:schemeClr val="dk1"/>
-              </a:buClr>
-              <a:buSzPts val="1600"/>
-              <a:buNone/>
-            </a:pPr>
-            <a:r>
-              <a:rPr lang="ru-RU">
-                <a:latin typeface="Montserrat"/>
-              </a:rPr>
-              <a:t>Расход (янв 2025 – май 2026)</a:t>
-            </a:r>
-            <a:endParaRPr/>
-          </a:p>
-        </p:txBody>
-      </p:sp>
-      <p:sp>
-        <p:nvSpPr>
-          <p:cNvPr id="575" name="Google Shape;575;p24"/>
-          <p:cNvSpPr txBox="1"/>
-          <p:nvPr>
-            <p:ph idx="6" type="body"/>
-          </p:nvPr>
-        </p:nvSpPr>
-        <p:spPr>
-          <a:xfrm>
-            <a:off x="586012" y="1382737"/>
-            <a:ext cx="3240000" cy="901800"/>
-          </a:xfrm>
-          <a:prstGeom prst="rect">
-            <a:avLst/>
-          </a:prstGeom>
-          <a:noFill/>
-          <a:ln>
-            <a:noFill/>
-          </a:ln>
-        </p:spPr>
-        <p:txBody>
-          <a:bodyPr anchorCtr="0" anchor="t" bIns="45700" lIns="0" spcFirstLastPara="1" rIns="91425" wrap="square" tIns="45700">
-            <a:noAutofit/>
-          </a:bodyPr>
-          <a:lstStyle/>
-          <a:p>
-            <a:pPr indent="0" lvl="0" marL="0" rtl="0" algn="l">
-              <a:lnSpc>
-                <a:spcPct val="90000"/>
-              </a:lnSpc>
-              <a:spcBef>
-                <a:spcPts val="0"/>
-              </a:spcBef>
-              <a:spcAft>
-                <a:spcPts val="0"/>
-              </a:spcAft>
-              <a:buClr>
-                <a:schemeClr val="dk1"/>
-              </a:buClr>
-              <a:buSzPts val="6000"/>
-              <a:buNone/>
-            </a:pPr>
-            <a:r>
-              <a:rPr b="1" lang="ru-RU">
-                <a:latin typeface="Montserrat"/>
-                <a:ea typeface="Montserrat"/>
-                <a:cs typeface="Montserrat"/>
-                <a:sym typeface="Montserrat"/>
-              </a:rPr>
-              <a:t>14,7 млн ₽</a:t>
-            </a:r>
-            <a:endParaRPr b="1">
-              <a:latin typeface="Montserrat"/>
-              <a:ea typeface="Montserrat"/>
-              <a:cs typeface="Montserrat"/>
-              <a:sym typeface="Montserrat"/>
-            </a:endParaRPr>
-          </a:p>
-        </p:txBody>
-      </p:sp>
-      <p:sp>
-        <p:nvSpPr>
-          <p:cNvPr id="576" name="Google Shape;576;p24"/>
-          <p:cNvSpPr txBox="1"/>
-          <p:nvPr>
-            <p:ph idx="7" type="body"/>
-          </p:nvPr>
-        </p:nvSpPr>
-        <p:spPr>
-          <a:xfrm>
-            <a:off x="586013" y="4790663"/>
-            <a:ext cx="3240000" cy="1080000"/>
-          </a:xfrm>
-          <a:prstGeom prst="rect">
-            <a:avLst/>
-          </a:prstGeom>
-          <a:noFill/>
-          <a:ln>
-            <a:noFill/>
-          </a:ln>
-        </p:spPr>
-        <p:txBody>
-          <a:bodyPr anchorCtr="0" anchor="t" bIns="45700" lIns="0" spcFirstLastPara="1" rIns="91425" wrap="square" tIns="45700">
-            <a:noAutofit/>
-          </a:bodyPr>
-          <a:lstStyle/>
-          <a:p>
-            <a:pPr indent="-9525" lvl="0" marL="9525" rtl="0" algn="l">
-              <a:lnSpc>
-                <a:spcPct val="100000"/>
-              </a:lnSpc>
-              <a:spcBef>
-                <a:spcPts val="0"/>
-              </a:spcBef>
-              <a:spcAft>
-                <a:spcPts val="0"/>
-              </a:spcAft>
-              <a:buClr>
-                <a:schemeClr val="dk1"/>
-              </a:buClr>
-              <a:buSzPts val="1600"/>
-              <a:buNone/>
-            </a:pPr>
-            <a:r>
-              <a:rPr lang="ru-RU">
-                <a:latin typeface="Montserrat"/>
-              </a:rPr>
-              <a:t>CPL — средний</a:t>
-            </a:r>
-            <a:endParaRPr/>
-          </a:p>
-        </p:txBody>
-      </p:sp>
-      <p:sp>
-        <p:nvSpPr>
-          <p:cNvPr id="577" name="Google Shape;577;p24"/>
-          <p:cNvSpPr txBox="1"/>
-          <p:nvPr>
-            <p:ph idx="8" type="body"/>
-          </p:nvPr>
-        </p:nvSpPr>
-        <p:spPr>
-          <a:xfrm>
-            <a:off x="586013" y="3809879"/>
-            <a:ext cx="3240000" cy="901800"/>
-          </a:xfrm>
-          <a:prstGeom prst="rect">
-            <a:avLst/>
-          </a:prstGeom>
-          <a:noFill/>
-          <a:ln>
-            <a:noFill/>
-          </a:ln>
-        </p:spPr>
-        <p:txBody>
-          <a:bodyPr anchorCtr="0" anchor="t" bIns="45700" lIns="0" spcFirstLastPara="1" rIns="91425" wrap="square" tIns="45700">
-            <a:noAutofit/>
-          </a:bodyPr>
-          <a:lstStyle/>
-          <a:p>
-            <a:pPr indent="0" lvl="0" marL="0" rtl="0" algn="l">
-              <a:lnSpc>
-                <a:spcPct val="90000"/>
-              </a:lnSpc>
-              <a:spcBef>
-                <a:spcPts val="0"/>
-              </a:spcBef>
-              <a:spcAft>
-                <a:spcPts val="0"/>
-              </a:spcAft>
-              <a:buClr>
-                <a:schemeClr val="dk1"/>
-              </a:buClr>
-              <a:buSzPts val="6000"/>
-              <a:buNone/>
-            </a:pPr>
-            <a:r>
-              <a:rPr b="1" lang="ru-RU">
-                <a:latin typeface="Montserrat"/>
-                <a:ea typeface="Montserrat"/>
-                <a:cs typeface="Montserrat"/>
-                <a:sym typeface="Montserrat"/>
-              </a:rPr>
-              <a:t>10,0 тыс ₽</a:t>
-            </a:r>
-            <a:endParaRPr b="1">
-              <a:latin typeface="Montserrat"/>
-              <a:ea typeface="Montserrat"/>
-              <a:cs typeface="Montserrat"/>
-              <a:sym typeface="Montserrat"/>
-            </a:endParaRPr>
-          </a:p>
-        </p:txBody>
-      </p:sp>
-      <p:sp>
-        <p:nvSpPr>
-          <p:cNvPr id="578" name="Google Shape;578;p24"/>
-          <p:cNvSpPr txBox="1"/>
-          <p:nvPr>
-            <p:ph idx="9" type="body"/>
-          </p:nvPr>
-        </p:nvSpPr>
-        <p:spPr>
-          <a:xfrm>
-            <a:off x="4376963" y="2350380"/>
-            <a:ext cx="3240000" cy="1080000"/>
-          </a:xfrm>
-          <a:prstGeom prst="rect">
-            <a:avLst/>
-          </a:prstGeom>
-          <a:noFill/>
-          <a:ln>
-            <a:noFill/>
-          </a:ln>
-        </p:spPr>
-        <p:txBody>
-          <a:bodyPr anchorCtr="0" anchor="t" bIns="45700" lIns="0" spcFirstLastPara="1" rIns="91425" wrap="square" tIns="45700">
-            <a:noAutofit/>
-          </a:bodyPr>
-          <a:lstStyle/>
-          <a:p>
-            <a:pPr indent="-9525" lvl="0" marL="9525" rtl="0" algn="l">
-              <a:lnSpc>
-                <a:spcPct val="100000"/>
-              </a:lnSpc>
-              <a:spcBef>
-                <a:spcPts val="0"/>
-              </a:spcBef>
-              <a:spcAft>
-                <a:spcPts val="0"/>
-              </a:spcAft>
-              <a:buClr>
-                <a:schemeClr val="dk1"/>
-              </a:buClr>
-              <a:buSzPts val="1600"/>
-              <a:buNone/>
-            </a:pPr>
-            <a:r>
-              <a:rPr lang="ru-RU">
-                <a:latin typeface="Montserrat"/>
-              </a:rPr>
-              <a:t>Оплат привлечено</a:t>
-            </a:r>
-            <a:endParaRPr/>
-          </a:p>
-        </p:txBody>
-      </p:sp>
-      <p:sp>
-        <p:nvSpPr>
-          <p:cNvPr id="579" name="Google Shape;579;p24"/>
-          <p:cNvSpPr txBox="1"/>
-          <p:nvPr>
-            <p:ph idx="13" type="body"/>
-          </p:nvPr>
-        </p:nvSpPr>
-        <p:spPr>
-          <a:xfrm>
-            <a:off x="4376962" y="1382737"/>
-            <a:ext cx="3240000" cy="901800"/>
-          </a:xfrm>
-          <a:prstGeom prst="rect">
-            <a:avLst/>
-          </a:prstGeom>
-          <a:noFill/>
-          <a:ln>
-            <a:noFill/>
-          </a:ln>
-        </p:spPr>
-        <p:txBody>
-          <a:bodyPr anchorCtr="0" anchor="t" bIns="45700" lIns="0" spcFirstLastPara="1" rIns="91425" wrap="square" tIns="45700">
-            <a:noAutofit/>
-          </a:bodyPr>
-          <a:lstStyle/>
-          <a:p>
-            <a:pPr indent="0" lvl="0" marL="0" rtl="0" algn="l">
-              <a:lnSpc>
-                <a:spcPct val="90000"/>
-              </a:lnSpc>
-              <a:spcBef>
-                <a:spcPts val="0"/>
-              </a:spcBef>
-              <a:spcAft>
-                <a:spcPts val="0"/>
-              </a:spcAft>
-              <a:buClr>
-                <a:schemeClr val="dk1"/>
-              </a:buClr>
-              <a:buSzPts val="6000"/>
-              <a:buNone/>
-            </a:pPr>
-            <a:r>
-              <a:rPr b="1" lang="ru-RU">
-                <a:latin typeface="Montserrat"/>
-                <a:ea typeface="Montserrat"/>
-                <a:cs typeface="Montserrat"/>
-                <a:sym typeface="Montserrat"/>
-              </a:rPr>
-              <a:t>315</a:t>
-            </a:r>
-            <a:endParaRPr b="1">
-              <a:latin typeface="Montserrat"/>
-              <a:ea typeface="Montserrat"/>
-              <a:cs typeface="Montserrat"/>
-              <a:sym typeface="Montserrat"/>
-            </a:endParaRPr>
-          </a:p>
-        </p:txBody>
-      </p:sp>
-      <p:sp>
-        <p:nvSpPr>
-          <p:cNvPr id="580" name="Google Shape;580;p24"/>
-          <p:cNvSpPr txBox="1"/>
-          <p:nvPr>
-            <p:ph idx="14" type="body"/>
-          </p:nvPr>
-        </p:nvSpPr>
-        <p:spPr>
-          <a:xfrm>
-            <a:off x="4376963" y="4790663"/>
-            <a:ext cx="3240000" cy="1080000"/>
-          </a:xfrm>
-          <a:prstGeom prst="rect">
-            <a:avLst/>
-          </a:prstGeom>
-          <a:noFill/>
-          <a:ln>
-            <a:noFill/>
-          </a:ln>
-        </p:spPr>
-        <p:txBody>
-          <a:bodyPr anchorCtr="0" anchor="t" bIns="45700" lIns="0" spcFirstLastPara="1" rIns="91425" wrap="square" tIns="45700">
-            <a:noAutofit/>
-          </a:bodyPr>
-          <a:lstStyle/>
-          <a:p>
-            <a:pPr indent="-9525" lvl="0" marL="9525" rtl="0" algn="l">
-              <a:lnSpc>
-                <a:spcPct val="100000"/>
-              </a:lnSpc>
-              <a:spcBef>
-                <a:spcPts val="0"/>
-              </a:spcBef>
-              <a:spcAft>
-                <a:spcPts val="0"/>
-              </a:spcAft>
-              <a:buClr>
-                <a:schemeClr val="dk1"/>
-              </a:buClr>
-              <a:buSzPts val="1600"/>
-              <a:buNone/>
-            </a:pPr>
-            <a:r>
-              <a:rPr lang="ru-RU">
-                <a:latin typeface="Montserrat"/>
-              </a:rPr>
-              <a:t>Выручка по целевым лидам</a:t>
-            </a:r>
-            <a:endParaRPr/>
-          </a:p>
-        </p:txBody>
-      </p:sp>
-      <p:sp>
-        <p:nvSpPr>
-          <p:cNvPr id="581" name="Google Shape;581;p24"/>
-          <p:cNvSpPr txBox="1"/>
-          <p:nvPr>
-            <p:ph idx="15" type="body"/>
-          </p:nvPr>
-        </p:nvSpPr>
-        <p:spPr>
-          <a:xfrm>
-            <a:off x="4376962" y="3809879"/>
-            <a:ext cx="3240000" cy="901800"/>
-          </a:xfrm>
-          <a:prstGeom prst="rect">
-            <a:avLst/>
-          </a:prstGeom>
-          <a:noFill/>
-          <a:ln>
-            <a:noFill/>
-          </a:ln>
-        </p:spPr>
-        <p:txBody>
-          <a:bodyPr anchorCtr="0" anchor="t" bIns="45700" lIns="0" spcFirstLastPara="1" rIns="91425" wrap="square" tIns="45700">
-            <a:noAutofit/>
-          </a:bodyPr>
-          <a:lstStyle/>
-          <a:p>
-            <a:pPr indent="0" lvl="0" marL="0" rtl="0" algn="l">
-              <a:lnSpc>
-                <a:spcPct val="90000"/>
-              </a:lnSpc>
-              <a:spcBef>
-                <a:spcPts val="0"/>
-              </a:spcBef>
-              <a:spcAft>
-                <a:spcPts val="0"/>
-              </a:spcAft>
-              <a:buClr>
-                <a:schemeClr val="dk1"/>
-              </a:buClr>
-              <a:buSzPts val="6000"/>
-              <a:buNone/>
-            </a:pPr>
-            <a:r>
-              <a:rPr b="1" lang="ru-RU">
-                <a:latin typeface="Montserrat"/>
-                <a:ea typeface="Montserrat"/>
-                <a:cs typeface="Montserrat"/>
-                <a:sym typeface="Montserrat"/>
-              </a:rPr>
-              <a:t>3,9 млн ₽</a:t>
-            </a:r>
-            <a:endParaRPr b="1">
-              <a:latin typeface="Montserrat"/>
-              <a:ea typeface="Montserrat"/>
-              <a:cs typeface="Montserrat"/>
-              <a:sym typeface="Montserrat"/>
-            </a:endParaRPr>
-          </a:p>
-        </p:txBody>
-      </p:sp>
-      <p:sp>
-        <p:nvSpPr>
-          <p:cNvPr id="66" name="Google Shape;66;p63"/>
+          <p:cNvPr id="949" name="Google Shape;949;p42"/>
           <p:cNvSpPr txBox="1"/>
           <p:nvPr>
             <p:ph type="title"/>
@@ -52044,7 +50045,7 @@
         <p:spPr>
           <a:xfrm>
             <a:off x="587375" y="584200"/>
-            <a:ext cx="11017249" cy="647700"/>
+            <a:ext cx="11017200" cy="1257900"/>
           </a:xfrm>
           <a:prstGeom prst="rect">
             <a:avLst/>
@@ -52058,307 +50059,23 @@
           <a:bodyPr anchorCtr="0" anchor="t" bIns="0" lIns="0" spcFirstLastPara="1" rIns="0" wrap="square" tIns="0">
             <a:noAutofit/>
           </a:bodyPr>
-          <a:lstStyle>
-            <a:lvl1pPr lvl="0" algn="l">
-              <a:lnSpc>
-                <a:spcPct val="80000"/>
-              </a:lnSpc>
-              <a:spcBef>
-                <a:spcPts val="0"/>
-              </a:spcBef>
-              <a:spcAft>
-                <a:spcPts val="0"/>
-              </a:spcAft>
-              <a:buClr>
-                <a:schemeClr val="dk1"/>
-              </a:buClr>
-              <a:buSzPts val="5000"/>
-              <a:buNone/>
-              <a:defRPr sz="5000"/>
-            </a:lvl1pPr>
-            <a:lvl2pPr lvl="1" algn="l">
-              <a:lnSpc>
-                <a:spcPct val="100000"/>
-              </a:lnSpc>
-              <a:spcBef>
-                <a:spcPts val="0"/>
-              </a:spcBef>
-              <a:spcAft>
-                <a:spcPts val="0"/>
-              </a:spcAft>
-              <a:buSzPts val="1400"/>
-              <a:buFont typeface="Montserrat SemiBold"/>
-              <a:buNone/>
-              <a:defRPr>
-                <a:latin typeface="Montserrat SemiBold"/>
-                <a:ea typeface="Montserrat SemiBold"/>
-                <a:cs typeface="Montserrat SemiBold"/>
-                <a:sym typeface="Montserrat SemiBold"/>
-              </a:defRPr>
-            </a:lvl2pPr>
-            <a:lvl3pPr lvl="2" algn="l">
-              <a:lnSpc>
-                <a:spcPct val="100000"/>
-              </a:lnSpc>
-              <a:spcBef>
-                <a:spcPts val="0"/>
-              </a:spcBef>
-              <a:spcAft>
-                <a:spcPts val="0"/>
-              </a:spcAft>
-              <a:buSzPts val="1400"/>
-              <a:buFont typeface="Montserrat SemiBold"/>
-              <a:buNone/>
-              <a:defRPr>
-                <a:latin typeface="Montserrat SemiBold"/>
-                <a:ea typeface="Montserrat SemiBold"/>
-                <a:cs typeface="Montserrat SemiBold"/>
-                <a:sym typeface="Montserrat SemiBold"/>
-              </a:defRPr>
-            </a:lvl3pPr>
-            <a:lvl4pPr lvl="3" algn="l">
-              <a:lnSpc>
-                <a:spcPct val="100000"/>
-              </a:lnSpc>
-              <a:spcBef>
-                <a:spcPts val="0"/>
-              </a:spcBef>
-              <a:spcAft>
-                <a:spcPts val="0"/>
-              </a:spcAft>
-              <a:buSzPts val="1400"/>
-              <a:buFont typeface="Montserrat SemiBold"/>
-              <a:buNone/>
-              <a:defRPr>
-                <a:latin typeface="Montserrat SemiBold"/>
-                <a:ea typeface="Montserrat SemiBold"/>
-                <a:cs typeface="Montserrat SemiBold"/>
-                <a:sym typeface="Montserrat SemiBold"/>
-              </a:defRPr>
-            </a:lvl4pPr>
-            <a:lvl5pPr lvl="4" algn="l">
-              <a:lnSpc>
-                <a:spcPct val="100000"/>
-              </a:lnSpc>
-              <a:spcBef>
-                <a:spcPts val="0"/>
-              </a:spcBef>
-              <a:spcAft>
-                <a:spcPts val="0"/>
-              </a:spcAft>
-              <a:buSzPts val="1400"/>
-              <a:buFont typeface="Montserrat SemiBold"/>
-              <a:buNone/>
-              <a:defRPr>
-                <a:latin typeface="Montserrat SemiBold"/>
-                <a:ea typeface="Montserrat SemiBold"/>
-                <a:cs typeface="Montserrat SemiBold"/>
-                <a:sym typeface="Montserrat SemiBold"/>
-              </a:defRPr>
-            </a:lvl5pPr>
-            <a:lvl6pPr lvl="5" algn="l">
-              <a:lnSpc>
-                <a:spcPct val="100000"/>
-              </a:lnSpc>
-              <a:spcBef>
-                <a:spcPts val="0"/>
-              </a:spcBef>
-              <a:spcAft>
-                <a:spcPts val="0"/>
-              </a:spcAft>
-              <a:buSzPts val="1400"/>
-              <a:buFont typeface="Montserrat SemiBold"/>
-              <a:buNone/>
-              <a:defRPr>
-                <a:latin typeface="Montserrat SemiBold"/>
-                <a:ea typeface="Montserrat SemiBold"/>
-                <a:cs typeface="Montserrat SemiBold"/>
-                <a:sym typeface="Montserrat SemiBold"/>
-              </a:defRPr>
-            </a:lvl6pPr>
-            <a:lvl7pPr lvl="6" algn="l">
-              <a:lnSpc>
-                <a:spcPct val="100000"/>
-              </a:lnSpc>
-              <a:spcBef>
-                <a:spcPts val="0"/>
-              </a:spcBef>
-              <a:spcAft>
-                <a:spcPts val="0"/>
-              </a:spcAft>
-              <a:buSzPts val="1400"/>
-              <a:buFont typeface="Montserrat SemiBold"/>
-              <a:buNone/>
-              <a:defRPr>
-                <a:latin typeface="Montserrat SemiBold"/>
-                <a:ea typeface="Montserrat SemiBold"/>
-                <a:cs typeface="Montserrat SemiBold"/>
-                <a:sym typeface="Montserrat SemiBold"/>
-              </a:defRPr>
-            </a:lvl7pPr>
-            <a:lvl8pPr lvl="7" algn="l">
-              <a:lnSpc>
-                <a:spcPct val="100000"/>
-              </a:lnSpc>
-              <a:spcBef>
-                <a:spcPts val="0"/>
-              </a:spcBef>
-              <a:spcAft>
-                <a:spcPts val="0"/>
-              </a:spcAft>
-              <a:buSzPts val="1400"/>
-              <a:buFont typeface="Montserrat SemiBold"/>
-              <a:buNone/>
-              <a:defRPr>
-                <a:latin typeface="Montserrat SemiBold"/>
-                <a:ea typeface="Montserrat SemiBold"/>
-                <a:cs typeface="Montserrat SemiBold"/>
-                <a:sym typeface="Montserrat SemiBold"/>
-              </a:defRPr>
-            </a:lvl8pPr>
-            <a:lvl9pPr lvl="8" algn="l">
-              <a:lnSpc>
-                <a:spcPct val="100000"/>
-              </a:lnSpc>
-              <a:spcBef>
-                <a:spcPts val="0"/>
-              </a:spcBef>
-              <a:spcAft>
-                <a:spcPts val="0"/>
-              </a:spcAft>
-              <a:buSzPts val="1400"/>
-              <a:buFont typeface="Montserrat SemiBold"/>
-              <a:buNone/>
-              <a:defRPr>
-                <a:latin typeface="Montserrat SemiBold"/>
-                <a:ea typeface="Montserrat SemiBold"/>
-                <a:cs typeface="Montserrat SemiBold"/>
-                <a:sym typeface="Montserrat SemiBold"/>
-              </a:defRPr>
-            </a:lvl9pPr>
-          </a:lstStyle>
-          <a:p>
-            <a:r>
-              <a:rPr>
-                <a:latin typeface="Montserrat"/>
-              </a:rPr>
-              <a:t>Маркет — эффективность контекста</a:t>
-            </a:r>
-          </a:p>
-        </p:txBody>
-      </p:sp>
-    </p:spTree>
-  </p:cSld>
-  <p:clrMapOvr>
-    <a:masterClrMapping/>
-  </p:clrMapOvr>
-</p:sld>
-</file>
-
-<file path=ppt/slides/slide94.xml><?xml version="1.0" encoding="utf-8"?>
-<p:sld xmlns:a="http://schemas.openxmlformats.org/drawingml/2006/main" xmlns:p="http://schemas.openxmlformats.org/presentationml/2006/main" xmlns:r="http://schemas.openxmlformats.org/officeDocument/2006/relationships">
-  <p:cSld>
-    <p:spTree>
-      <p:nvGrpSpPr>
-        <p:cNvPr id="1" name=""/>
-        <p:cNvGrpSpPr/>
-        <p:nvPr/>
-      </p:nvGrpSpPr>
-      <p:grpSpPr/>
-      <p:sp>
-        <p:nvSpPr>
-          <p:cNvPr id="570" name="Google Shape;570;p24"/>
-          <p:cNvSpPr txBox="1"/>
-          <p:nvPr>
-            <p:ph idx="1" type="body"/>
-          </p:nvPr>
-        </p:nvSpPr>
-        <p:spPr>
-          <a:xfrm>
-            <a:off x="8148863" y="4790663"/>
-            <a:ext cx="3240000" cy="1080000"/>
-          </a:xfrm>
-          <a:prstGeom prst="rect">
-            <a:avLst/>
-          </a:prstGeom>
-          <a:noFill/>
-          <a:ln>
-            <a:noFill/>
-          </a:ln>
-        </p:spPr>
-        <p:txBody>
-          <a:bodyPr anchorCtr="0" anchor="t" bIns="45700" lIns="0" spcFirstLastPara="1" rIns="91425" wrap="square" tIns="45700">
-            <a:noAutofit/>
-          </a:bodyPr>
-          <a:lstStyle/>
-          <a:p>
-            <a:pPr indent="-9525" lvl="0" marL="9525" rtl="0" algn="l">
-              <a:lnSpc>
-                <a:spcPct val="100000"/>
-              </a:lnSpc>
-              <a:spcBef>
-                <a:spcPts val="0"/>
-              </a:spcBef>
-              <a:spcAft>
-                <a:spcPts val="0"/>
-              </a:spcAft>
-              <a:buClr>
-                <a:schemeClr val="dk1"/>
-              </a:buClr>
-              <a:buSzPts val="1600"/>
-              <a:buNone/>
-            </a:pPr>
-            <a:r>
-              <a:rPr lang="ru-RU">
-                <a:latin typeface="Montserrat"/>
-              </a:rPr>
-              <a:t>Расход / выручка (ДРР)</a:t>
-            </a:r>
-            <a:endParaRPr/>
-          </a:p>
-        </p:txBody>
-      </p:sp>
-      <p:sp>
-        <p:nvSpPr>
-          <p:cNvPr id="571" name="Google Shape;571;p24"/>
-          <p:cNvSpPr txBox="1"/>
-          <p:nvPr>
-            <p:ph idx="2" type="body"/>
-          </p:nvPr>
-        </p:nvSpPr>
-        <p:spPr>
-          <a:xfrm>
-            <a:off x="8148863" y="3809879"/>
-            <a:ext cx="3240000" cy="901800"/>
-          </a:xfrm>
-          <a:prstGeom prst="rect">
-            <a:avLst/>
-          </a:prstGeom>
-          <a:noFill/>
-          <a:ln>
-            <a:noFill/>
-          </a:ln>
-        </p:spPr>
-        <p:txBody>
-          <a:bodyPr anchorCtr="0" anchor="t" bIns="45700" lIns="0" spcFirstLastPara="1" rIns="91425" wrap="square" tIns="45700">
-            <a:noAutofit/>
-          </a:bodyPr>
           <a:lstStyle/>
           <a:p>
             <a:pPr indent="0" lvl="0" marL="0" rtl="0" algn="l">
               <a:lnSpc>
-                <a:spcPct val="90000"/>
-              </a:lnSpc>
-              <a:spcBef>
-                <a:spcPts val="0"/>
-              </a:spcBef>
-              <a:spcAft>
-                <a:spcPts val="0"/>
-              </a:spcAft>
-              <a:buClr>
-                <a:schemeClr val="dk1"/>
-              </a:buClr>
-              <a:buSzPts val="6000"/>
+                <a:spcPct val="80000"/>
+              </a:lnSpc>
+              <a:spcBef>
+                <a:spcPts val="0"/>
+              </a:spcBef>
+              <a:spcAft>
+                <a:spcPts val="0"/>
+              </a:spcAft>
+              <a:buClr>
+                <a:schemeClr val="dk1"/>
+              </a:buClr>
+              <a:buSzPts val="5000"/>
+              <a:buFont typeface="Arial"/>
               <a:buNone/>
             </a:pPr>
             <a:r>
@@ -52368,7 +50085,7 @@
                 <a:cs typeface="Montserrat"/>
                 <a:sym typeface="Montserrat"/>
               </a:rPr>
-              <a:t>≈ 2,5×</a:t>
+              <a:t>Контекстная реклама: Маркет vs ОФД (янв 2025 – май 2026)</a:t>
             </a:r>
             <a:endParaRPr b="1">
               <a:latin typeface="Montserrat"/>
@@ -52379,796 +50096,692 @@
           </a:p>
         </p:txBody>
       </p:sp>
-      <p:sp>
-        <p:nvSpPr>
-          <p:cNvPr id="572" name="Google Shape;572;p24"/>
-          <p:cNvSpPr txBox="1"/>
-          <p:nvPr>
-            <p:ph idx="3" type="body"/>
-          </p:nvPr>
-        </p:nvSpPr>
-        <p:spPr>
-          <a:xfrm>
-            <a:off x="8148863" y="2350380"/>
-            <a:ext cx="3240000" cy="1080000"/>
-          </a:xfrm>
-          <a:prstGeom prst="rect">
-            <a:avLst/>
-          </a:prstGeom>
-          <a:noFill/>
-          <a:ln>
-            <a:noFill/>
-          </a:ln>
-        </p:spPr>
-        <p:txBody>
-          <a:bodyPr anchorCtr="0" anchor="t" bIns="45700" lIns="0" spcFirstLastPara="1" rIns="91425" wrap="square" tIns="45700">
-            <a:noAutofit/>
-          </a:bodyPr>
-          <a:lstStyle/>
-          <a:p>
-            <a:pPr indent="-9525" lvl="0" marL="9525" rtl="0" algn="l">
-              <a:lnSpc>
-                <a:spcPct val="100000"/>
-              </a:lnSpc>
-              <a:spcBef>
-                <a:spcPts val="0"/>
-              </a:spcBef>
-              <a:spcAft>
-                <a:spcPts val="0"/>
-              </a:spcAft>
-              <a:buClr>
-                <a:schemeClr val="dk1"/>
-              </a:buClr>
-              <a:buSzPts val="1600"/>
-              <a:buNone/>
-            </a:pPr>
-            <a:r>
-              <a:rPr lang="ru-RU">
-                <a:latin typeface="Montserrat"/>
-              </a:rPr>
-              <a:t>CPO · в 2,6× дешевле Маркета</a:t>
-            </a:r>
-            <a:endParaRPr/>
-          </a:p>
-        </p:txBody>
-      </p:sp>
-      <p:sp>
-        <p:nvSpPr>
-          <p:cNvPr id="573" name="Google Shape;573;p24"/>
-          <p:cNvSpPr txBox="1"/>
-          <p:nvPr>
-            <p:ph idx="4" type="body"/>
-          </p:nvPr>
-        </p:nvSpPr>
-        <p:spPr>
-          <a:xfrm>
-            <a:off x="8148863" y="1382737"/>
-            <a:ext cx="3240000" cy="901800"/>
-          </a:xfrm>
-          <a:prstGeom prst="rect">
-            <a:avLst/>
-          </a:prstGeom>
-          <a:noFill/>
-          <a:ln>
-            <a:noFill/>
-          </a:ln>
-        </p:spPr>
-        <p:txBody>
-          <a:bodyPr anchorCtr="0" anchor="t" bIns="45700" lIns="0" spcFirstLastPara="1" rIns="91425" wrap="square" tIns="45700">
-            <a:noAutofit/>
-          </a:bodyPr>
-          <a:lstStyle/>
-          <a:p>
-            <a:pPr indent="0" lvl="0" marL="0" rtl="0" algn="l">
-              <a:lnSpc>
-                <a:spcPct val="90000"/>
-              </a:lnSpc>
-              <a:spcBef>
-                <a:spcPts val="0"/>
-              </a:spcBef>
-              <a:spcAft>
-                <a:spcPts val="0"/>
-              </a:spcAft>
-              <a:buClr>
-                <a:schemeClr val="dk1"/>
-              </a:buClr>
-              <a:buSzPts val="6000"/>
-              <a:buNone/>
-            </a:pPr>
-            <a:r>
-              <a:rPr b="1" lang="ru-RU">
-                <a:solidFill>
-                  <a:schemeClr val="accent1"/>
-                </a:solidFill>
-                <a:latin typeface="Montserrat"/>
-                <a:ea typeface="Montserrat"/>
-                <a:cs typeface="Montserrat"/>
-                <a:sym typeface="Montserrat"/>
-              </a:rPr>
-              <a:t>17,9 тыс ₽</a:t>
-            </a:r>
-            <a:endParaRPr b="1">
-              <a:solidFill>
-                <a:schemeClr val="accent1"/>
-              </a:solidFill>
-              <a:latin typeface="Montserrat"/>
-              <a:ea typeface="Montserrat"/>
-              <a:cs typeface="Montserrat"/>
-              <a:sym typeface="Montserrat"/>
-            </a:endParaRPr>
-          </a:p>
-        </p:txBody>
-      </p:sp>
-      <p:sp>
-        <p:nvSpPr>
-          <p:cNvPr id="574" name="Google Shape;574;p24"/>
-          <p:cNvSpPr txBox="1"/>
-          <p:nvPr>
-            <p:ph idx="5" type="body"/>
-          </p:nvPr>
-        </p:nvSpPr>
-        <p:spPr>
-          <a:xfrm>
-            <a:off x="586013" y="2350380"/>
-            <a:ext cx="3240000" cy="1080000"/>
-          </a:xfrm>
-          <a:prstGeom prst="rect">
-            <a:avLst/>
-          </a:prstGeom>
-          <a:noFill/>
-          <a:ln>
-            <a:noFill/>
-          </a:ln>
-        </p:spPr>
-        <p:txBody>
-          <a:bodyPr anchorCtr="0" anchor="t" bIns="45700" lIns="0" spcFirstLastPara="1" rIns="91425" wrap="square" tIns="45700">
-            <a:noAutofit/>
-          </a:bodyPr>
-          <a:lstStyle/>
-          <a:p>
-            <a:pPr indent="-9525" lvl="0" marL="9525" rtl="0" algn="l">
-              <a:lnSpc>
-                <a:spcPct val="100000"/>
-              </a:lnSpc>
-              <a:spcBef>
-                <a:spcPts val="0"/>
-              </a:spcBef>
-              <a:spcAft>
-                <a:spcPts val="0"/>
-              </a:spcAft>
-              <a:buClr>
-                <a:schemeClr val="dk1"/>
-              </a:buClr>
-              <a:buSzPts val="1600"/>
-              <a:buNone/>
-            </a:pPr>
-            <a:r>
-              <a:rPr lang="ru-RU">
-                <a:latin typeface="Montserrat"/>
-              </a:rPr>
-              <a:t>Расход (янв 2025 – май 2026)</a:t>
-            </a:r>
-            <a:endParaRPr/>
-          </a:p>
-        </p:txBody>
-      </p:sp>
-      <p:sp>
-        <p:nvSpPr>
-          <p:cNvPr id="575" name="Google Shape;575;p24"/>
-          <p:cNvSpPr txBox="1"/>
-          <p:nvPr>
-            <p:ph idx="6" type="body"/>
-          </p:nvPr>
-        </p:nvSpPr>
-        <p:spPr>
-          <a:xfrm>
-            <a:off x="586012" y="1382737"/>
-            <a:ext cx="3240000" cy="901800"/>
-          </a:xfrm>
-          <a:prstGeom prst="rect">
-            <a:avLst/>
-          </a:prstGeom>
-          <a:noFill/>
-          <a:ln>
-            <a:noFill/>
-          </a:ln>
-        </p:spPr>
-        <p:txBody>
-          <a:bodyPr anchorCtr="0" anchor="t" bIns="45700" lIns="0" spcFirstLastPara="1" rIns="91425" wrap="square" tIns="45700">
-            <a:noAutofit/>
-          </a:bodyPr>
-          <a:lstStyle/>
-          <a:p>
-            <a:pPr indent="0" lvl="0" marL="0" rtl="0" algn="l">
-              <a:lnSpc>
-                <a:spcPct val="90000"/>
-              </a:lnSpc>
-              <a:spcBef>
-                <a:spcPts val="0"/>
-              </a:spcBef>
-              <a:spcAft>
-                <a:spcPts val="0"/>
-              </a:spcAft>
-              <a:buClr>
-                <a:schemeClr val="dk1"/>
-              </a:buClr>
-              <a:buSzPts val="6000"/>
-              <a:buNone/>
-            </a:pPr>
-            <a:r>
-              <a:rPr b="1" lang="ru-RU">
-                <a:latin typeface="Montserrat"/>
-                <a:ea typeface="Montserrat"/>
-                <a:cs typeface="Montserrat"/>
-                <a:sym typeface="Montserrat"/>
-              </a:rPr>
-              <a:t>7,1 млн ₽</a:t>
-            </a:r>
-            <a:endParaRPr b="1">
-              <a:latin typeface="Montserrat"/>
-              <a:ea typeface="Montserrat"/>
-              <a:cs typeface="Montserrat"/>
-              <a:sym typeface="Montserrat"/>
-            </a:endParaRPr>
-          </a:p>
-        </p:txBody>
-      </p:sp>
-      <p:sp>
-        <p:nvSpPr>
-          <p:cNvPr id="576" name="Google Shape;576;p24"/>
-          <p:cNvSpPr txBox="1"/>
-          <p:nvPr>
-            <p:ph idx="7" type="body"/>
-          </p:nvPr>
-        </p:nvSpPr>
-        <p:spPr>
-          <a:xfrm>
-            <a:off x="586013" y="4790663"/>
-            <a:ext cx="3240000" cy="1080000"/>
-          </a:xfrm>
-          <a:prstGeom prst="rect">
-            <a:avLst/>
-          </a:prstGeom>
-          <a:noFill/>
-          <a:ln>
-            <a:noFill/>
-          </a:ln>
-        </p:spPr>
-        <p:txBody>
-          <a:bodyPr anchorCtr="0" anchor="t" bIns="45700" lIns="0" spcFirstLastPara="1" rIns="91425" wrap="square" tIns="45700">
-            <a:noAutofit/>
-          </a:bodyPr>
-          <a:lstStyle/>
-          <a:p>
-            <a:pPr indent="-9525" lvl="0" marL="9525" rtl="0" algn="l">
-              <a:lnSpc>
-                <a:spcPct val="100000"/>
-              </a:lnSpc>
-              <a:spcBef>
-                <a:spcPts val="0"/>
-              </a:spcBef>
-              <a:spcAft>
-                <a:spcPts val="0"/>
-              </a:spcAft>
-              <a:buClr>
-                <a:schemeClr val="dk1"/>
-              </a:buClr>
-              <a:buSzPts val="1600"/>
-              <a:buNone/>
-            </a:pPr>
-            <a:r>
-              <a:rPr lang="ru-RU">
-                <a:latin typeface="Montserrat"/>
-              </a:rPr>
-              <a:t>CPL — средний</a:t>
-            </a:r>
-            <a:endParaRPr/>
-          </a:p>
-        </p:txBody>
-      </p:sp>
-      <p:sp>
-        <p:nvSpPr>
-          <p:cNvPr id="577" name="Google Shape;577;p24"/>
-          <p:cNvSpPr txBox="1"/>
-          <p:nvPr>
-            <p:ph idx="8" type="body"/>
-          </p:nvPr>
-        </p:nvSpPr>
-        <p:spPr>
-          <a:xfrm>
-            <a:off x="586013" y="3809879"/>
-            <a:ext cx="3240000" cy="901800"/>
-          </a:xfrm>
-          <a:prstGeom prst="rect">
-            <a:avLst/>
-          </a:prstGeom>
-          <a:noFill/>
-          <a:ln>
-            <a:noFill/>
-          </a:ln>
-        </p:spPr>
-        <p:txBody>
-          <a:bodyPr anchorCtr="0" anchor="t" bIns="45700" lIns="0" spcFirstLastPara="1" rIns="91425" wrap="square" tIns="45700">
-            <a:noAutofit/>
-          </a:bodyPr>
-          <a:lstStyle/>
-          <a:p>
-            <a:pPr indent="0" lvl="0" marL="0" rtl="0" algn="l">
-              <a:lnSpc>
-                <a:spcPct val="90000"/>
-              </a:lnSpc>
-              <a:spcBef>
-                <a:spcPts val="0"/>
-              </a:spcBef>
-              <a:spcAft>
-                <a:spcPts val="0"/>
-              </a:spcAft>
-              <a:buClr>
-                <a:schemeClr val="dk1"/>
-              </a:buClr>
-              <a:buSzPts val="6000"/>
-              <a:buNone/>
-            </a:pPr>
-            <a:r>
-              <a:rPr b="1" lang="ru-RU">
-                <a:latin typeface="Montserrat"/>
-                <a:ea typeface="Montserrat"/>
-                <a:cs typeface="Montserrat"/>
-                <a:sym typeface="Montserrat"/>
-              </a:rPr>
-              <a:t>4,5 тыс ₽</a:t>
-            </a:r>
-            <a:endParaRPr b="1">
-              <a:latin typeface="Montserrat"/>
-              <a:ea typeface="Montserrat"/>
-              <a:cs typeface="Montserrat"/>
-              <a:sym typeface="Montserrat"/>
-            </a:endParaRPr>
-          </a:p>
-        </p:txBody>
-      </p:sp>
-      <p:sp>
-        <p:nvSpPr>
-          <p:cNvPr id="578" name="Google Shape;578;p24"/>
-          <p:cNvSpPr txBox="1"/>
-          <p:nvPr>
-            <p:ph idx="9" type="body"/>
-          </p:nvPr>
-        </p:nvSpPr>
-        <p:spPr>
-          <a:xfrm>
-            <a:off x="4376963" y="2350380"/>
-            <a:ext cx="3240000" cy="1080000"/>
-          </a:xfrm>
-          <a:prstGeom prst="rect">
-            <a:avLst/>
-          </a:prstGeom>
-          <a:noFill/>
-          <a:ln>
-            <a:noFill/>
-          </a:ln>
-        </p:spPr>
-        <p:txBody>
-          <a:bodyPr anchorCtr="0" anchor="t" bIns="45700" lIns="0" spcFirstLastPara="1" rIns="91425" wrap="square" tIns="45700">
-            <a:noAutofit/>
-          </a:bodyPr>
-          <a:lstStyle/>
-          <a:p>
-            <a:pPr indent="-9525" lvl="0" marL="9525" rtl="0" algn="l">
-              <a:lnSpc>
-                <a:spcPct val="100000"/>
-              </a:lnSpc>
-              <a:spcBef>
-                <a:spcPts val="0"/>
-              </a:spcBef>
-              <a:spcAft>
-                <a:spcPts val="0"/>
-              </a:spcAft>
-              <a:buClr>
-                <a:schemeClr val="dk1"/>
-              </a:buClr>
-              <a:buSzPts val="1600"/>
-              <a:buNone/>
-            </a:pPr>
-            <a:r>
-              <a:rPr lang="ru-RU">
-                <a:latin typeface="Montserrat"/>
-              </a:rPr>
-              <a:t>Оплат привлечено</a:t>
-            </a:r>
-            <a:endParaRPr/>
-          </a:p>
-        </p:txBody>
-      </p:sp>
-      <p:sp>
-        <p:nvSpPr>
-          <p:cNvPr id="579" name="Google Shape;579;p24"/>
-          <p:cNvSpPr txBox="1"/>
-          <p:nvPr>
-            <p:ph idx="13" type="body"/>
-          </p:nvPr>
-        </p:nvSpPr>
-        <p:spPr>
-          <a:xfrm>
-            <a:off x="4376962" y="1382737"/>
-            <a:ext cx="3240000" cy="901800"/>
-          </a:xfrm>
-          <a:prstGeom prst="rect">
-            <a:avLst/>
-          </a:prstGeom>
-          <a:noFill/>
-          <a:ln>
-            <a:noFill/>
-          </a:ln>
-        </p:spPr>
-        <p:txBody>
-          <a:bodyPr anchorCtr="0" anchor="t" bIns="45700" lIns="0" spcFirstLastPara="1" rIns="91425" wrap="square" tIns="45700">
-            <a:noAutofit/>
-          </a:bodyPr>
-          <a:lstStyle/>
-          <a:p>
-            <a:pPr indent="0" lvl="0" marL="0" rtl="0" algn="l">
-              <a:lnSpc>
-                <a:spcPct val="90000"/>
-              </a:lnSpc>
-              <a:spcBef>
-                <a:spcPts val="0"/>
-              </a:spcBef>
-              <a:spcAft>
-                <a:spcPts val="0"/>
-              </a:spcAft>
-              <a:buClr>
-                <a:schemeClr val="dk1"/>
-              </a:buClr>
-              <a:buSzPts val="6000"/>
-              <a:buNone/>
-            </a:pPr>
-            <a:r>
-              <a:rPr b="1" lang="ru-RU">
-                <a:latin typeface="Montserrat"/>
-                <a:ea typeface="Montserrat"/>
-                <a:cs typeface="Montserrat"/>
-                <a:sym typeface="Montserrat"/>
-              </a:rPr>
-              <a:t>397</a:t>
-            </a:r>
-            <a:endParaRPr b="1">
-              <a:latin typeface="Montserrat"/>
-              <a:ea typeface="Montserrat"/>
-              <a:cs typeface="Montserrat"/>
-              <a:sym typeface="Montserrat"/>
-            </a:endParaRPr>
-          </a:p>
-        </p:txBody>
-      </p:sp>
-      <p:sp>
-        <p:nvSpPr>
-          <p:cNvPr id="580" name="Google Shape;580;p24"/>
-          <p:cNvSpPr txBox="1"/>
-          <p:nvPr>
-            <p:ph idx="14" type="body"/>
-          </p:nvPr>
-        </p:nvSpPr>
-        <p:spPr>
-          <a:xfrm>
-            <a:off x="4376963" y="4790663"/>
-            <a:ext cx="3240000" cy="1080000"/>
-          </a:xfrm>
-          <a:prstGeom prst="rect">
-            <a:avLst/>
-          </a:prstGeom>
-          <a:noFill/>
-          <a:ln>
-            <a:noFill/>
-          </a:ln>
-        </p:spPr>
-        <p:txBody>
-          <a:bodyPr anchorCtr="0" anchor="t" bIns="45700" lIns="0" spcFirstLastPara="1" rIns="91425" wrap="square" tIns="45700">
-            <a:noAutofit/>
-          </a:bodyPr>
-          <a:lstStyle/>
-          <a:p>
-            <a:pPr indent="-9525" lvl="0" marL="9525" rtl="0" algn="l">
-              <a:lnSpc>
-                <a:spcPct val="100000"/>
-              </a:lnSpc>
-              <a:spcBef>
-                <a:spcPts val="0"/>
-              </a:spcBef>
-              <a:spcAft>
-                <a:spcPts val="0"/>
-              </a:spcAft>
-              <a:buClr>
-                <a:schemeClr val="dk1"/>
-              </a:buClr>
-              <a:buSzPts val="1600"/>
-              <a:buNone/>
-            </a:pPr>
-            <a:r>
-              <a:rPr lang="ru-RU">
-                <a:latin typeface="Montserrat"/>
-              </a:rPr>
-              <a:t>Выручка по целевым лидам</a:t>
-            </a:r>
-            <a:endParaRPr/>
-          </a:p>
-        </p:txBody>
-      </p:sp>
-      <p:sp>
-        <p:nvSpPr>
-          <p:cNvPr id="581" name="Google Shape;581;p24"/>
-          <p:cNvSpPr txBox="1"/>
-          <p:nvPr>
-            <p:ph idx="15" type="body"/>
-          </p:nvPr>
-        </p:nvSpPr>
-        <p:spPr>
-          <a:xfrm>
-            <a:off x="4376962" y="3809879"/>
-            <a:ext cx="3240000" cy="901800"/>
-          </a:xfrm>
-          <a:prstGeom prst="rect">
-            <a:avLst/>
-          </a:prstGeom>
-          <a:noFill/>
-          <a:ln>
-            <a:noFill/>
-          </a:ln>
-        </p:spPr>
-        <p:txBody>
-          <a:bodyPr anchorCtr="0" anchor="t" bIns="45700" lIns="0" spcFirstLastPara="1" rIns="91425" wrap="square" tIns="45700">
-            <a:noAutofit/>
-          </a:bodyPr>
-          <a:lstStyle/>
-          <a:p>
-            <a:pPr indent="0" lvl="0" marL="0" rtl="0" algn="l">
-              <a:lnSpc>
-                <a:spcPct val="90000"/>
-              </a:lnSpc>
-              <a:spcBef>
-                <a:spcPts val="0"/>
-              </a:spcBef>
-              <a:spcAft>
-                <a:spcPts val="0"/>
-              </a:spcAft>
-              <a:buClr>
-                <a:schemeClr val="dk1"/>
-              </a:buClr>
-              <a:buSzPts val="6000"/>
-              <a:buNone/>
-            </a:pPr>
-            <a:r>
-              <a:rPr b="1" lang="ru-RU">
-                <a:latin typeface="Montserrat"/>
-                <a:ea typeface="Montserrat"/>
-                <a:cs typeface="Montserrat"/>
-                <a:sym typeface="Montserrat"/>
-              </a:rPr>
-              <a:t>2,8 млн ₽</a:t>
-            </a:r>
-            <a:endParaRPr b="1">
-              <a:latin typeface="Montserrat"/>
-              <a:ea typeface="Montserrat"/>
-              <a:cs typeface="Montserrat"/>
-              <a:sym typeface="Montserrat"/>
-            </a:endParaRPr>
-          </a:p>
-        </p:txBody>
-      </p:sp>
-      <p:sp>
-        <p:nvSpPr>
-          <p:cNvPr id="66" name="Google Shape;66;p63"/>
-          <p:cNvSpPr txBox="1"/>
-          <p:nvPr>
-            <p:ph type="title"/>
-          </p:nvPr>
-        </p:nvSpPr>
-        <p:spPr>
-          <a:xfrm>
-            <a:off x="587375" y="584200"/>
-            <a:ext cx="11017249" cy="647700"/>
-          </a:xfrm>
-          <a:prstGeom prst="rect">
-            <a:avLst/>
-          </a:prstGeom>
-          <a:noFill/>
-          <a:ln>
-            <a:noFill/>
-          </a:ln>
-        </p:spPr>
-        <p:txBody>
-          <a:bodyPr anchorCtr="0" anchor="t" bIns="0" lIns="0" spcFirstLastPara="1" rIns="0" wrap="square" tIns="0">
-            <a:noAutofit/>
-          </a:bodyPr>
-          <a:lstStyle>
-            <a:lvl1pPr lvl="0" algn="l">
-              <a:lnSpc>
-                <a:spcPct val="80000"/>
-              </a:lnSpc>
-              <a:spcBef>
-                <a:spcPts val="0"/>
-              </a:spcBef>
-              <a:spcAft>
-                <a:spcPts val="0"/>
-              </a:spcAft>
-              <a:buClr>
-                <a:schemeClr val="dk1"/>
-              </a:buClr>
-              <a:buSzPts val="5000"/>
-              <a:buNone/>
-              <a:defRPr sz="5000"/>
-            </a:lvl1pPr>
-            <a:lvl2pPr lvl="1" algn="l">
-              <a:lnSpc>
-                <a:spcPct val="100000"/>
-              </a:lnSpc>
-              <a:spcBef>
-                <a:spcPts val="0"/>
-              </a:spcBef>
-              <a:spcAft>
-                <a:spcPts val="0"/>
-              </a:spcAft>
-              <a:buSzPts val="1400"/>
-              <a:buFont typeface="Montserrat SemiBold"/>
-              <a:buNone/>
-              <a:defRPr>
-                <a:latin typeface="Montserrat SemiBold"/>
-                <a:ea typeface="Montserrat SemiBold"/>
-                <a:cs typeface="Montserrat SemiBold"/>
-                <a:sym typeface="Montserrat SemiBold"/>
-              </a:defRPr>
-            </a:lvl2pPr>
-            <a:lvl3pPr lvl="2" algn="l">
-              <a:lnSpc>
-                <a:spcPct val="100000"/>
-              </a:lnSpc>
-              <a:spcBef>
-                <a:spcPts val="0"/>
-              </a:spcBef>
-              <a:spcAft>
-                <a:spcPts val="0"/>
-              </a:spcAft>
-              <a:buSzPts val="1400"/>
-              <a:buFont typeface="Montserrat SemiBold"/>
-              <a:buNone/>
-              <a:defRPr>
-                <a:latin typeface="Montserrat SemiBold"/>
-                <a:ea typeface="Montserrat SemiBold"/>
-                <a:cs typeface="Montserrat SemiBold"/>
-                <a:sym typeface="Montserrat SemiBold"/>
-              </a:defRPr>
-            </a:lvl3pPr>
-            <a:lvl4pPr lvl="3" algn="l">
-              <a:lnSpc>
-                <a:spcPct val="100000"/>
-              </a:lnSpc>
-              <a:spcBef>
-                <a:spcPts val="0"/>
-              </a:spcBef>
-              <a:spcAft>
-                <a:spcPts val="0"/>
-              </a:spcAft>
-              <a:buSzPts val="1400"/>
-              <a:buFont typeface="Montserrat SemiBold"/>
-              <a:buNone/>
-              <a:defRPr>
-                <a:latin typeface="Montserrat SemiBold"/>
-                <a:ea typeface="Montserrat SemiBold"/>
-                <a:cs typeface="Montserrat SemiBold"/>
-                <a:sym typeface="Montserrat SemiBold"/>
-              </a:defRPr>
-            </a:lvl4pPr>
-            <a:lvl5pPr lvl="4" algn="l">
-              <a:lnSpc>
-                <a:spcPct val="100000"/>
-              </a:lnSpc>
-              <a:spcBef>
-                <a:spcPts val="0"/>
-              </a:spcBef>
-              <a:spcAft>
-                <a:spcPts val="0"/>
-              </a:spcAft>
-              <a:buSzPts val="1400"/>
-              <a:buFont typeface="Montserrat SemiBold"/>
-              <a:buNone/>
-              <a:defRPr>
-                <a:latin typeface="Montserrat SemiBold"/>
-                <a:ea typeface="Montserrat SemiBold"/>
-                <a:cs typeface="Montserrat SemiBold"/>
-                <a:sym typeface="Montserrat SemiBold"/>
-              </a:defRPr>
-            </a:lvl5pPr>
-            <a:lvl6pPr lvl="5" algn="l">
-              <a:lnSpc>
-                <a:spcPct val="100000"/>
-              </a:lnSpc>
-              <a:spcBef>
-                <a:spcPts val="0"/>
-              </a:spcBef>
-              <a:spcAft>
-                <a:spcPts val="0"/>
-              </a:spcAft>
-              <a:buSzPts val="1400"/>
-              <a:buFont typeface="Montserrat SemiBold"/>
-              <a:buNone/>
-              <a:defRPr>
-                <a:latin typeface="Montserrat SemiBold"/>
-                <a:ea typeface="Montserrat SemiBold"/>
-                <a:cs typeface="Montserrat SemiBold"/>
-                <a:sym typeface="Montserrat SemiBold"/>
-              </a:defRPr>
-            </a:lvl6pPr>
-            <a:lvl7pPr lvl="6" algn="l">
-              <a:lnSpc>
-                <a:spcPct val="100000"/>
-              </a:lnSpc>
-              <a:spcBef>
-                <a:spcPts val="0"/>
-              </a:spcBef>
-              <a:spcAft>
-                <a:spcPts val="0"/>
-              </a:spcAft>
-              <a:buSzPts val="1400"/>
-              <a:buFont typeface="Montserrat SemiBold"/>
-              <a:buNone/>
-              <a:defRPr>
-                <a:latin typeface="Montserrat SemiBold"/>
-                <a:ea typeface="Montserrat SemiBold"/>
-                <a:cs typeface="Montserrat SemiBold"/>
-                <a:sym typeface="Montserrat SemiBold"/>
-              </a:defRPr>
-            </a:lvl7pPr>
-            <a:lvl8pPr lvl="7" algn="l">
-              <a:lnSpc>
-                <a:spcPct val="100000"/>
-              </a:lnSpc>
-              <a:spcBef>
-                <a:spcPts val="0"/>
-              </a:spcBef>
-              <a:spcAft>
-                <a:spcPts val="0"/>
-              </a:spcAft>
-              <a:buSzPts val="1400"/>
-              <a:buFont typeface="Montserrat SemiBold"/>
-              <a:buNone/>
-              <a:defRPr>
-                <a:latin typeface="Montserrat SemiBold"/>
-                <a:ea typeface="Montserrat SemiBold"/>
-                <a:cs typeface="Montserrat SemiBold"/>
-                <a:sym typeface="Montserrat SemiBold"/>
-              </a:defRPr>
-            </a:lvl8pPr>
-            <a:lvl9pPr lvl="8" algn="l">
-              <a:lnSpc>
-                <a:spcPct val="100000"/>
-              </a:lnSpc>
-              <a:spcBef>
-                <a:spcPts val="0"/>
-              </a:spcBef>
-              <a:spcAft>
-                <a:spcPts val="0"/>
-              </a:spcAft>
-              <a:buSzPts val="1400"/>
-              <a:buFont typeface="Montserrat SemiBold"/>
-              <a:buNone/>
-              <a:defRPr>
-                <a:latin typeface="Montserrat SemiBold"/>
-                <a:ea typeface="Montserrat SemiBold"/>
-                <a:cs typeface="Montserrat SemiBold"/>
-                <a:sym typeface="Montserrat SemiBold"/>
-              </a:defRPr>
-            </a:lvl9pPr>
-          </a:lstStyle>
-          <a:p>
-            <a:r>
-              <a:rPr>
-                <a:latin typeface="Montserrat"/>
-              </a:rPr>
-              <a:t>ОФД — эффективность контекста</a:t>
-            </a:r>
-          </a:p>
-        </p:txBody>
-      </p:sp>
+      <p:graphicFrame>
+        <p:nvGraphicFramePr>
+          <p:cNvPr id="950" name="Table 949"/>
+          <p:cNvGraphicFramePr>
+            <a:graphicFrameLocks noGrp="1"/>
+          </p:cNvGraphicFramePr>
+          <p:nvPr/>
+        </p:nvGraphicFramePr>
+        <p:xfrm>
+          <a:off x="586800" y="1872000"/>
+          <a:ext cx="11016000" cy="2520000"/>
+        </p:xfrm>
+        <a:graphic>
+          <a:graphicData uri="http://schemas.openxmlformats.org/drawingml/2006/table">
+            <a:tbl>
+              <a:tblPr firstRow="0" bandRow="0">
+                <a:tableStyleId>{5C22544A-7EE6-4342-B048-85BDC9FD1C3A}</a:tableStyleId>
+              </a:tblPr>
+              <a:tblGrid>
+                <a:gridCol w="2754000"/>
+                <a:gridCol w="2754000"/>
+                <a:gridCol w="2754000"/>
+                <a:gridCol w="2754000"/>
+              </a:tblGrid>
+              <a:tr h="360000">
+                <a:tc>
+                  <a:txBody>
+                    <a:bodyPr/>
+                    <a:lstStyle/>
+                    <a:p>
+                      <a:pPr algn="l"/>
+                      <a:r>
+                        <a:rPr sz="1200" b="1">
+                          <a:solidFill>
+                            <a:srgbClr val="FFFFFF"/>
+                          </a:solidFill>
+                          <a:latin typeface="Montserrat"/>
+                        </a:rPr>
+                        <a:t>Показатель</a:t>
+                      </a:r>
+                    </a:p>
+                  </a:txBody>
+                  <a:tcPr anchor="ctr" marL="72000" marR="72000" marT="14400" marB="14400">
+                    <a:solidFill>
+                      <a:srgbClr val="2291FF"/>
+                    </a:solidFill>
+                  </a:tcPr>
+                </a:tc>
+                <a:tc>
+                  <a:txBody>
+                    <a:bodyPr/>
+                    <a:lstStyle/>
+                    <a:p>
+                      <a:pPr algn="r"/>
+                      <a:r>
+                        <a:rPr sz="1200" b="1">
+                          <a:solidFill>
+                            <a:srgbClr val="FFFFFF"/>
+                          </a:solidFill>
+                          <a:latin typeface="Montserrat"/>
+                        </a:rPr>
+                        <a:t>Маркет</a:t>
+                      </a:r>
+                    </a:p>
+                  </a:txBody>
+                  <a:tcPr anchor="ctr" marL="72000" marR="72000" marT="14400" marB="14400">
+                    <a:solidFill>
+                      <a:srgbClr val="2291FF"/>
+                    </a:solidFill>
+                  </a:tcPr>
+                </a:tc>
+                <a:tc>
+                  <a:txBody>
+                    <a:bodyPr/>
+                    <a:lstStyle/>
+                    <a:p>
+                      <a:pPr algn="r"/>
+                      <a:r>
+                        <a:rPr sz="1200" b="1">
+                          <a:solidFill>
+                            <a:srgbClr val="FFFFFF"/>
+                          </a:solidFill>
+                          <a:latin typeface="Montserrat"/>
+                        </a:rPr>
+                        <a:t>ОФД</a:t>
+                      </a:r>
+                    </a:p>
+                  </a:txBody>
+                  <a:tcPr anchor="ctr" marL="72000" marR="72000" marT="14400" marB="14400">
+                    <a:solidFill>
+                      <a:srgbClr val="2291FF"/>
+                    </a:solidFill>
+                  </a:tcPr>
+                </a:tc>
+                <a:tc>
+                  <a:txBody>
+                    <a:bodyPr/>
+                    <a:lstStyle/>
+                    <a:p>
+                      <a:pPr algn="r"/>
+                      <a:r>
+                        <a:rPr sz="1200" b="1">
+                          <a:solidFill>
+                            <a:srgbClr val="FFFFFF"/>
+                          </a:solidFill>
+                          <a:latin typeface="Montserrat"/>
+                        </a:rPr>
+                        <a:t>Разница</a:t>
+                      </a:r>
+                    </a:p>
+                  </a:txBody>
+                  <a:tcPr anchor="ctr" marL="72000" marR="72000" marT="14400" marB="14400">
+                    <a:solidFill>
+                      <a:srgbClr val="2291FF"/>
+                    </a:solidFill>
+                  </a:tcPr>
+                </a:tc>
+              </a:tr>
+              <a:tr h="360000">
+                <a:tc>
+                  <a:txBody>
+                    <a:bodyPr/>
+                    <a:lstStyle/>
+                    <a:p>
+                      <a:pPr algn="l"/>
+                      <a:r>
+                        <a:rPr sz="1200" b="1">
+                          <a:solidFill>
+                            <a:srgbClr val="000000"/>
+                          </a:solidFill>
+                          <a:latin typeface="Montserrat"/>
+                        </a:rPr>
+                        <a:t>Расход</a:t>
+                      </a:r>
+                    </a:p>
+                  </a:txBody>
+                  <a:tcPr anchor="ctr" marL="72000" marR="72000" marT="14400" marB="14400">
+                    <a:solidFill>
+                      <a:srgbClr val="FFFFFF"/>
+                    </a:solidFill>
+                  </a:tcPr>
+                </a:tc>
+                <a:tc>
+                  <a:txBody>
+                    <a:bodyPr/>
+                    <a:lstStyle/>
+                    <a:p>
+                      <a:pPr algn="r"/>
+                      <a:r>
+                        <a:rPr sz="1200" b="0">
+                          <a:solidFill>
+                            <a:srgbClr val="000000"/>
+                          </a:solidFill>
+                          <a:latin typeface="Montserrat"/>
+                        </a:rPr>
+                        <a:t>14,7 млн ₽</a:t>
+                      </a:r>
+                    </a:p>
+                  </a:txBody>
+                  <a:tcPr anchor="ctr" marL="72000" marR="72000" marT="14400" marB="14400">
+                    <a:solidFill>
+                      <a:srgbClr val="FFFFFF"/>
+                    </a:solidFill>
+                  </a:tcPr>
+                </a:tc>
+                <a:tc>
+                  <a:txBody>
+                    <a:bodyPr/>
+                    <a:lstStyle/>
+                    <a:p>
+                      <a:pPr algn="r"/>
+                      <a:r>
+                        <a:rPr sz="1200" b="0">
+                          <a:solidFill>
+                            <a:srgbClr val="000000"/>
+                          </a:solidFill>
+                          <a:latin typeface="Montserrat"/>
+                        </a:rPr>
+                        <a:t>7,1 млн ₽</a:t>
+                      </a:r>
+                    </a:p>
+                  </a:txBody>
+                  <a:tcPr anchor="ctr" marL="72000" marR="72000" marT="14400" marB="14400">
+                    <a:solidFill>
+                      <a:srgbClr val="FFFFFF"/>
+                    </a:solidFill>
+                  </a:tcPr>
+                </a:tc>
+                <a:tc>
+                  <a:txBody>
+                    <a:bodyPr/>
+                    <a:lstStyle/>
+                    <a:p>
+                      <a:pPr algn="r"/>
+                      <a:r>
+                        <a:rPr sz="1200" b="0">
+                          <a:solidFill>
+                            <a:srgbClr val="000000"/>
+                          </a:solidFill>
+                          <a:latin typeface="Montserrat"/>
+                        </a:rPr>
+                        <a:t>Маркет ×2,1</a:t>
+                      </a:r>
+                    </a:p>
+                  </a:txBody>
+                  <a:tcPr anchor="ctr" marL="72000" marR="72000" marT="14400" marB="14400">
+                    <a:solidFill>
+                      <a:srgbClr val="FFFFFF"/>
+                    </a:solidFill>
+                  </a:tcPr>
+                </a:tc>
+              </a:tr>
+              <a:tr h="360000">
+                <a:tc>
+                  <a:txBody>
+                    <a:bodyPr/>
+                    <a:lstStyle/>
+                    <a:p>
+                      <a:pPr algn="l"/>
+                      <a:r>
+                        <a:rPr sz="1200" b="1">
+                          <a:solidFill>
+                            <a:srgbClr val="000000"/>
+                          </a:solidFill>
+                          <a:latin typeface="Montserrat"/>
+                        </a:rPr>
+                        <a:t>Оплаты привлечено</a:t>
+                      </a:r>
+                    </a:p>
+                  </a:txBody>
+                  <a:tcPr anchor="ctr" marL="72000" marR="72000" marT="14400" marB="14400">
+                    <a:solidFill>
+                      <a:srgbClr val="F1F1F1"/>
+                    </a:solidFill>
+                  </a:tcPr>
+                </a:tc>
+                <a:tc>
+                  <a:txBody>
+                    <a:bodyPr/>
+                    <a:lstStyle/>
+                    <a:p>
+                      <a:pPr algn="r"/>
+                      <a:r>
+                        <a:rPr sz="1200" b="0">
+                          <a:solidFill>
+                            <a:srgbClr val="000000"/>
+                          </a:solidFill>
+                          <a:latin typeface="Montserrat"/>
+                        </a:rPr>
+                        <a:t>315</a:t>
+                      </a:r>
+                    </a:p>
+                  </a:txBody>
+                  <a:tcPr anchor="ctr" marL="72000" marR="72000" marT="14400" marB="14400">
+                    <a:solidFill>
+                      <a:srgbClr val="F1F1F1"/>
+                    </a:solidFill>
+                  </a:tcPr>
+                </a:tc>
+                <a:tc>
+                  <a:txBody>
+                    <a:bodyPr/>
+                    <a:lstStyle/>
+                    <a:p>
+                      <a:pPr algn="r"/>
+                      <a:r>
+                        <a:rPr sz="1200" b="0">
+                          <a:solidFill>
+                            <a:srgbClr val="000000"/>
+                          </a:solidFill>
+                          <a:latin typeface="Montserrat"/>
+                        </a:rPr>
+                        <a:t>397</a:t>
+                      </a:r>
+                    </a:p>
+                  </a:txBody>
+                  <a:tcPr anchor="ctr" marL="72000" marR="72000" marT="14400" marB="14400">
+                    <a:solidFill>
+                      <a:srgbClr val="F1F1F1"/>
+                    </a:solidFill>
+                  </a:tcPr>
+                </a:tc>
+                <a:tc>
+                  <a:txBody>
+                    <a:bodyPr/>
+                    <a:lstStyle/>
+                    <a:p>
+                      <a:pPr algn="r"/>
+                      <a:r>
+                        <a:rPr sz="1200" b="0">
+                          <a:solidFill>
+                            <a:srgbClr val="000000"/>
+                          </a:solidFill>
+                          <a:latin typeface="Montserrat"/>
+                        </a:rPr>
+                        <a:t>ОФД +26%</a:t>
+                      </a:r>
+                    </a:p>
+                  </a:txBody>
+                  <a:tcPr anchor="ctr" marL="72000" marR="72000" marT="14400" marB="14400">
+                    <a:solidFill>
+                      <a:srgbClr val="F1F1F1"/>
+                    </a:solidFill>
+                  </a:tcPr>
+                </a:tc>
+              </a:tr>
+              <a:tr h="360000">
+                <a:tc>
+                  <a:txBody>
+                    <a:bodyPr/>
+                    <a:lstStyle/>
+                    <a:p>
+                      <a:pPr algn="l"/>
+                      <a:r>
+                        <a:rPr sz="1200" b="1">
+                          <a:solidFill>
+                            <a:srgbClr val="000000"/>
+                          </a:solidFill>
+                          <a:latin typeface="Montserrat"/>
+                        </a:rPr>
+                        <a:t>CPO — стоимость оплаты</a:t>
+                      </a:r>
+                    </a:p>
+                  </a:txBody>
+                  <a:tcPr anchor="ctr" marL="72000" marR="72000" marT="14400" marB="14400">
+                    <a:solidFill>
+                      <a:srgbClr val="FFFFFF"/>
+                    </a:solidFill>
+                  </a:tcPr>
+                </a:tc>
+                <a:tc>
+                  <a:txBody>
+                    <a:bodyPr/>
+                    <a:lstStyle/>
+                    <a:p>
+                      <a:pPr algn="r"/>
+                      <a:r>
+                        <a:rPr sz="1200" b="0">
+                          <a:solidFill>
+                            <a:srgbClr val="000000"/>
+                          </a:solidFill>
+                          <a:latin typeface="Montserrat"/>
+                        </a:rPr>
+                        <a:t>46,8 тыс ₽</a:t>
+                      </a:r>
+                    </a:p>
+                  </a:txBody>
+                  <a:tcPr anchor="ctr" marL="72000" marR="72000" marT="14400" marB="14400">
+                    <a:solidFill>
+                      <a:srgbClr val="FFFFFF"/>
+                    </a:solidFill>
+                  </a:tcPr>
+                </a:tc>
+                <a:tc>
+                  <a:txBody>
+                    <a:bodyPr/>
+                    <a:lstStyle/>
+                    <a:p>
+                      <a:pPr algn="r"/>
+                      <a:r>
+                        <a:rPr sz="1200" b="0">
+                          <a:solidFill>
+                            <a:srgbClr val="000000"/>
+                          </a:solidFill>
+                          <a:latin typeface="Montserrat"/>
+                        </a:rPr>
+                        <a:t>17,9 тыс ₽</a:t>
+                      </a:r>
+                    </a:p>
+                  </a:txBody>
+                  <a:tcPr anchor="ctr" marL="72000" marR="72000" marT="14400" marB="14400">
+                    <a:solidFill>
+                      <a:srgbClr val="FFFFFF"/>
+                    </a:solidFill>
+                  </a:tcPr>
+                </a:tc>
+                <a:tc>
+                  <a:txBody>
+                    <a:bodyPr/>
+                    <a:lstStyle/>
+                    <a:p>
+                      <a:pPr algn="r"/>
+                      <a:r>
+                        <a:rPr sz="1200" b="0">
+                          <a:solidFill>
+                            <a:srgbClr val="000000"/>
+                          </a:solidFill>
+                          <a:latin typeface="Montserrat"/>
+                        </a:rPr>
+                        <a:t>ОФД ×2,6 дешевле</a:t>
+                      </a:r>
+                    </a:p>
+                  </a:txBody>
+                  <a:tcPr anchor="ctr" marL="72000" marR="72000" marT="14400" marB="14400">
+                    <a:solidFill>
+                      <a:srgbClr val="FFFFFF"/>
+                    </a:solidFill>
+                  </a:tcPr>
+                </a:tc>
+              </a:tr>
+              <a:tr h="360000">
+                <a:tc>
+                  <a:txBody>
+                    <a:bodyPr/>
+                    <a:lstStyle/>
+                    <a:p>
+                      <a:pPr algn="l"/>
+                      <a:r>
+                        <a:rPr sz="1200" b="1">
+                          <a:solidFill>
+                            <a:srgbClr val="000000"/>
+                          </a:solidFill>
+                          <a:latin typeface="Montserrat"/>
+                        </a:rPr>
+                        <a:t>CPL — средний</a:t>
+                      </a:r>
+                    </a:p>
+                  </a:txBody>
+                  <a:tcPr anchor="ctr" marL="72000" marR="72000" marT="14400" marB="14400">
+                    <a:solidFill>
+                      <a:srgbClr val="F1F1F1"/>
+                    </a:solidFill>
+                  </a:tcPr>
+                </a:tc>
+                <a:tc>
+                  <a:txBody>
+                    <a:bodyPr/>
+                    <a:lstStyle/>
+                    <a:p>
+                      <a:pPr algn="r"/>
+                      <a:r>
+                        <a:rPr sz="1200" b="0">
+                          <a:solidFill>
+                            <a:srgbClr val="000000"/>
+                          </a:solidFill>
+                          <a:latin typeface="Montserrat"/>
+                        </a:rPr>
+                        <a:t>10,0 тыс ₽</a:t>
+                      </a:r>
+                    </a:p>
+                  </a:txBody>
+                  <a:tcPr anchor="ctr" marL="72000" marR="72000" marT="14400" marB="14400">
+                    <a:solidFill>
+                      <a:srgbClr val="F1F1F1"/>
+                    </a:solidFill>
+                  </a:tcPr>
+                </a:tc>
+                <a:tc>
+                  <a:txBody>
+                    <a:bodyPr/>
+                    <a:lstStyle/>
+                    <a:p>
+                      <a:pPr algn="r"/>
+                      <a:r>
+                        <a:rPr sz="1200" b="0">
+                          <a:solidFill>
+                            <a:srgbClr val="000000"/>
+                          </a:solidFill>
+                          <a:latin typeface="Montserrat"/>
+                        </a:rPr>
+                        <a:t>4,5 тыс ₽</a:t>
+                      </a:r>
+                    </a:p>
+                  </a:txBody>
+                  <a:tcPr anchor="ctr" marL="72000" marR="72000" marT="14400" marB="14400">
+                    <a:solidFill>
+                      <a:srgbClr val="F1F1F1"/>
+                    </a:solidFill>
+                  </a:tcPr>
+                </a:tc>
+                <a:tc>
+                  <a:txBody>
+                    <a:bodyPr/>
+                    <a:lstStyle/>
+                    <a:p>
+                      <a:pPr algn="r"/>
+                      <a:r>
+                        <a:rPr sz="1200" b="0">
+                          <a:solidFill>
+                            <a:srgbClr val="000000"/>
+                          </a:solidFill>
+                          <a:latin typeface="Montserrat"/>
+                        </a:rPr>
+                        <a:t>ОФД ×2,2 дешевле</a:t>
+                      </a:r>
+                    </a:p>
+                  </a:txBody>
+                  <a:tcPr anchor="ctr" marL="72000" marR="72000" marT="14400" marB="14400">
+                    <a:solidFill>
+                      <a:srgbClr val="F1F1F1"/>
+                    </a:solidFill>
+                  </a:tcPr>
+                </a:tc>
+              </a:tr>
+              <a:tr h="360000">
+                <a:tc>
+                  <a:txBody>
+                    <a:bodyPr/>
+                    <a:lstStyle/>
+                    <a:p>
+                      <a:pPr algn="l"/>
+                      <a:r>
+                        <a:rPr sz="1200" b="1">
+                          <a:solidFill>
+                            <a:srgbClr val="000000"/>
+                          </a:solidFill>
+                          <a:latin typeface="Montserrat"/>
+                        </a:rPr>
+                        <a:t>Выручка по целевым лидам</a:t>
+                      </a:r>
+                    </a:p>
+                  </a:txBody>
+                  <a:tcPr anchor="ctr" marL="72000" marR="72000" marT="14400" marB="14400">
+                    <a:solidFill>
+                      <a:srgbClr val="FFFFFF"/>
+                    </a:solidFill>
+                  </a:tcPr>
+                </a:tc>
+                <a:tc>
+                  <a:txBody>
+                    <a:bodyPr/>
+                    <a:lstStyle/>
+                    <a:p>
+                      <a:pPr algn="r"/>
+                      <a:r>
+                        <a:rPr sz="1200" b="0">
+                          <a:solidFill>
+                            <a:srgbClr val="000000"/>
+                          </a:solidFill>
+                          <a:latin typeface="Montserrat"/>
+                        </a:rPr>
+                        <a:t>3,9 млн ₽</a:t>
+                      </a:r>
+                    </a:p>
+                  </a:txBody>
+                  <a:tcPr anchor="ctr" marL="72000" marR="72000" marT="14400" marB="14400">
+                    <a:solidFill>
+                      <a:srgbClr val="FFFFFF"/>
+                    </a:solidFill>
+                  </a:tcPr>
+                </a:tc>
+                <a:tc>
+                  <a:txBody>
+                    <a:bodyPr/>
+                    <a:lstStyle/>
+                    <a:p>
+                      <a:pPr algn="r"/>
+                      <a:r>
+                        <a:rPr sz="1200" b="0">
+                          <a:solidFill>
+                            <a:srgbClr val="000000"/>
+                          </a:solidFill>
+                          <a:latin typeface="Montserrat"/>
+                        </a:rPr>
+                        <a:t>2,8 млн ₽</a:t>
+                      </a:r>
+                    </a:p>
+                  </a:txBody>
+                  <a:tcPr anchor="ctr" marL="72000" marR="72000" marT="14400" marB="14400">
+                    <a:solidFill>
+                      <a:srgbClr val="FFFFFF"/>
+                    </a:solidFill>
+                  </a:tcPr>
+                </a:tc>
+                <a:tc>
+                  <a:txBody>
+                    <a:bodyPr/>
+                    <a:lstStyle/>
+                    <a:p>
+                      <a:pPr algn="r"/>
+                      <a:r>
+                        <a:rPr sz="1200" b="0">
+                          <a:solidFill>
+                            <a:srgbClr val="000000"/>
+                          </a:solidFill>
+                          <a:latin typeface="Montserrat"/>
+                        </a:rPr>
+                        <a:t>—</a:t>
+                      </a:r>
+                    </a:p>
+                  </a:txBody>
+                  <a:tcPr anchor="ctr" marL="72000" marR="72000" marT="14400" marB="14400">
+                    <a:solidFill>
+                      <a:srgbClr val="FFFFFF"/>
+                    </a:solidFill>
+                  </a:tcPr>
+                </a:tc>
+              </a:tr>
+              <a:tr h="360000">
+                <a:tc>
+                  <a:txBody>
+                    <a:bodyPr/>
+                    <a:lstStyle/>
+                    <a:p>
+                      <a:pPr algn="l"/>
+                      <a:r>
+                        <a:rPr sz="1200" b="1">
+                          <a:solidFill>
+                            <a:srgbClr val="000000"/>
+                          </a:solidFill>
+                          <a:latin typeface="Montserrat"/>
+                        </a:rPr>
+                        <a:t>ДРР (расход / выручка)</a:t>
+                      </a:r>
+                    </a:p>
+                  </a:txBody>
+                  <a:tcPr anchor="ctr" marL="72000" marR="72000" marT="14400" marB="14400">
+                    <a:solidFill>
+                      <a:srgbClr val="F1F1F1"/>
+                    </a:solidFill>
+                  </a:tcPr>
+                </a:tc>
+                <a:tc>
+                  <a:txBody>
+                    <a:bodyPr/>
+                    <a:lstStyle/>
+                    <a:p>
+                      <a:pPr algn="r"/>
+                      <a:r>
+                        <a:rPr sz="1200" b="0">
+                          <a:solidFill>
+                            <a:srgbClr val="000000"/>
+                          </a:solidFill>
+                          <a:latin typeface="Montserrat"/>
+                        </a:rPr>
+                        <a:t>≈ 3,8×</a:t>
+                      </a:r>
+                    </a:p>
+                  </a:txBody>
+                  <a:tcPr anchor="ctr" marL="72000" marR="72000" marT="14400" marB="14400">
+                    <a:solidFill>
+                      <a:srgbClr val="F1F1F1"/>
+                    </a:solidFill>
+                  </a:tcPr>
+                </a:tc>
+                <a:tc>
+                  <a:txBody>
+                    <a:bodyPr/>
+                    <a:lstStyle/>
+                    <a:p>
+                      <a:pPr algn="r"/>
+                      <a:r>
+                        <a:rPr sz="1200" b="0">
+                          <a:solidFill>
+                            <a:srgbClr val="000000"/>
+                          </a:solidFill>
+                          <a:latin typeface="Montserrat"/>
+                        </a:rPr>
+                        <a:t>≈ 2,5×</a:t>
+                      </a:r>
+                    </a:p>
+                  </a:txBody>
+                  <a:tcPr anchor="ctr" marL="72000" marR="72000" marT="14400" marB="14400">
+                    <a:solidFill>
+                      <a:srgbClr val="F1F1F1"/>
+                    </a:solidFill>
+                  </a:tcPr>
+                </a:tc>
+                <a:tc>
+                  <a:txBody>
+                    <a:bodyPr/>
+                    <a:lstStyle/>
+                    <a:p>
+                      <a:pPr algn="r"/>
+                      <a:r>
+                        <a:rPr sz="1200" b="0">
+                          <a:solidFill>
+                            <a:srgbClr val="000000"/>
+                          </a:solidFill>
+                          <a:latin typeface="Montserrat"/>
+                        </a:rPr>
+                        <a:t>ОФД эффективнее</a:t>
+                      </a:r>
+                    </a:p>
+                  </a:txBody>
+                  <a:tcPr anchor="ctr" marL="72000" marR="72000" marT="14400" marB="14400">
+                    <a:solidFill>
+                      <a:srgbClr val="F1F1F1"/>
+                    </a:solidFill>
+                  </a:tcPr>
+                </a:tc>
+              </a:tr>
+            </a:tbl>
+          </a:graphicData>
+        </a:graphic>
+      </p:graphicFrame>
     </p:spTree>
   </p:cSld>
   <p:clrMapOvr>
@@ -53177,7 +50790,7 @@
 </p:sld>
 </file>
 
-<file path=ppt/slides/slide95.xml><?xml version="1.0" encoding="utf-8"?>
+<file path=ppt/slides/slide94.xml><?xml version="1.0" encoding="utf-8"?>
 <p:sld xmlns:a="http://schemas.openxmlformats.org/drawingml/2006/main" xmlns:p="http://schemas.openxmlformats.org/presentationml/2006/main" xmlns:r="http://schemas.openxmlformats.org/officeDocument/2006/relationships">
   <p:cSld>
     <p:spTree>
@@ -53851,7 +51464,7 @@
 </p:sld>
 </file>
 
-<file path=ppt/slides/slide96.xml><?xml version="1.0" encoding="utf-8"?>
+<file path=ppt/slides/slide95.xml><?xml version="1.0" encoding="utf-8"?>
 <p:sld xmlns:a="http://schemas.openxmlformats.org/drawingml/2006/main" xmlns:p="http://schemas.openxmlformats.org/presentationml/2006/main" xmlns:r="http://schemas.openxmlformats.org/officeDocument/2006/relationships">
   <p:cSld>
     <p:spTree>
